--- a/Slides/04. Ngrok說明.pptx
+++ b/Slides/04. Ngrok說明.pptx
@@ -6,7 +6,7 @@
     <p:sldMasterId id="2147483660" r:id="rId2"/>
   </p:sldMasterIdLst>
   <p:notesMasterIdLst>
-    <p:notesMasterId r:id="rId64"/>
+    <p:notesMasterId r:id="rId48"/>
   </p:notesMasterIdLst>
   <p:sldIdLst>
     <p:sldId id="681" r:id="rId3"/>
@@ -51,25 +51,9 @@
     <p:sldId id="1412" r:id="rId42"/>
     <p:sldId id="1419" r:id="rId43"/>
     <p:sldId id="1359" r:id="rId44"/>
-    <p:sldId id="1360" r:id="rId45"/>
-    <p:sldId id="1361" r:id="rId46"/>
-    <p:sldId id="1362" r:id="rId47"/>
-    <p:sldId id="1363" r:id="rId48"/>
-    <p:sldId id="1364" r:id="rId49"/>
-    <p:sldId id="1365" r:id="rId50"/>
-    <p:sldId id="1366" r:id="rId51"/>
-    <p:sldId id="1367" r:id="rId52"/>
-    <p:sldId id="1368" r:id="rId53"/>
-    <p:sldId id="1369" r:id="rId54"/>
-    <p:sldId id="1370" r:id="rId55"/>
-    <p:sldId id="1371" r:id="rId56"/>
-    <p:sldId id="1372" r:id="rId57"/>
-    <p:sldId id="1373" r:id="rId58"/>
-    <p:sldId id="1374" r:id="rId59"/>
-    <p:sldId id="1375" r:id="rId60"/>
-    <p:sldId id="1376" r:id="rId61"/>
-    <p:sldId id="1377" r:id="rId62"/>
-    <p:sldId id="1378" r:id="rId63"/>
+    <p:sldId id="1376" r:id="rId45"/>
+    <p:sldId id="1377" r:id="rId46"/>
+    <p:sldId id="1378" r:id="rId47"/>
   </p:sldIdLst>
   <p:sldSz cx="9144000" cy="6858000" type="screen4x3"/>
   <p:notesSz cx="6858000" cy="9144000"/>
@@ -258,7 +242,7 @@
           <a:p>
             <a:fld id="{90CC8E63-1016-4C78-A51D-85D69DBCD8EF}" type="datetimeFigureOut">
               <a:rPr lang="zh-TW" altLang="en-US" smtClean="0"/>
-              <a:t>2026/3/26</a:t>
+              <a:t>2026/4/16</a:t>
             </a:fld>
             <a:endParaRPr lang="zh-TW" altLang="en-US"/>
           </a:p>
@@ -6154,7 +6138,7 @@
           <a:p>
             <a:fld id="{2E29796B-F55F-40BA-947E-19D03180300F}" type="datetimeFigureOut">
               <a:rPr lang="zh-TW" altLang="en-US" smtClean="0"/>
-              <a:t>2026/3/26</a:t>
+              <a:t>2026/4/16</a:t>
             </a:fld>
             <a:endParaRPr lang="zh-TW" altLang="en-US"/>
           </a:p>
@@ -6352,7 +6336,7 @@
           <a:p>
             <a:fld id="{2E29796B-F55F-40BA-947E-19D03180300F}" type="datetimeFigureOut">
               <a:rPr lang="zh-TW" altLang="en-US" smtClean="0"/>
-              <a:t>2026/3/26</a:t>
+              <a:t>2026/4/16</a:t>
             </a:fld>
             <a:endParaRPr lang="zh-TW" altLang="en-US"/>
           </a:p>
@@ -6560,7 +6544,7 @@
           <a:p>
             <a:fld id="{2E29796B-F55F-40BA-947E-19D03180300F}" type="datetimeFigureOut">
               <a:rPr lang="zh-TW" altLang="en-US" smtClean="0"/>
-              <a:t>2026/3/26</a:t>
+              <a:t>2026/4/16</a:t>
             </a:fld>
             <a:endParaRPr lang="zh-TW" altLang="en-US"/>
           </a:p>
@@ -6941,7 +6925,7 @@
                 </a:solidFill>
               </a:rPr>
               <a:pPr/>
-              <a:t>3/26/2026</a:t>
+              <a:t>4/16/2026</a:t>
             </a:fld>
             <a:endParaRPr kumimoji="0" lang="en-US" dirty="0"/>
           </a:p>
@@ -7172,7 +7156,7 @@
                 </a:solidFill>
               </a:rPr>
               <a:pPr/>
-              <a:t>3/26/2026</a:t>
+              <a:t>4/16/2026</a:t>
             </a:fld>
             <a:endParaRPr kumimoji="0" lang="en-US" dirty="0"/>
           </a:p>
@@ -7405,7 +7389,7 @@
                 </a:solidFill>
               </a:rPr>
               <a:pPr/>
-              <a:t>3/26/2026</a:t>
+              <a:t>4/16/2026</a:t>
             </a:fld>
             <a:endParaRPr kumimoji="0" lang="en-US" dirty="0"/>
           </a:p>
@@ -7887,7 +7871,7 @@
                 </a:solidFill>
               </a:rPr>
               <a:pPr/>
-              <a:t>3/26/2026</a:t>
+              <a:t>4/16/2026</a:t>
             </a:fld>
             <a:endParaRPr kumimoji="0" lang="en-US" dirty="0"/>
           </a:p>
@@ -8244,7 +8228,7 @@
                 </a:solidFill>
               </a:rPr>
               <a:pPr/>
-              <a:t>3/26/2026</a:t>
+              <a:t>4/16/2026</a:t>
             </a:fld>
             <a:endParaRPr kumimoji="0" lang="en-US" dirty="0"/>
           </a:p>
@@ -8607,7 +8591,7 @@
                 </a:solidFill>
               </a:rPr>
               <a:pPr/>
-              <a:t>3/26/2026</a:t>
+              <a:t>4/16/2026</a:t>
             </a:fld>
             <a:endParaRPr kumimoji="0" lang="en-US" dirty="0"/>
           </a:p>
@@ -8917,7 +8901,7 @@
                 </a:solidFill>
               </a:rPr>
               <a:pPr/>
-              <a:t>3/26/2026</a:t>
+              <a:t>4/16/2026</a:t>
             </a:fld>
             <a:endParaRPr kumimoji="0" lang="en-US" dirty="0"/>
           </a:p>
@@ -9112,7 +9096,7 @@
           <a:p>
             <a:fld id="{2E29796B-F55F-40BA-947E-19D03180300F}" type="datetimeFigureOut">
               <a:rPr lang="zh-TW" altLang="en-US" smtClean="0"/>
-              <a:t>2026/3/26</a:t>
+              <a:t>2026/4/16</a:t>
             </a:fld>
             <a:endParaRPr lang="zh-TW" altLang="en-US"/>
           </a:p>
@@ -9596,7 +9580,7 @@
                 </a:solidFill>
               </a:rPr>
               <a:pPr/>
-              <a:t>3/26/2026</a:t>
+              <a:t>4/16/2026</a:t>
             </a:fld>
             <a:endParaRPr kumimoji="0" lang="en-US" dirty="0"/>
           </a:p>
@@ -9992,7 +9976,7 @@
                 </a:solidFill>
               </a:rPr>
               <a:pPr/>
-              <a:t>3/26/2026</a:t>
+              <a:t>4/16/2026</a:t>
             </a:fld>
             <a:endParaRPr kumimoji="0" lang="en-US" dirty="0"/>
           </a:p>
@@ -10332,7 +10316,7 @@
                 </a:solidFill>
               </a:rPr>
               <a:pPr/>
-              <a:t>3/26/2026</a:t>
+              <a:t>4/16/2026</a:t>
             </a:fld>
             <a:endParaRPr kumimoji="0" lang="en-US" dirty="0"/>
           </a:p>
@@ -10913,7 +10897,7 @@
                 </a:solidFill>
               </a:rPr>
               <a:pPr/>
-              <a:t>3/26/2026</a:t>
+              <a:t>4/16/2026</a:t>
             </a:fld>
             <a:endParaRPr kumimoji="0" lang="en-US" dirty="0"/>
           </a:p>
@@ -11482,7 +11466,7 @@
                 </a:solidFill>
               </a:rPr>
               <a:pPr/>
-              <a:t>3/26/2026</a:t>
+              <a:t>4/16/2026</a:t>
             </a:fld>
             <a:endParaRPr kumimoji="0" lang="en-US" dirty="0"/>
           </a:p>
@@ -11946,7 +11930,7 @@
                 </a:solidFill>
               </a:rPr>
               <a:pPr/>
-              <a:t>3/26/2026</a:t>
+              <a:t>4/16/2026</a:t>
             </a:fld>
             <a:endParaRPr kumimoji="0" lang="en-US" dirty="0"/>
           </a:p>
@@ -12375,7 +12359,7 @@
                 </a:solidFill>
               </a:rPr>
               <a:pPr/>
-              <a:t>3/26/2026</a:t>
+              <a:t>4/16/2026</a:t>
             </a:fld>
             <a:endParaRPr kumimoji="0" lang="en-US" dirty="0"/>
           </a:p>
@@ -12884,7 +12868,7 @@
                 </a:solidFill>
               </a:rPr>
               <a:pPr/>
-              <a:t>3/26/2026</a:t>
+              <a:t>4/16/2026</a:t>
             </a:fld>
             <a:endParaRPr kumimoji="0" lang="en-US" dirty="0"/>
           </a:p>
@@ -13393,7 +13377,7 @@
                 </a:solidFill>
               </a:rPr>
               <a:pPr/>
-              <a:t>3/26/2026</a:t>
+              <a:t>4/16/2026</a:t>
             </a:fld>
             <a:endParaRPr kumimoji="0" lang="en-US" dirty="0"/>
           </a:p>
@@ -13614,7 +13598,7 @@
                 </a:solidFill>
               </a:rPr>
               <a:pPr/>
-              <a:t>3/26/2026</a:t>
+              <a:t>4/16/2026</a:t>
             </a:fld>
             <a:endParaRPr kumimoji="0" lang="en-US" dirty="0"/>
           </a:p>
@@ -13886,7 +13870,7 @@
           <a:p>
             <a:fld id="{2E29796B-F55F-40BA-947E-19D03180300F}" type="datetimeFigureOut">
               <a:rPr lang="zh-TW" altLang="en-US" smtClean="0"/>
-              <a:t>2026/3/26</a:t>
+              <a:t>2026/4/16</a:t>
             </a:fld>
             <a:endParaRPr lang="zh-TW" altLang="en-US"/>
           </a:p>
@@ -14222,7 +14206,7 @@
                 </a:solidFill>
               </a:rPr>
               <a:pPr/>
-              <a:t>3/26/2026</a:t>
+              <a:t>4/16/2026</a:t>
             </a:fld>
             <a:endParaRPr kumimoji="0" lang="en-US" dirty="0"/>
           </a:p>
@@ -14446,7 +14430,7 @@
                 </a:solidFill>
               </a:rPr>
               <a:pPr/>
-              <a:t>3/26/2026</a:t>
+              <a:t>4/16/2026</a:t>
             </a:fld>
             <a:endParaRPr kumimoji="0" lang="en-US" dirty="0"/>
           </a:p>
@@ -14627,7 +14611,7 @@
             <a:fld id="{ACB2EC6F-6501-4E04-BD6C-A8A6CABB2C5B}" type="datetimeFigureOut">
               <a:rPr kumimoji="0" lang="en-US" smtClean="0"/>
               <a:pPr/>
-              <a:t>3/26/2026</a:t>
+              <a:t>4/16/2026</a:t>
             </a:fld>
             <a:endParaRPr kumimoji="0" lang="en-US" dirty="0"/>
           </a:p>
@@ -14911,7 +14895,7 @@
           <a:p>
             <a:fld id="{2E29796B-F55F-40BA-947E-19D03180300F}" type="datetimeFigureOut">
               <a:rPr lang="zh-TW" altLang="en-US" smtClean="0"/>
-              <a:t>2026/3/26</a:t>
+              <a:t>2026/4/16</a:t>
             </a:fld>
             <a:endParaRPr lang="zh-TW" altLang="en-US"/>
           </a:p>
@@ -15323,7 +15307,7 @@
           <a:p>
             <a:fld id="{2E29796B-F55F-40BA-947E-19D03180300F}" type="datetimeFigureOut">
               <a:rPr lang="zh-TW" altLang="en-US" smtClean="0"/>
-              <a:t>2026/3/26</a:t>
+              <a:t>2026/4/16</a:t>
             </a:fld>
             <a:endParaRPr lang="zh-TW" altLang="en-US"/>
           </a:p>
@@ -15464,7 +15448,7 @@
           <a:p>
             <a:fld id="{2E29796B-F55F-40BA-947E-19D03180300F}" type="datetimeFigureOut">
               <a:rPr lang="zh-TW" altLang="en-US" smtClean="0"/>
-              <a:t>2026/3/26</a:t>
+              <a:t>2026/4/16</a:t>
             </a:fld>
             <a:endParaRPr lang="zh-TW" altLang="en-US"/>
           </a:p>
@@ -15577,7 +15561,7 @@
           <a:p>
             <a:fld id="{2E29796B-F55F-40BA-947E-19D03180300F}" type="datetimeFigureOut">
               <a:rPr lang="zh-TW" altLang="en-US" smtClean="0"/>
-              <a:t>2026/3/26</a:t>
+              <a:t>2026/4/16</a:t>
             </a:fld>
             <a:endParaRPr lang="zh-TW" altLang="en-US"/>
           </a:p>
@@ -15888,7 +15872,7 @@
           <a:p>
             <a:fld id="{2E29796B-F55F-40BA-947E-19D03180300F}" type="datetimeFigureOut">
               <a:rPr lang="zh-TW" altLang="en-US" smtClean="0"/>
-              <a:t>2026/3/26</a:t>
+              <a:t>2026/4/16</a:t>
             </a:fld>
             <a:endParaRPr lang="zh-TW" altLang="en-US"/>
           </a:p>
@@ -16176,7 +16160,7 @@
           <a:p>
             <a:fld id="{2E29796B-F55F-40BA-947E-19D03180300F}" type="datetimeFigureOut">
               <a:rPr lang="zh-TW" altLang="en-US" smtClean="0"/>
-              <a:t>2026/3/26</a:t>
+              <a:t>2026/4/16</a:t>
             </a:fld>
             <a:endParaRPr lang="zh-TW" altLang="en-US"/>
           </a:p>
@@ -16417,7 +16401,7 @@
           <a:p>
             <a:fld id="{2E29796B-F55F-40BA-947E-19D03180300F}" type="datetimeFigureOut">
               <a:rPr lang="zh-TW" altLang="en-US" smtClean="0"/>
-              <a:t>2026/3/26</a:t>
+              <a:t>2026/4/16</a:t>
             </a:fld>
             <a:endParaRPr lang="zh-TW" altLang="en-US"/>
           </a:p>
@@ -16989,7 +16973,7 @@
                 </a:solidFill>
               </a:rPr>
               <a:pPr/>
-              <a:t>3/26/2026</a:t>
+              <a:t>4/16/2026</a:t>
             </a:fld>
             <a:endParaRPr kumimoji="0" lang="en-US" sz="1200" dirty="0">
               <a:solidFill>
@@ -17622,17 +17606,17 @@
               <a:t>年</a:t>
             </a:r>
             <a:r>
-              <a:rPr lang="en-US" altLang="zh-TW" sz="2400" b="1">
+              <a:rPr lang="en-US" altLang="zh-TW" sz="2400" b="1" dirty="0">
                 <a:solidFill>
                   <a:prstClr val="white"/>
                 </a:solidFill>
                 <a:latin typeface="微軟正黑體" panose="020B0604030504040204" pitchFamily="34" charset="-120"/>
                 <a:ea typeface="微軟正黑體" panose="020B0604030504040204" pitchFamily="34" charset="-120"/>
               </a:rPr>
-              <a:t>3-4</a:t>
-            </a:r>
-            <a:r>
-              <a:rPr lang="zh-TW" altLang="en-US" sz="2400" b="1">
+              <a:t>4</a:t>
+            </a:r>
+            <a:r>
+              <a:rPr lang="zh-TW" altLang="en-US" sz="2400" b="1" dirty="0">
                 <a:solidFill>
                   <a:prstClr val="white"/>
                 </a:solidFill>
@@ -29183,10 +29167,10 @@
       </p:sp>
       <p:pic>
         <p:nvPicPr>
-          <p:cNvPr id="3" name="圖片 2">
+          <p:cNvPr id="6" name="圖片 5">
             <a:extLst>
               <a:ext uri="{FF2B5EF4-FFF2-40B4-BE49-F238E27FC236}">
-                <a16:creationId xmlns:a16="http://schemas.microsoft.com/office/drawing/2014/main" id="{F07104EE-8AF5-C9C4-72EF-7582B6A92D03}"/>
+                <a16:creationId xmlns:a16="http://schemas.microsoft.com/office/drawing/2014/main" id="{BCD8FF27-E705-E392-0E6B-E4BB3E47D4E8}"/>
               </a:ext>
             </a:extLst>
           </p:cNvPr>
@@ -29196,21 +29180,15 @@
           <p:nvPr/>
         </p:nvPicPr>
         <p:blipFill>
-          <a:blip r:embed="rId3">
-            <a:extLst>
-              <a:ext uri="{28A0092B-C50C-407E-A947-70E740481C1C}">
-                <a14:useLocalDpi xmlns:a14="http://schemas.microsoft.com/office/drawing/2010/main" val="0"/>
-              </a:ext>
-            </a:extLst>
-          </a:blip>
+          <a:blip r:embed="rId3"/>
           <a:stretch>
             <a:fillRect/>
           </a:stretch>
         </p:blipFill>
         <p:spPr>
           <a:xfrm>
-            <a:off x="918148" y="2156336"/>
-            <a:ext cx="6872989" cy="4413986"/>
+            <a:off x="1098958" y="2153867"/>
+            <a:ext cx="6946084" cy="4589833"/>
           </a:xfrm>
           <a:prstGeom prst="rect">
             <a:avLst/>
@@ -33848,10 +33826,10 @@
       </p:sp>
       <p:pic>
         <p:nvPicPr>
-          <p:cNvPr id="6" name="圖片 5">
+          <p:cNvPr id="3" name="圖片 2">
             <a:extLst>
               <a:ext uri="{FF2B5EF4-FFF2-40B4-BE49-F238E27FC236}">
-                <a16:creationId xmlns:a16="http://schemas.microsoft.com/office/drawing/2014/main" id="{0928D2B6-4BD2-3B46-4C3F-83E1A63BE7B5}"/>
+                <a16:creationId xmlns:a16="http://schemas.microsoft.com/office/drawing/2014/main" id="{4230FE9B-067C-2453-3543-64EB89E51561}"/>
               </a:ext>
             </a:extLst>
           </p:cNvPr>
@@ -33861,21 +33839,15 @@
           <p:nvPr/>
         </p:nvPicPr>
         <p:blipFill>
-          <a:blip r:embed="rId3">
-            <a:extLst>
-              <a:ext uri="{28A0092B-C50C-407E-A947-70E740481C1C}">
-                <a14:useLocalDpi xmlns:a14="http://schemas.microsoft.com/office/drawing/2010/main" val="0"/>
-              </a:ext>
-            </a:extLst>
-          </a:blip>
+          <a:blip r:embed="rId3"/>
           <a:stretch>
             <a:fillRect/>
           </a:stretch>
         </p:blipFill>
         <p:spPr>
           <a:xfrm>
-            <a:off x="664677" y="2297493"/>
-            <a:ext cx="7490998" cy="3213594"/>
+            <a:off x="914398" y="2192907"/>
+            <a:ext cx="6828639" cy="4799317"/>
           </a:xfrm>
           <a:prstGeom prst="rect">
             <a:avLst/>
@@ -34570,12 +34542,115 @@
           <a:chExt cx="0" cy="0"/>
         </a:xfrm>
       </p:grpSpPr>
+      <p:sp>
+        <p:nvSpPr>
+          <p:cNvPr id="2" name="文字版面配置區 2">
+            <a:extLst>
+              <a:ext uri="{FF2B5EF4-FFF2-40B4-BE49-F238E27FC236}">
+                <a16:creationId xmlns:a16="http://schemas.microsoft.com/office/drawing/2014/main" id="{DB2FAA46-9B2A-DC8E-8996-377E71D9CC5C}"/>
+              </a:ext>
+            </a:extLst>
+          </p:cNvPr>
+          <p:cNvSpPr txBox="1">
+            <a:spLocks/>
+          </p:cNvSpPr>
+          <p:nvPr/>
+        </p:nvSpPr>
+        <p:spPr>
+          <a:xfrm>
+            <a:off x="1827994" y="188728"/>
+            <a:ext cx="5488011" cy="990600"/>
+          </a:xfrm>
+          <a:prstGeom prst="rect">
+            <a:avLst/>
+          </a:prstGeom>
+        </p:spPr>
+        <p:txBody>
+          <a:bodyPr tIns="91440" bIns="91440" anchor="b" anchorCtr="0">
+            <a:noAutofit/>
+          </a:bodyPr>
+          <a:lstStyle/>
+          <a:p>
+            <a:pPr algn="just">
+              <a:spcBef>
+                <a:spcPct val="20000"/>
+              </a:spcBef>
+              <a:defRPr/>
+            </a:pPr>
+            <a:r>
+              <a:rPr lang="zh-TW" altLang="en-US" sz="4000" b="1" kern="0" dirty="0">
+                <a:solidFill>
+                  <a:srgbClr val="00B0F0"/>
+                </a:solidFill>
+                <a:effectLst>
+                  <a:outerShdw blurRad="38100" dist="38100" dir="2700000" algn="tl">
+                    <a:srgbClr val="000000">
+                      <a:alpha val="43137"/>
+                    </a:srgbClr>
+                  </a:outerShdw>
+                </a:effectLst>
+                <a:latin typeface="微軟正黑體" panose="020B0604030504040204" pitchFamily="34" charset="-120"/>
+                <a:ea typeface="微軟正黑體" panose="020B0604030504040204" pitchFamily="34" charset="-120"/>
+              </a:rPr>
+              <a:t>如果是</a:t>
+            </a:r>
+            <a:r>
+              <a:rPr lang="en-US" altLang="zh-TW" sz="4000" b="1" kern="0" dirty="0">
+                <a:solidFill>
+                  <a:srgbClr val="00B0F0"/>
+                </a:solidFill>
+                <a:effectLst>
+                  <a:outerShdw blurRad="38100" dist="38100" dir="2700000" algn="tl">
+                    <a:srgbClr val="000000">
+                      <a:alpha val="43137"/>
+                    </a:srgbClr>
+                  </a:outerShdw>
+                </a:effectLst>
+                <a:latin typeface="微軟正黑體" panose="020B0604030504040204" pitchFamily="34" charset="-120"/>
+                <a:ea typeface="微軟正黑體" panose="020B0604030504040204" pitchFamily="34" charset="-120"/>
+              </a:rPr>
+              <a:t>Google </a:t>
+            </a:r>
+            <a:r>
+              <a:rPr lang="en-US" altLang="zh-TW" sz="4000" b="1" kern="0" dirty="0" err="1">
+                <a:solidFill>
+                  <a:srgbClr val="00B0F0"/>
+                </a:solidFill>
+                <a:effectLst>
+                  <a:outerShdw blurRad="38100" dist="38100" dir="2700000" algn="tl">
+                    <a:srgbClr val="000000">
+                      <a:alpha val="43137"/>
+                    </a:srgbClr>
+                  </a:outerShdw>
+                </a:effectLst>
+                <a:latin typeface="微軟正黑體" panose="020B0604030504040204" pitchFamily="34" charset="-120"/>
+                <a:ea typeface="微軟正黑體" panose="020B0604030504040204" pitchFamily="34" charset="-120"/>
+              </a:rPr>
+              <a:t>Colab</a:t>
+            </a:r>
+            <a:endParaRPr lang="zh-TW" altLang="en-US" sz="4000" b="1" kern="0" dirty="0">
+              <a:solidFill>
+                <a:srgbClr val="00B0F0"/>
+              </a:solidFill>
+              <a:effectLst>
+                <a:outerShdw blurRad="38100" dist="38100" dir="2700000" algn="tl">
+                  <a:srgbClr val="000000">
+                    <a:alpha val="43137"/>
+                  </a:srgbClr>
+                </a:outerShdw>
+              </a:effectLst>
+              <a:latin typeface="微軟正黑體" panose="020B0604030504040204" pitchFamily="34" charset="-120"/>
+              <a:ea typeface="微軟正黑體" panose="020B0604030504040204" pitchFamily="34" charset="-120"/>
+            </a:endParaRPr>
+          </a:p>
+        </p:txBody>
+      </p:sp>
       <p:pic>
         <p:nvPicPr>
-          <p:cNvPr id="4" name="圖片 3">
+          <p:cNvPr id="6" name="圖片 5">
             <a:extLst>
               <a:ext uri="{FF2B5EF4-FFF2-40B4-BE49-F238E27FC236}">
-                <a16:creationId xmlns:a16="http://schemas.microsoft.com/office/drawing/2014/main" id="{45413C78-E772-8827-8309-63780F225E73}"/>
+                <a16:creationId xmlns:a16="http://schemas.microsoft.com/office/drawing/2014/main" id="{360359E3-2068-957A-287D-F39262BB2196}"/>
               </a:ext>
             </a:extLst>
           </p:cNvPr>
@@ -34592,192 +34667,18 @@
         </p:blipFill>
         <p:spPr>
           <a:xfrm>
-            <a:off x="0" y="1101146"/>
-            <a:ext cx="9144000" cy="4655707"/>
+            <a:off x="320029" y="1759698"/>
+            <a:ext cx="8503942" cy="4260101"/>
           </a:xfrm>
           <a:prstGeom prst="rect">
             <a:avLst/>
           </a:prstGeom>
         </p:spPr>
       </p:pic>
-      <p:sp>
-        <p:nvSpPr>
-          <p:cNvPr id="6" name="文字版面配置區 2">
-            <a:extLst>
-              <a:ext uri="{FF2B5EF4-FFF2-40B4-BE49-F238E27FC236}">
-                <a16:creationId xmlns:a16="http://schemas.microsoft.com/office/drawing/2014/main" id="{DC362AB1-BDCB-D11A-89BE-0A2EC77A4AD2}"/>
-              </a:ext>
-            </a:extLst>
-          </p:cNvPr>
-          <p:cNvSpPr txBox="1">
-            <a:spLocks/>
-          </p:cNvSpPr>
-          <p:nvPr/>
-        </p:nvSpPr>
-        <p:spPr>
-          <a:xfrm>
-            <a:off x="1373707" y="110010"/>
-            <a:ext cx="7407034" cy="990600"/>
-          </a:xfrm>
-          <a:prstGeom prst="rect">
-            <a:avLst/>
-          </a:prstGeom>
-        </p:spPr>
-        <p:txBody>
-          <a:bodyPr tIns="91440" bIns="91440" anchor="b" anchorCtr="0">
-            <a:noAutofit/>
-          </a:bodyPr>
-          <a:lstStyle/>
-          <a:p>
-            <a:pPr algn="just">
-              <a:spcBef>
-                <a:spcPct val="20000"/>
-              </a:spcBef>
-              <a:defRPr/>
-            </a:pPr>
-            <a:r>
-              <a:rPr lang="zh-TW" altLang="en-US" sz="4800" b="1" kern="0" dirty="0">
-                <a:solidFill>
-                  <a:srgbClr val="00B0F0"/>
-                </a:solidFill>
-                <a:effectLst>
-                  <a:outerShdw blurRad="38100" dist="38100" dir="2700000" algn="tl">
-                    <a:srgbClr val="000000">
-                      <a:alpha val="43137"/>
-                    </a:srgbClr>
-                  </a:outerShdw>
-                </a:effectLst>
-                <a:latin typeface="微軟正黑體" panose="020B0604030504040204" pitchFamily="34" charset="-120"/>
-                <a:ea typeface="微軟正黑體" panose="020B0604030504040204" pitchFamily="34" charset="-120"/>
-              </a:rPr>
-              <a:t>在開發環境中設定變數</a:t>
-            </a:r>
-          </a:p>
-        </p:txBody>
-      </p:sp>
-      <p:sp>
-        <p:nvSpPr>
-          <p:cNvPr id="2" name="文字方塊 1">
-            <a:extLst>
-              <a:ext uri="{FF2B5EF4-FFF2-40B4-BE49-F238E27FC236}">
-                <a16:creationId xmlns:a16="http://schemas.microsoft.com/office/drawing/2014/main" id="{178B99C9-F0FA-7E8E-5EC7-27E6EAB07462}"/>
-              </a:ext>
-            </a:extLst>
-          </p:cNvPr>
-          <p:cNvSpPr txBox="1"/>
-          <p:nvPr/>
-        </p:nvSpPr>
-        <p:spPr>
-          <a:xfrm>
-            <a:off x="533400" y="1062294"/>
-            <a:ext cx="8077200" cy="1077218"/>
-          </a:xfrm>
-          <a:prstGeom prst="rect">
-            <a:avLst/>
-          </a:prstGeom>
-          <a:noFill/>
-        </p:spPr>
-        <p:txBody>
-          <a:bodyPr wrap="square" rtlCol="0">
-            <a:spAutoFit/>
-          </a:bodyPr>
-          <a:lstStyle/>
-          <a:p>
-            <a:pPr marL="514338" indent="-514338">
-              <a:buFont typeface="Arial" panose="020B0604020202020204" pitchFamily="34" charset="0"/>
-              <a:buChar char="•"/>
-            </a:pPr>
-            <a:r>
-              <a:rPr kumimoji="1" lang="zh-TW" altLang="en-US" sz="3200" dirty="0">
-                <a:solidFill>
-                  <a:prstClr val="white"/>
-                </a:solidFill>
-                <a:effectLst>
-                  <a:outerShdw blurRad="38100" dist="38100" dir="2700000" algn="tl">
-                    <a:srgbClr val="000000">
-                      <a:alpha val="43137"/>
-                    </a:srgbClr>
-                  </a:outerShdw>
-                </a:effectLst>
-                <a:latin typeface="微軟正黑體" panose="020B0604030504040204" pitchFamily="34" charset="-120"/>
-                <a:ea typeface="微軟正黑體" panose="020B0604030504040204" pitchFamily="34" charset="-120"/>
-                <a:cs typeface="Heiti TC Light"/>
-              </a:rPr>
-              <a:t>在程式中直接寫入金鑰或是密碼是錯誤的方法</a:t>
-            </a:r>
-            <a:endParaRPr kumimoji="1" lang="en-US" altLang="zh-TW" sz="3200" dirty="0">
-              <a:solidFill>
-                <a:prstClr val="white"/>
-              </a:solidFill>
-              <a:effectLst>
-                <a:outerShdw blurRad="38100" dist="38100" dir="2700000" algn="tl">
-                  <a:srgbClr val="000000">
-                    <a:alpha val="43137"/>
-                  </a:srgbClr>
-                </a:outerShdw>
-              </a:effectLst>
-              <a:latin typeface="微軟正黑體" panose="020B0604030504040204" pitchFamily="34" charset="-120"/>
-              <a:ea typeface="微軟正黑體" panose="020B0604030504040204" pitchFamily="34" charset="-120"/>
-              <a:cs typeface="Heiti TC Light"/>
-            </a:endParaRPr>
-          </a:p>
-        </p:txBody>
-      </p:sp>
-      <p:sp>
-        <p:nvSpPr>
-          <p:cNvPr id="9" name="十字形 8">
-            <a:extLst>
-              <a:ext uri="{FF2B5EF4-FFF2-40B4-BE49-F238E27FC236}">
-                <a16:creationId xmlns:a16="http://schemas.microsoft.com/office/drawing/2014/main" id="{C4F217F2-AF97-227D-B3F4-C41B3FB2D2A6}"/>
-              </a:ext>
-            </a:extLst>
-          </p:cNvPr>
-          <p:cNvSpPr/>
-          <p:nvPr/>
-        </p:nvSpPr>
-        <p:spPr>
-          <a:xfrm rot="2678540">
-            <a:off x="4338244" y="2220180"/>
-            <a:ext cx="983152" cy="1008934"/>
-          </a:xfrm>
-          <a:prstGeom prst="plus">
-            <a:avLst>
-              <a:gd name="adj" fmla="val 41084"/>
-            </a:avLst>
-          </a:prstGeom>
-          <a:solidFill>
-            <a:srgbClr val="FF0000"/>
-          </a:solidFill>
-        </p:spPr>
-        <p:style>
-          <a:lnRef idx="2">
-            <a:schemeClr val="accent1">
-              <a:shade val="15000"/>
-            </a:schemeClr>
-          </a:lnRef>
-          <a:fillRef idx="1">
-            <a:schemeClr val="accent1"/>
-          </a:fillRef>
-          <a:effectRef idx="0">
-            <a:schemeClr val="accent1"/>
-          </a:effectRef>
-          <a:fontRef idx="minor">
-            <a:schemeClr val="lt1"/>
-          </a:fontRef>
-        </p:style>
-        <p:txBody>
-          <a:bodyPr rtlCol="0" anchor="ctr"/>
-          <a:lstStyle/>
-          <a:p>
-            <a:pPr algn="ctr"/>
-            <a:endParaRPr lang="zh-TW" altLang="en-US"/>
-          </a:p>
-        </p:txBody>
-      </p:sp>
     </p:spTree>
     <p:extLst>
       <p:ext uri="{BB962C8B-B14F-4D97-AF65-F5344CB8AC3E}">
-        <p14:creationId xmlns:p14="http://schemas.microsoft.com/office/powerpoint/2010/main" val="4113272793"/>
+        <p14:creationId xmlns:p14="http://schemas.microsoft.com/office/powerpoint/2010/main" val="261148238"/>
       </p:ext>
     </p:extLst>
   </p:cSld>
@@ -34787,92 +34688,6 @@
   <p:transition>
     <p:fade/>
   </p:transition>
-  <p:timing>
-    <p:tnLst>
-      <p:par>
-        <p:cTn id="1" dur="indefinite" restart="never" nodeType="tmRoot">
-          <p:childTnLst>
-            <p:seq concurrent="1" nextAc="seek">
-              <p:cTn id="2" dur="indefinite" nodeType="mainSeq">
-                <p:childTnLst>
-                  <p:par>
-                    <p:cTn id="3" fill="hold">
-                      <p:stCondLst>
-                        <p:cond delay="indefinite"/>
-                      </p:stCondLst>
-                      <p:childTnLst>
-                        <p:par>
-                          <p:cTn id="4" fill="hold">
-                            <p:stCondLst>
-                              <p:cond delay="0"/>
-                            </p:stCondLst>
-                            <p:childTnLst>
-                              <p:par>
-                                <p:cTn id="5" presetID="10" presetClass="entr" presetSubtype="0" fill="hold" grpId="0" nodeType="clickEffect">
-                                  <p:stCondLst>
-                                    <p:cond delay="0"/>
-                                  </p:stCondLst>
-                                  <p:childTnLst>
-                                    <p:set>
-                                      <p:cBhvr>
-                                        <p:cTn id="6" dur="1" fill="hold">
-                                          <p:stCondLst>
-                                            <p:cond delay="0"/>
-                                          </p:stCondLst>
-                                        </p:cTn>
-                                        <p:tgtEl>
-                                          <p:spTgt spid="9"/>
-                                        </p:tgtEl>
-                                        <p:attrNameLst>
-                                          <p:attrName>style.visibility</p:attrName>
-                                        </p:attrNameLst>
-                                      </p:cBhvr>
-                                      <p:to>
-                                        <p:strVal val="visible"/>
-                                      </p:to>
-                                    </p:set>
-                                    <p:animEffect transition="in" filter="fade">
-                                      <p:cBhvr>
-                                        <p:cTn id="7" dur="500"/>
-                                        <p:tgtEl>
-                                          <p:spTgt spid="9"/>
-                                        </p:tgtEl>
-                                      </p:cBhvr>
-                                    </p:animEffect>
-                                  </p:childTnLst>
-                                </p:cTn>
-                              </p:par>
-                            </p:childTnLst>
-                          </p:cTn>
-                        </p:par>
-                      </p:childTnLst>
-                    </p:cTn>
-                  </p:par>
-                </p:childTnLst>
-              </p:cTn>
-              <p:prevCondLst>
-                <p:cond evt="onPrev" delay="0">
-                  <p:tgtEl>
-                    <p:sldTgt/>
-                  </p:tgtEl>
-                </p:cond>
-              </p:prevCondLst>
-              <p:nextCondLst>
-                <p:cond evt="onNext" delay="0">
-                  <p:tgtEl>
-                    <p:sldTgt/>
-                  </p:tgtEl>
-                </p:cond>
-              </p:nextCondLst>
-            </p:seq>
-          </p:childTnLst>
-        </p:cTn>
-      </p:par>
-    </p:tnLst>
-    <p:bldLst>
-      <p:bldP spid="9" grpId="0" animBg="1"/>
-    </p:bldLst>
-  </p:timing>
 </p:sld>
 </file>
 
@@ -34895,10 +34710,10 @@
       </p:grpSpPr>
       <p:sp>
         <p:nvSpPr>
-          <p:cNvPr id="6" name="文字版面配置區 2">
+          <p:cNvPr id="2" name="文字版面配置區 2">
             <a:extLst>
               <a:ext uri="{FF2B5EF4-FFF2-40B4-BE49-F238E27FC236}">
-                <a16:creationId xmlns:a16="http://schemas.microsoft.com/office/drawing/2014/main" id="{DC362AB1-BDCB-D11A-89BE-0A2EC77A4AD2}"/>
+                <a16:creationId xmlns:a16="http://schemas.microsoft.com/office/drawing/2014/main" id="{DB2FAA46-9B2A-DC8E-8996-377E71D9CC5C}"/>
               </a:ext>
             </a:extLst>
           </p:cNvPr>
@@ -34909,8 +34724,8 @@
         </p:nvSpPr>
         <p:spPr>
           <a:xfrm>
-            <a:off x="1373707" y="110010"/>
-            <a:ext cx="7407034" cy="990600"/>
+            <a:off x="1827994" y="188728"/>
+            <a:ext cx="5488011" cy="990600"/>
           </a:xfrm>
           <a:prstGeom prst="rect">
             <a:avLst/>
@@ -34929,7 +34744,7 @@
               <a:defRPr/>
             </a:pPr>
             <a:r>
-              <a:rPr lang="zh-TW" altLang="en-US" sz="4800" b="1" kern="0" dirty="0">
+              <a:rPr lang="zh-TW" altLang="en-US" sz="4000" b="1" kern="0" dirty="0">
                 <a:solidFill>
                   <a:srgbClr val="00B0F0"/>
                 </a:solidFill>
@@ -34943,47 +34758,12 @@
                 <a:latin typeface="微軟正黑體" panose="020B0604030504040204" pitchFamily="34" charset="-120"/>
                 <a:ea typeface="微軟正黑體" panose="020B0604030504040204" pitchFamily="34" charset="-120"/>
               </a:rPr>
-              <a:t>在開發環境中設定變數</a:t>
-            </a:r>
-          </a:p>
-        </p:txBody>
-      </p:sp>
-      <p:sp>
-        <p:nvSpPr>
-          <p:cNvPr id="2" name="文字方塊 1">
-            <a:extLst>
-              <a:ext uri="{FF2B5EF4-FFF2-40B4-BE49-F238E27FC236}">
-                <a16:creationId xmlns:a16="http://schemas.microsoft.com/office/drawing/2014/main" id="{178B99C9-F0FA-7E8E-5EC7-27E6EAB07462}"/>
-              </a:ext>
-            </a:extLst>
-          </p:cNvPr>
-          <p:cNvSpPr txBox="1"/>
-          <p:nvPr/>
-        </p:nvSpPr>
-        <p:spPr>
-          <a:xfrm>
-            <a:off x="533400" y="1062294"/>
-            <a:ext cx="8077200" cy="1077218"/>
-          </a:xfrm>
-          <a:prstGeom prst="rect">
-            <a:avLst/>
-          </a:prstGeom>
-          <a:noFill/>
-        </p:spPr>
-        <p:txBody>
-          <a:bodyPr wrap="square" rtlCol="0">
-            <a:spAutoFit/>
-          </a:bodyPr>
-          <a:lstStyle/>
-          <a:p>
-            <a:pPr marL="514338" indent="-514338">
-              <a:buFont typeface="Arial" panose="020B0604020202020204" pitchFamily="34" charset="0"/>
-              <a:buChar char="•"/>
-            </a:pPr>
-            <a:r>
-              <a:rPr kumimoji="1" lang="zh-TW" altLang="en-US" sz="3200" dirty="0">
+              <a:t>如果是</a:t>
+            </a:r>
+            <a:r>
+              <a:rPr lang="en-US" altLang="zh-TW" sz="4000" b="1" kern="0" dirty="0">
                 <a:solidFill>
-                  <a:prstClr val="white"/>
+                  <a:srgbClr val="00B0F0"/>
                 </a:solidFill>
                 <a:effectLst>
                   <a:outerShdw blurRad="38100" dist="38100" dir="2700000" algn="tl">
@@ -34994,14 +34774,13 @@
                 </a:effectLst>
                 <a:latin typeface="微軟正黑體" panose="020B0604030504040204" pitchFamily="34" charset="-120"/>
                 <a:ea typeface="微軟正黑體" panose="020B0604030504040204" pitchFamily="34" charset="-120"/>
-                <a:cs typeface="Heiti TC Light"/>
               </a:rPr>
-              <a:t>在</a:t>
-            </a:r>
-            <a:r>
-              <a:rPr kumimoji="1" lang="en-US" altLang="zh-TW" sz="3200" dirty="0">
+              <a:t>Google </a:t>
+            </a:r>
+            <a:r>
+              <a:rPr lang="en-US" altLang="zh-TW" sz="4000" b="1" kern="0" dirty="0" err="1">
                 <a:solidFill>
-                  <a:prstClr val="white"/>
+                  <a:srgbClr val="00B0F0"/>
                 </a:solidFill>
                 <a:effectLst>
                   <a:outerShdw blurRad="38100" dist="38100" dir="2700000" algn="tl">
@@ -35012,67 +34791,12 @@
                 </a:effectLst>
                 <a:latin typeface="微軟正黑體" panose="020B0604030504040204" pitchFamily="34" charset="-120"/>
                 <a:ea typeface="微軟正黑體" panose="020B0604030504040204" pitchFamily="34" charset="-120"/>
-                <a:cs typeface="Heiti TC Light"/>
               </a:rPr>
-              <a:t>Windows</a:t>
-            </a:r>
-            <a:r>
-              <a:rPr kumimoji="1" lang="zh-TW" altLang="en-US" sz="3200" dirty="0">
-                <a:solidFill>
-                  <a:prstClr val="white"/>
-                </a:solidFill>
-                <a:effectLst>
-                  <a:outerShdw blurRad="38100" dist="38100" dir="2700000" algn="tl">
-                    <a:srgbClr val="000000">
-                      <a:alpha val="43137"/>
-                    </a:srgbClr>
-                  </a:outerShdw>
-                </a:effectLst>
-                <a:latin typeface="微軟正黑體" panose="020B0604030504040204" pitchFamily="34" charset="-120"/>
-                <a:ea typeface="微軟正黑體" panose="020B0604030504040204" pitchFamily="34" charset="-120"/>
-                <a:cs typeface="Heiti TC Light"/>
-              </a:rPr>
-              <a:t>下設定環境變數，無法用於多個</a:t>
-            </a:r>
-            <a:r>
-              <a:rPr kumimoji="1" lang="en-US" altLang="zh-TW" sz="3200" dirty="0" err="1">
-                <a:solidFill>
-                  <a:prstClr val="white"/>
-                </a:solidFill>
-                <a:effectLst>
-                  <a:outerShdw blurRad="38100" dist="38100" dir="2700000" algn="tl">
-                    <a:srgbClr val="000000">
-                      <a:alpha val="43137"/>
-                    </a:srgbClr>
-                  </a:outerShdw>
-                </a:effectLst>
-                <a:latin typeface="微軟正黑體" panose="020B0604030504040204" pitchFamily="34" charset="-120"/>
-                <a:ea typeface="微軟正黑體" panose="020B0604030504040204" pitchFamily="34" charset="-120"/>
-                <a:cs typeface="Heiti TC Light"/>
-              </a:rPr>
-              <a:t>conda</a:t>
-            </a:r>
-            <a:r>
-              <a:rPr kumimoji="1" lang="zh-TW" altLang="en-US" sz="3200" dirty="0">
-                <a:solidFill>
-                  <a:prstClr val="white"/>
-                </a:solidFill>
-                <a:effectLst>
-                  <a:outerShdw blurRad="38100" dist="38100" dir="2700000" algn="tl">
-                    <a:srgbClr val="000000">
-                      <a:alpha val="43137"/>
-                    </a:srgbClr>
-                  </a:outerShdw>
-                </a:effectLst>
-                <a:latin typeface="微軟正黑體" panose="020B0604030504040204" pitchFamily="34" charset="-120"/>
-                <a:ea typeface="微軟正黑體" panose="020B0604030504040204" pitchFamily="34" charset="-120"/>
-                <a:cs typeface="Heiti TC Light"/>
-              </a:rPr>
-              <a:t>環境</a:t>
-            </a:r>
-            <a:endParaRPr kumimoji="1" lang="en-US" altLang="zh-TW" sz="3200" dirty="0">
+              <a:t>Colab</a:t>
+            </a:r>
+            <a:endParaRPr lang="zh-TW" altLang="en-US" sz="4000" b="1" kern="0" dirty="0">
               <a:solidFill>
-                <a:prstClr val="white"/>
+                <a:srgbClr val="00B0F0"/>
               </a:solidFill>
               <a:effectLst>
                 <a:outerShdw blurRad="38100" dist="38100" dir="2700000" algn="tl">
@@ -35083,17 +34807,16 @@
               </a:effectLst>
               <a:latin typeface="微軟正黑體" panose="020B0604030504040204" pitchFamily="34" charset="-120"/>
               <a:ea typeface="微軟正黑體" panose="020B0604030504040204" pitchFamily="34" charset="-120"/>
-              <a:cs typeface="Heiti TC Light"/>
             </a:endParaRPr>
           </a:p>
         </p:txBody>
       </p:sp>
       <p:pic>
         <p:nvPicPr>
-          <p:cNvPr id="4" name="圖片 3">
+          <p:cNvPr id="5" name="圖片 4">
             <a:extLst>
               <a:ext uri="{FF2B5EF4-FFF2-40B4-BE49-F238E27FC236}">
-                <a16:creationId xmlns:a16="http://schemas.microsoft.com/office/drawing/2014/main" id="{A20BDACB-986D-46D8-59CC-B55DADB86B0C}"/>
+                <a16:creationId xmlns:a16="http://schemas.microsoft.com/office/drawing/2014/main" id="{28710C28-DC1F-4C01-1D3B-78FC8B407180}"/>
               </a:ext>
             </a:extLst>
           </p:cNvPr>
@@ -35110,119 +34833,8 @@
         </p:blipFill>
         <p:spPr>
           <a:xfrm>
-            <a:off x="411125" y="2599353"/>
-            <a:ext cx="3851248" cy="4115956"/>
-          </a:xfrm>
-          <a:prstGeom prst="rect">
-            <a:avLst/>
-          </a:prstGeom>
-        </p:spPr>
-      </p:pic>
-      <p:pic>
-        <p:nvPicPr>
-          <p:cNvPr id="7" name="圖片 6">
-            <a:extLst>
-              <a:ext uri="{FF2B5EF4-FFF2-40B4-BE49-F238E27FC236}">
-                <a16:creationId xmlns:a16="http://schemas.microsoft.com/office/drawing/2014/main" id="{8448E31F-0565-DE87-1A03-4D7781A9F26F}"/>
-              </a:ext>
-            </a:extLst>
-          </p:cNvPr>
-          <p:cNvPicPr>
-            <a:picLocks noChangeAspect="1"/>
-          </p:cNvPicPr>
-          <p:nvPr/>
-        </p:nvPicPr>
-        <p:blipFill>
-          <a:blip r:embed="rId3"/>
-          <a:stretch>
-            <a:fillRect/>
-          </a:stretch>
-        </p:blipFill>
-        <p:spPr>
-          <a:xfrm>
-            <a:off x="4462896" y="2559495"/>
-            <a:ext cx="3955521" cy="4115955"/>
-          </a:xfrm>
-          <a:prstGeom prst="rect">
-            <a:avLst/>
-          </a:prstGeom>
-        </p:spPr>
-      </p:pic>
-      <p:sp>
-        <p:nvSpPr>
-          <p:cNvPr id="12" name="十字形 11">
-            <a:extLst>
-              <a:ext uri="{FF2B5EF4-FFF2-40B4-BE49-F238E27FC236}">
-                <a16:creationId xmlns:a16="http://schemas.microsoft.com/office/drawing/2014/main" id="{26C0F4EF-5854-056E-03CD-6C4AB1BFF050}"/>
-              </a:ext>
-            </a:extLst>
-          </p:cNvPr>
-          <p:cNvSpPr/>
-          <p:nvPr/>
-        </p:nvSpPr>
-        <p:spPr>
-          <a:xfrm rot="2678540">
-            <a:off x="3461808" y="3816959"/>
-            <a:ext cx="1601130" cy="1601029"/>
-          </a:xfrm>
-          <a:prstGeom prst="plus">
-            <a:avLst>
-              <a:gd name="adj" fmla="val 41084"/>
-            </a:avLst>
-          </a:prstGeom>
-          <a:solidFill>
-            <a:srgbClr val="FF0000"/>
-          </a:solidFill>
-        </p:spPr>
-        <p:style>
-          <a:lnRef idx="2">
-            <a:schemeClr val="accent1">
-              <a:shade val="15000"/>
-            </a:schemeClr>
-          </a:lnRef>
-          <a:fillRef idx="1">
-            <a:schemeClr val="accent1"/>
-          </a:fillRef>
-          <a:effectRef idx="0">
-            <a:schemeClr val="accent1"/>
-          </a:effectRef>
-          <a:fontRef idx="minor">
-            <a:schemeClr val="lt1"/>
-          </a:fontRef>
-        </p:style>
-        <p:txBody>
-          <a:bodyPr rtlCol="0" anchor="ctr"/>
-          <a:lstStyle/>
-          <a:p>
-            <a:pPr algn="ctr"/>
-            <a:endParaRPr lang="zh-TW" altLang="en-US"/>
-          </a:p>
-        </p:txBody>
-      </p:sp>
-      <p:pic>
-        <p:nvPicPr>
-          <p:cNvPr id="5" name="圖片 4">
-            <a:extLst>
-              <a:ext uri="{FF2B5EF4-FFF2-40B4-BE49-F238E27FC236}">
-                <a16:creationId xmlns:a16="http://schemas.microsoft.com/office/drawing/2014/main" id="{6451A0BF-0ECE-D0FE-FB32-C54B21218394}"/>
-              </a:ext>
-            </a:extLst>
-          </p:cNvPr>
-          <p:cNvPicPr>
-            <a:picLocks noChangeAspect="1"/>
-          </p:cNvPicPr>
-          <p:nvPr/>
-        </p:nvPicPr>
-        <p:blipFill>
-          <a:blip r:embed="rId4"/>
-          <a:stretch>
-            <a:fillRect/>
-          </a:stretch>
-        </p:blipFill>
-        <p:spPr>
-          <a:xfrm>
-            <a:off x="1457011" y="2213109"/>
-            <a:ext cx="6229978" cy="1499356"/>
+            <a:off x="511941" y="1478467"/>
+            <a:ext cx="7744907" cy="4831897"/>
           </a:xfrm>
           <a:prstGeom prst="rect">
             <a:avLst/>
@@ -35232,7 +34844,7 @@
     </p:spTree>
     <p:extLst>
       <p:ext uri="{BB962C8B-B14F-4D97-AF65-F5344CB8AC3E}">
-        <p14:creationId xmlns:p14="http://schemas.microsoft.com/office/powerpoint/2010/main" val="3483958529"/>
+        <p14:creationId xmlns:p14="http://schemas.microsoft.com/office/powerpoint/2010/main" val="2009663404"/>
       </p:ext>
     </p:extLst>
   </p:cSld>
@@ -35242,92 +34854,6 @@
   <p:transition>
     <p:fade/>
   </p:transition>
-  <p:timing>
-    <p:tnLst>
-      <p:par>
-        <p:cTn id="1" dur="indefinite" restart="never" nodeType="tmRoot">
-          <p:childTnLst>
-            <p:seq concurrent="1" nextAc="seek">
-              <p:cTn id="2" dur="indefinite" nodeType="mainSeq">
-                <p:childTnLst>
-                  <p:par>
-                    <p:cTn id="3" fill="hold">
-                      <p:stCondLst>
-                        <p:cond delay="indefinite"/>
-                      </p:stCondLst>
-                      <p:childTnLst>
-                        <p:par>
-                          <p:cTn id="4" fill="hold">
-                            <p:stCondLst>
-                              <p:cond delay="0"/>
-                            </p:stCondLst>
-                            <p:childTnLst>
-                              <p:par>
-                                <p:cTn id="5" presetID="10" presetClass="entr" presetSubtype="0" fill="hold" grpId="0" nodeType="clickEffect">
-                                  <p:stCondLst>
-                                    <p:cond delay="0"/>
-                                  </p:stCondLst>
-                                  <p:childTnLst>
-                                    <p:set>
-                                      <p:cBhvr>
-                                        <p:cTn id="6" dur="1" fill="hold">
-                                          <p:stCondLst>
-                                            <p:cond delay="0"/>
-                                          </p:stCondLst>
-                                        </p:cTn>
-                                        <p:tgtEl>
-                                          <p:spTgt spid="12"/>
-                                        </p:tgtEl>
-                                        <p:attrNameLst>
-                                          <p:attrName>style.visibility</p:attrName>
-                                        </p:attrNameLst>
-                                      </p:cBhvr>
-                                      <p:to>
-                                        <p:strVal val="visible"/>
-                                      </p:to>
-                                    </p:set>
-                                    <p:animEffect transition="in" filter="fade">
-                                      <p:cBhvr>
-                                        <p:cTn id="7" dur="500"/>
-                                        <p:tgtEl>
-                                          <p:spTgt spid="12"/>
-                                        </p:tgtEl>
-                                      </p:cBhvr>
-                                    </p:animEffect>
-                                  </p:childTnLst>
-                                </p:cTn>
-                              </p:par>
-                            </p:childTnLst>
-                          </p:cTn>
-                        </p:par>
-                      </p:childTnLst>
-                    </p:cTn>
-                  </p:par>
-                </p:childTnLst>
-              </p:cTn>
-              <p:prevCondLst>
-                <p:cond evt="onPrev" delay="0">
-                  <p:tgtEl>
-                    <p:sldTgt/>
-                  </p:tgtEl>
-                </p:cond>
-              </p:prevCondLst>
-              <p:nextCondLst>
-                <p:cond evt="onNext" delay="0">
-                  <p:tgtEl>
-                    <p:sldTgt/>
-                  </p:tgtEl>
-                </p:cond>
-              </p:nextCondLst>
-            </p:seq>
-          </p:childTnLst>
-        </p:cTn>
-      </p:par>
-    </p:tnLst>
-    <p:bldLst>
-      <p:bldP spid="12" grpId="0" animBg="1"/>
-    </p:bldLst>
-  </p:timing>
 </p:sld>
 </file>
 
@@ -35348,12 +34874,115 @@
           <a:chExt cx="0" cy="0"/>
         </a:xfrm>
       </p:grpSpPr>
+      <p:sp>
+        <p:nvSpPr>
+          <p:cNvPr id="2" name="文字版面配置區 2">
+            <a:extLst>
+              <a:ext uri="{FF2B5EF4-FFF2-40B4-BE49-F238E27FC236}">
+                <a16:creationId xmlns:a16="http://schemas.microsoft.com/office/drawing/2014/main" id="{DB2FAA46-9B2A-DC8E-8996-377E71D9CC5C}"/>
+              </a:ext>
+            </a:extLst>
+          </p:cNvPr>
+          <p:cNvSpPr txBox="1">
+            <a:spLocks/>
+          </p:cNvSpPr>
+          <p:nvPr/>
+        </p:nvSpPr>
+        <p:spPr>
+          <a:xfrm>
+            <a:off x="1827994" y="188728"/>
+            <a:ext cx="5488011" cy="990600"/>
+          </a:xfrm>
+          <a:prstGeom prst="rect">
+            <a:avLst/>
+          </a:prstGeom>
+        </p:spPr>
+        <p:txBody>
+          <a:bodyPr tIns="91440" bIns="91440" anchor="b" anchorCtr="0">
+            <a:noAutofit/>
+          </a:bodyPr>
+          <a:lstStyle/>
+          <a:p>
+            <a:pPr algn="just">
+              <a:spcBef>
+                <a:spcPct val="20000"/>
+              </a:spcBef>
+              <a:defRPr/>
+            </a:pPr>
+            <a:r>
+              <a:rPr lang="zh-TW" altLang="en-US" sz="4000" b="1" kern="0" dirty="0">
+                <a:solidFill>
+                  <a:srgbClr val="00B0F0"/>
+                </a:solidFill>
+                <a:effectLst>
+                  <a:outerShdw blurRad="38100" dist="38100" dir="2700000" algn="tl">
+                    <a:srgbClr val="000000">
+                      <a:alpha val="43137"/>
+                    </a:srgbClr>
+                  </a:outerShdw>
+                </a:effectLst>
+                <a:latin typeface="微軟正黑體" panose="020B0604030504040204" pitchFamily="34" charset="-120"/>
+                <a:ea typeface="微軟正黑體" panose="020B0604030504040204" pitchFamily="34" charset="-120"/>
+              </a:rPr>
+              <a:t>如果是</a:t>
+            </a:r>
+            <a:r>
+              <a:rPr lang="en-US" altLang="zh-TW" sz="4000" b="1" kern="0" dirty="0">
+                <a:solidFill>
+                  <a:srgbClr val="00B0F0"/>
+                </a:solidFill>
+                <a:effectLst>
+                  <a:outerShdw blurRad="38100" dist="38100" dir="2700000" algn="tl">
+                    <a:srgbClr val="000000">
+                      <a:alpha val="43137"/>
+                    </a:srgbClr>
+                  </a:outerShdw>
+                </a:effectLst>
+                <a:latin typeface="微軟正黑體" panose="020B0604030504040204" pitchFamily="34" charset="-120"/>
+                <a:ea typeface="微軟正黑體" panose="020B0604030504040204" pitchFamily="34" charset="-120"/>
+              </a:rPr>
+              <a:t>Google </a:t>
+            </a:r>
+            <a:r>
+              <a:rPr lang="en-US" altLang="zh-TW" sz="4000" b="1" kern="0" dirty="0" err="1">
+                <a:solidFill>
+                  <a:srgbClr val="00B0F0"/>
+                </a:solidFill>
+                <a:effectLst>
+                  <a:outerShdw blurRad="38100" dist="38100" dir="2700000" algn="tl">
+                    <a:srgbClr val="000000">
+                      <a:alpha val="43137"/>
+                    </a:srgbClr>
+                  </a:outerShdw>
+                </a:effectLst>
+                <a:latin typeface="微軟正黑體" panose="020B0604030504040204" pitchFamily="34" charset="-120"/>
+                <a:ea typeface="微軟正黑體" panose="020B0604030504040204" pitchFamily="34" charset="-120"/>
+              </a:rPr>
+              <a:t>Colab</a:t>
+            </a:r>
+            <a:endParaRPr lang="zh-TW" altLang="en-US" sz="4000" b="1" kern="0" dirty="0">
+              <a:solidFill>
+                <a:srgbClr val="00B0F0"/>
+              </a:solidFill>
+              <a:effectLst>
+                <a:outerShdw blurRad="38100" dist="38100" dir="2700000" algn="tl">
+                  <a:srgbClr val="000000">
+                    <a:alpha val="43137"/>
+                  </a:srgbClr>
+                </a:outerShdw>
+              </a:effectLst>
+              <a:latin typeface="微軟正黑體" panose="020B0604030504040204" pitchFamily="34" charset="-120"/>
+              <a:ea typeface="微軟正黑體" panose="020B0604030504040204" pitchFamily="34" charset="-120"/>
+            </a:endParaRPr>
+          </a:p>
+        </p:txBody>
+      </p:sp>
       <p:pic>
         <p:nvPicPr>
           <p:cNvPr id="5" name="圖片 4">
             <a:extLst>
               <a:ext uri="{FF2B5EF4-FFF2-40B4-BE49-F238E27FC236}">
-                <a16:creationId xmlns:a16="http://schemas.microsoft.com/office/drawing/2014/main" id="{DD01C14C-D9AE-4C5A-079D-DC0B9F598826}"/>
+                <a16:creationId xmlns:a16="http://schemas.microsoft.com/office/drawing/2014/main" id="{44D56CD6-27D1-281B-E67C-9A7DB94B9284}"/>
               </a:ext>
             </a:extLst>
           </p:cNvPr>
@@ -35370,868 +34999,8 @@
         </p:blipFill>
         <p:spPr>
           <a:xfrm>
-            <a:off x="866710" y="2878766"/>
-            <a:ext cx="6791325" cy="3076575"/>
-          </a:xfrm>
-          <a:prstGeom prst="rect">
-            <a:avLst/>
-          </a:prstGeom>
-        </p:spPr>
-      </p:pic>
-      <p:sp>
-        <p:nvSpPr>
-          <p:cNvPr id="6" name="文字版面配置區 2">
-            <a:extLst>
-              <a:ext uri="{FF2B5EF4-FFF2-40B4-BE49-F238E27FC236}">
-                <a16:creationId xmlns:a16="http://schemas.microsoft.com/office/drawing/2014/main" id="{DC362AB1-BDCB-D11A-89BE-0A2EC77A4AD2}"/>
-              </a:ext>
-            </a:extLst>
-          </p:cNvPr>
-          <p:cNvSpPr txBox="1">
-            <a:spLocks/>
-          </p:cNvSpPr>
-          <p:nvPr/>
-        </p:nvSpPr>
-        <p:spPr>
-          <a:xfrm>
-            <a:off x="1373707" y="110010"/>
-            <a:ext cx="7407034" cy="990600"/>
-          </a:xfrm>
-          <a:prstGeom prst="rect">
-            <a:avLst/>
-          </a:prstGeom>
-        </p:spPr>
-        <p:txBody>
-          <a:bodyPr tIns="91440" bIns="91440" anchor="b" anchorCtr="0">
-            <a:noAutofit/>
-          </a:bodyPr>
-          <a:lstStyle/>
-          <a:p>
-            <a:pPr algn="just">
-              <a:spcBef>
-                <a:spcPct val="20000"/>
-              </a:spcBef>
-              <a:defRPr/>
-            </a:pPr>
-            <a:r>
-              <a:rPr lang="zh-TW" altLang="en-US" sz="4800" b="1" kern="0" dirty="0">
-                <a:solidFill>
-                  <a:srgbClr val="00B0F0"/>
-                </a:solidFill>
-                <a:effectLst>
-                  <a:outerShdw blurRad="38100" dist="38100" dir="2700000" algn="tl">
-                    <a:srgbClr val="000000">
-                      <a:alpha val="43137"/>
-                    </a:srgbClr>
-                  </a:outerShdw>
-                </a:effectLst>
-                <a:latin typeface="微軟正黑體" panose="020B0604030504040204" pitchFamily="34" charset="-120"/>
-                <a:ea typeface="微軟正黑體" panose="020B0604030504040204" pitchFamily="34" charset="-120"/>
-              </a:rPr>
-              <a:t>在開發環境中設定變數</a:t>
-            </a:r>
-          </a:p>
-        </p:txBody>
-      </p:sp>
-      <p:sp>
-        <p:nvSpPr>
-          <p:cNvPr id="2" name="文字方塊 1">
-            <a:extLst>
-              <a:ext uri="{FF2B5EF4-FFF2-40B4-BE49-F238E27FC236}">
-                <a16:creationId xmlns:a16="http://schemas.microsoft.com/office/drawing/2014/main" id="{178B99C9-F0FA-7E8E-5EC7-27E6EAB07462}"/>
-              </a:ext>
-            </a:extLst>
-          </p:cNvPr>
-          <p:cNvSpPr txBox="1"/>
-          <p:nvPr/>
-        </p:nvSpPr>
-        <p:spPr>
-          <a:xfrm>
-            <a:off x="533400" y="1062294"/>
-            <a:ext cx="8077200" cy="1077218"/>
-          </a:xfrm>
-          <a:prstGeom prst="rect">
-            <a:avLst/>
-          </a:prstGeom>
-          <a:noFill/>
-        </p:spPr>
-        <p:txBody>
-          <a:bodyPr wrap="square" rtlCol="0">
-            <a:spAutoFit/>
-          </a:bodyPr>
-          <a:lstStyle/>
-          <a:p>
-            <a:pPr marL="514338" indent="-514338">
-              <a:buFont typeface="Arial" panose="020B0604020202020204" pitchFamily="34" charset="0"/>
-              <a:buChar char="•"/>
-            </a:pPr>
-            <a:r>
-              <a:rPr kumimoji="1" lang="zh-TW" altLang="en-US" sz="3200" dirty="0">
-                <a:solidFill>
-                  <a:prstClr val="white"/>
-                </a:solidFill>
-                <a:effectLst>
-                  <a:outerShdw blurRad="38100" dist="38100" dir="2700000" algn="tl">
-                    <a:srgbClr val="000000">
-                      <a:alpha val="43137"/>
-                    </a:srgbClr>
-                  </a:outerShdw>
-                </a:effectLst>
-                <a:latin typeface="微軟正黑體" panose="020B0604030504040204" pitchFamily="34" charset="-120"/>
-                <a:ea typeface="微軟正黑體" panose="020B0604030504040204" pitchFamily="34" charset="-120"/>
-                <a:cs typeface="Heiti TC Light"/>
-              </a:rPr>
-              <a:t>在</a:t>
-            </a:r>
-            <a:r>
-              <a:rPr kumimoji="1" lang="en-US" altLang="zh-TW" sz="3200" dirty="0">
-                <a:solidFill>
-                  <a:prstClr val="white"/>
-                </a:solidFill>
-                <a:effectLst>
-                  <a:outerShdw blurRad="38100" dist="38100" dir="2700000" algn="tl">
-                    <a:srgbClr val="000000">
-                      <a:alpha val="43137"/>
-                    </a:srgbClr>
-                  </a:outerShdw>
-                </a:effectLst>
-                <a:latin typeface="微軟正黑體" panose="020B0604030504040204" pitchFamily="34" charset="-120"/>
-                <a:ea typeface="微軟正黑體" panose="020B0604030504040204" pitchFamily="34" charset="-120"/>
-                <a:cs typeface="Heiti TC Light"/>
-              </a:rPr>
-              <a:t>Linux/Mac</a:t>
-            </a:r>
-            <a:r>
-              <a:rPr kumimoji="1" lang="zh-TW" altLang="en-US" sz="3200" dirty="0">
-                <a:solidFill>
-                  <a:prstClr val="white"/>
-                </a:solidFill>
-                <a:effectLst>
-                  <a:outerShdw blurRad="38100" dist="38100" dir="2700000" algn="tl">
-                    <a:srgbClr val="000000">
-                      <a:alpha val="43137"/>
-                    </a:srgbClr>
-                  </a:outerShdw>
-                </a:effectLst>
-                <a:latin typeface="微軟正黑體" panose="020B0604030504040204" pitchFamily="34" charset="-120"/>
-                <a:ea typeface="微軟正黑體" panose="020B0604030504040204" pitchFamily="34" charset="-120"/>
-                <a:cs typeface="Heiti TC Light"/>
-              </a:rPr>
-              <a:t>下設定環境變數，在</a:t>
-            </a:r>
-            <a:r>
-              <a:rPr kumimoji="1" lang="en-US" altLang="zh-TW" sz="3200" dirty="0">
-                <a:solidFill>
-                  <a:prstClr val="white"/>
-                </a:solidFill>
-                <a:effectLst>
-                  <a:outerShdw blurRad="38100" dist="38100" dir="2700000" algn="tl">
-                    <a:srgbClr val="000000">
-                      <a:alpha val="43137"/>
-                    </a:srgbClr>
-                  </a:outerShdw>
-                </a:effectLst>
-                <a:latin typeface="微軟正黑體" panose="020B0604030504040204" pitchFamily="34" charset="-120"/>
-                <a:ea typeface="微軟正黑體" panose="020B0604030504040204" pitchFamily="34" charset="-120"/>
-                <a:cs typeface="Heiti TC Light"/>
-              </a:rPr>
-              <a:t>.</a:t>
-            </a:r>
-            <a:r>
-              <a:rPr kumimoji="1" lang="en-US" altLang="zh-TW" sz="3200" dirty="0" err="1">
-                <a:solidFill>
-                  <a:prstClr val="white"/>
-                </a:solidFill>
-                <a:effectLst>
-                  <a:outerShdw blurRad="38100" dist="38100" dir="2700000" algn="tl">
-                    <a:srgbClr val="000000">
-                      <a:alpha val="43137"/>
-                    </a:srgbClr>
-                  </a:outerShdw>
-                </a:effectLst>
-                <a:latin typeface="微軟正黑體" panose="020B0604030504040204" pitchFamily="34" charset="-120"/>
-                <a:ea typeface="微軟正黑體" panose="020B0604030504040204" pitchFamily="34" charset="-120"/>
-                <a:cs typeface="Heiti TC Light"/>
-              </a:rPr>
-              <a:t>bashrc</a:t>
-            </a:r>
-            <a:r>
-              <a:rPr kumimoji="1" lang="en-US" altLang="zh-TW" sz="3200" dirty="0">
-                <a:solidFill>
-                  <a:prstClr val="white"/>
-                </a:solidFill>
-                <a:effectLst>
-                  <a:outerShdw blurRad="38100" dist="38100" dir="2700000" algn="tl">
-                    <a:srgbClr val="000000">
-                      <a:alpha val="43137"/>
-                    </a:srgbClr>
-                  </a:outerShdw>
-                </a:effectLst>
-                <a:latin typeface="微軟正黑體" panose="020B0604030504040204" pitchFamily="34" charset="-120"/>
-                <a:ea typeface="微軟正黑體" panose="020B0604030504040204" pitchFamily="34" charset="-120"/>
-                <a:cs typeface="Heiti TC Light"/>
-              </a:rPr>
-              <a:t>/.</a:t>
-            </a:r>
-            <a:r>
-              <a:rPr kumimoji="1" lang="en-US" altLang="zh-TW" sz="3200" dirty="0" err="1">
-                <a:solidFill>
-                  <a:prstClr val="white"/>
-                </a:solidFill>
-                <a:effectLst>
-                  <a:outerShdw blurRad="38100" dist="38100" dir="2700000" algn="tl">
-                    <a:srgbClr val="000000">
-                      <a:alpha val="43137"/>
-                    </a:srgbClr>
-                  </a:outerShdw>
-                </a:effectLst>
-                <a:latin typeface="微軟正黑體" panose="020B0604030504040204" pitchFamily="34" charset="-120"/>
-                <a:ea typeface="微軟正黑體" panose="020B0604030504040204" pitchFamily="34" charset="-120"/>
-                <a:cs typeface="Heiti TC Light"/>
-              </a:rPr>
-              <a:t>zshrc</a:t>
-            </a:r>
-            <a:r>
-              <a:rPr kumimoji="1" lang="zh-TW" altLang="en-US" sz="3200" dirty="0">
-                <a:solidFill>
-                  <a:prstClr val="white"/>
-                </a:solidFill>
-                <a:effectLst>
-                  <a:outerShdw blurRad="38100" dist="38100" dir="2700000" algn="tl">
-                    <a:srgbClr val="000000">
-                      <a:alpha val="43137"/>
-                    </a:srgbClr>
-                  </a:outerShdw>
-                </a:effectLst>
-                <a:latin typeface="微軟正黑體" panose="020B0604030504040204" pitchFamily="34" charset="-120"/>
-                <a:ea typeface="微軟正黑體" panose="020B0604030504040204" pitchFamily="34" charset="-120"/>
-                <a:cs typeface="Heiti TC Light"/>
-              </a:rPr>
-              <a:t>中也無法多</a:t>
-            </a:r>
-            <a:r>
-              <a:rPr kumimoji="1" lang="en-US" altLang="zh-TW" sz="3200" dirty="0" err="1">
-                <a:solidFill>
-                  <a:prstClr val="white"/>
-                </a:solidFill>
-                <a:effectLst>
-                  <a:outerShdw blurRad="38100" dist="38100" dir="2700000" algn="tl">
-                    <a:srgbClr val="000000">
-                      <a:alpha val="43137"/>
-                    </a:srgbClr>
-                  </a:outerShdw>
-                </a:effectLst>
-                <a:latin typeface="微軟正黑體" panose="020B0604030504040204" pitchFamily="34" charset="-120"/>
-                <a:ea typeface="微軟正黑體" panose="020B0604030504040204" pitchFamily="34" charset="-120"/>
-                <a:cs typeface="Heiti TC Light"/>
-              </a:rPr>
-              <a:t>conda</a:t>
-            </a:r>
-            <a:r>
-              <a:rPr kumimoji="1" lang="zh-TW" altLang="en-US" sz="3200" dirty="0">
-                <a:solidFill>
-                  <a:prstClr val="white"/>
-                </a:solidFill>
-                <a:effectLst>
-                  <a:outerShdw blurRad="38100" dist="38100" dir="2700000" algn="tl">
-                    <a:srgbClr val="000000">
-                      <a:alpha val="43137"/>
-                    </a:srgbClr>
-                  </a:outerShdw>
-                </a:effectLst>
-                <a:latin typeface="微軟正黑體" panose="020B0604030504040204" pitchFamily="34" charset="-120"/>
-                <a:ea typeface="微軟正黑體" panose="020B0604030504040204" pitchFamily="34" charset="-120"/>
-                <a:cs typeface="Heiti TC Light"/>
-              </a:rPr>
-              <a:t>環境</a:t>
-            </a:r>
-            <a:endParaRPr kumimoji="1" lang="en-US" altLang="zh-TW" sz="3200" dirty="0">
-              <a:solidFill>
-                <a:prstClr val="white"/>
-              </a:solidFill>
-              <a:effectLst>
-                <a:outerShdw blurRad="38100" dist="38100" dir="2700000" algn="tl">
-                  <a:srgbClr val="000000">
-                    <a:alpha val="43137"/>
-                  </a:srgbClr>
-                </a:outerShdw>
-              </a:effectLst>
-              <a:latin typeface="微軟正黑體" panose="020B0604030504040204" pitchFamily="34" charset="-120"/>
-              <a:ea typeface="微軟正黑體" panose="020B0604030504040204" pitchFamily="34" charset="-120"/>
-              <a:cs typeface="Heiti TC Light"/>
-            </a:endParaRPr>
-          </a:p>
-        </p:txBody>
-      </p:sp>
-      <p:sp>
-        <p:nvSpPr>
-          <p:cNvPr id="12" name="十字形 11">
-            <a:extLst>
-              <a:ext uri="{FF2B5EF4-FFF2-40B4-BE49-F238E27FC236}">
-                <a16:creationId xmlns:a16="http://schemas.microsoft.com/office/drawing/2014/main" id="{26C0F4EF-5854-056E-03CD-6C4AB1BFF050}"/>
-              </a:ext>
-            </a:extLst>
-          </p:cNvPr>
-          <p:cNvSpPr/>
-          <p:nvPr/>
-        </p:nvSpPr>
-        <p:spPr>
-          <a:xfrm rot="2678540">
-            <a:off x="3461808" y="3816959"/>
-            <a:ext cx="1601130" cy="1601029"/>
-          </a:xfrm>
-          <a:prstGeom prst="plus">
-            <a:avLst>
-              <a:gd name="adj" fmla="val 41084"/>
-            </a:avLst>
-          </a:prstGeom>
-          <a:solidFill>
-            <a:srgbClr val="FF0000"/>
-          </a:solidFill>
-        </p:spPr>
-        <p:style>
-          <a:lnRef idx="2">
-            <a:schemeClr val="accent1">
-              <a:shade val="15000"/>
-            </a:schemeClr>
-          </a:lnRef>
-          <a:fillRef idx="1">
-            <a:schemeClr val="accent1"/>
-          </a:fillRef>
-          <a:effectRef idx="0">
-            <a:schemeClr val="accent1"/>
-          </a:effectRef>
-          <a:fontRef idx="minor">
-            <a:schemeClr val="lt1"/>
-          </a:fontRef>
-        </p:style>
-        <p:txBody>
-          <a:bodyPr rtlCol="0" anchor="ctr"/>
-          <a:lstStyle/>
-          <a:p>
-            <a:pPr algn="ctr"/>
-            <a:endParaRPr lang="zh-TW" altLang="en-US"/>
-          </a:p>
-        </p:txBody>
-      </p:sp>
-    </p:spTree>
-    <p:extLst>
-      <p:ext uri="{BB962C8B-B14F-4D97-AF65-F5344CB8AC3E}">
-        <p14:creationId xmlns:p14="http://schemas.microsoft.com/office/powerpoint/2010/main" val="1072960598"/>
-      </p:ext>
-    </p:extLst>
-  </p:cSld>
-  <p:clrMapOvr>
-    <a:masterClrMapping/>
-  </p:clrMapOvr>
-  <p:transition>
-    <p:fade/>
-  </p:transition>
-  <p:timing>
-    <p:tnLst>
-      <p:par>
-        <p:cTn id="1" dur="indefinite" restart="never" nodeType="tmRoot">
-          <p:childTnLst>
-            <p:seq concurrent="1" nextAc="seek">
-              <p:cTn id="2" dur="indefinite" nodeType="mainSeq">
-                <p:childTnLst>
-                  <p:par>
-                    <p:cTn id="3" fill="hold">
-                      <p:stCondLst>
-                        <p:cond delay="indefinite"/>
-                      </p:stCondLst>
-                      <p:childTnLst>
-                        <p:par>
-                          <p:cTn id="4" fill="hold">
-                            <p:stCondLst>
-                              <p:cond delay="0"/>
-                            </p:stCondLst>
-                            <p:childTnLst>
-                              <p:par>
-                                <p:cTn id="5" presetID="10" presetClass="entr" presetSubtype="0" fill="hold" grpId="0" nodeType="clickEffect">
-                                  <p:stCondLst>
-                                    <p:cond delay="0"/>
-                                  </p:stCondLst>
-                                  <p:childTnLst>
-                                    <p:set>
-                                      <p:cBhvr>
-                                        <p:cTn id="6" dur="1" fill="hold">
-                                          <p:stCondLst>
-                                            <p:cond delay="0"/>
-                                          </p:stCondLst>
-                                        </p:cTn>
-                                        <p:tgtEl>
-                                          <p:spTgt spid="12"/>
-                                        </p:tgtEl>
-                                        <p:attrNameLst>
-                                          <p:attrName>style.visibility</p:attrName>
-                                        </p:attrNameLst>
-                                      </p:cBhvr>
-                                      <p:to>
-                                        <p:strVal val="visible"/>
-                                      </p:to>
-                                    </p:set>
-                                    <p:animEffect transition="in" filter="fade">
-                                      <p:cBhvr>
-                                        <p:cTn id="7" dur="500"/>
-                                        <p:tgtEl>
-                                          <p:spTgt spid="12"/>
-                                        </p:tgtEl>
-                                      </p:cBhvr>
-                                    </p:animEffect>
-                                  </p:childTnLst>
-                                </p:cTn>
-                              </p:par>
-                            </p:childTnLst>
-                          </p:cTn>
-                        </p:par>
-                      </p:childTnLst>
-                    </p:cTn>
-                  </p:par>
-                </p:childTnLst>
-              </p:cTn>
-              <p:prevCondLst>
-                <p:cond evt="onPrev" delay="0">
-                  <p:tgtEl>
-                    <p:sldTgt/>
-                  </p:tgtEl>
-                </p:cond>
-              </p:prevCondLst>
-              <p:nextCondLst>
-                <p:cond evt="onNext" delay="0">
-                  <p:tgtEl>
-                    <p:sldTgt/>
-                  </p:tgtEl>
-                </p:cond>
-              </p:nextCondLst>
-            </p:seq>
-          </p:childTnLst>
-        </p:cTn>
-      </p:par>
-    </p:tnLst>
-    <p:bldLst>
-      <p:bldP spid="12" grpId="0" animBg="1"/>
-    </p:bldLst>
-  </p:timing>
-</p:sld>
-</file>
-
-<file path=ppt/slides/slide46.xml><?xml version="1.0" encoding="utf-8"?>
-<p:sld xmlns:a="http://schemas.openxmlformats.org/drawingml/2006/main" xmlns:r="http://schemas.openxmlformats.org/officeDocument/2006/relationships" xmlns:p="http://schemas.openxmlformats.org/presentationml/2006/main">
-  <p:cSld>
-    <p:spTree>
-      <p:nvGrpSpPr>
-        <p:cNvPr id="1" name=""/>
-        <p:cNvGrpSpPr/>
-        <p:nvPr/>
-      </p:nvGrpSpPr>
-      <p:grpSpPr>
-        <a:xfrm>
-          <a:off x="0" y="0"/>
-          <a:ext cx="0" cy="0"/>
-          <a:chOff x="0" y="0"/>
-          <a:chExt cx="0" cy="0"/>
-        </a:xfrm>
-      </p:grpSpPr>
-      <p:pic>
-        <p:nvPicPr>
-          <p:cNvPr id="4" name="圖片 3">
-            <a:extLst>
-              <a:ext uri="{FF2B5EF4-FFF2-40B4-BE49-F238E27FC236}">
-                <a16:creationId xmlns:a16="http://schemas.microsoft.com/office/drawing/2014/main" id="{A74C1909-E6BE-6F14-D0D7-84E82822EDF2}"/>
-              </a:ext>
-            </a:extLst>
-          </p:cNvPr>
-          <p:cNvPicPr>
-            <a:picLocks noChangeAspect="1"/>
-          </p:cNvPicPr>
-          <p:nvPr/>
-        </p:nvPicPr>
-        <p:blipFill>
-          <a:blip r:embed="rId2"/>
-          <a:stretch>
-            <a:fillRect/>
-          </a:stretch>
-        </p:blipFill>
-        <p:spPr>
-          <a:xfrm>
-            <a:off x="69111" y="3968563"/>
-            <a:ext cx="9144000" cy="2930165"/>
-          </a:xfrm>
-          <a:prstGeom prst="rect">
-            <a:avLst/>
-          </a:prstGeom>
-        </p:spPr>
-      </p:pic>
-      <p:sp>
-        <p:nvSpPr>
-          <p:cNvPr id="6" name="文字版面配置區 2">
-            <a:extLst>
-              <a:ext uri="{FF2B5EF4-FFF2-40B4-BE49-F238E27FC236}">
-                <a16:creationId xmlns:a16="http://schemas.microsoft.com/office/drawing/2014/main" id="{DC362AB1-BDCB-D11A-89BE-0A2EC77A4AD2}"/>
-              </a:ext>
-            </a:extLst>
-          </p:cNvPr>
-          <p:cNvSpPr txBox="1">
-            <a:spLocks/>
-          </p:cNvSpPr>
-          <p:nvPr/>
-        </p:nvSpPr>
-        <p:spPr>
-          <a:xfrm>
-            <a:off x="1373707" y="110010"/>
-            <a:ext cx="7407034" cy="990600"/>
-          </a:xfrm>
-          <a:prstGeom prst="rect">
-            <a:avLst/>
-          </a:prstGeom>
-        </p:spPr>
-        <p:txBody>
-          <a:bodyPr tIns="91440" bIns="91440" anchor="b" anchorCtr="0">
-            <a:noAutofit/>
-          </a:bodyPr>
-          <a:lstStyle/>
-          <a:p>
-            <a:pPr algn="just">
-              <a:spcBef>
-                <a:spcPct val="20000"/>
-              </a:spcBef>
-              <a:defRPr/>
-            </a:pPr>
-            <a:r>
-              <a:rPr lang="zh-TW" altLang="en-US" sz="4800" b="1" kern="0" dirty="0">
-                <a:solidFill>
-                  <a:srgbClr val="00B0F0"/>
-                </a:solidFill>
-                <a:effectLst>
-                  <a:outerShdw blurRad="38100" dist="38100" dir="2700000" algn="tl">
-                    <a:srgbClr val="000000">
-                      <a:alpha val="43137"/>
-                    </a:srgbClr>
-                  </a:outerShdw>
-                </a:effectLst>
-                <a:latin typeface="微軟正黑體" panose="020B0604030504040204" pitchFamily="34" charset="-120"/>
-                <a:ea typeface="微軟正黑體" panose="020B0604030504040204" pitchFamily="34" charset="-120"/>
-              </a:rPr>
-              <a:t>在開發環境中設定變數</a:t>
-            </a:r>
-          </a:p>
-        </p:txBody>
-      </p:sp>
-      <p:sp>
-        <p:nvSpPr>
-          <p:cNvPr id="2" name="文字方塊 1">
-            <a:extLst>
-              <a:ext uri="{FF2B5EF4-FFF2-40B4-BE49-F238E27FC236}">
-                <a16:creationId xmlns:a16="http://schemas.microsoft.com/office/drawing/2014/main" id="{178B99C9-F0FA-7E8E-5EC7-27E6EAB07462}"/>
-              </a:ext>
-            </a:extLst>
-          </p:cNvPr>
-          <p:cNvSpPr txBox="1"/>
-          <p:nvPr/>
-        </p:nvSpPr>
-        <p:spPr>
-          <a:xfrm>
-            <a:off x="632637" y="1211150"/>
-            <a:ext cx="8077200" cy="2062103"/>
-          </a:xfrm>
-          <a:prstGeom prst="rect">
-            <a:avLst/>
-          </a:prstGeom>
-          <a:noFill/>
-        </p:spPr>
-        <p:txBody>
-          <a:bodyPr wrap="square" rtlCol="0">
-            <a:spAutoFit/>
-          </a:bodyPr>
-          <a:lstStyle/>
-          <a:p>
-            <a:r>
-              <a:rPr kumimoji="1" lang="zh-TW" altLang="en-US" sz="3200" dirty="0">
-                <a:solidFill>
-                  <a:prstClr val="white"/>
-                </a:solidFill>
-                <a:effectLst>
-                  <a:outerShdw blurRad="38100" dist="38100" dir="2700000" algn="tl">
-                    <a:srgbClr val="000000">
-                      <a:alpha val="43137"/>
-                    </a:srgbClr>
-                  </a:outerShdw>
-                </a:effectLst>
-                <a:latin typeface="微軟正黑體" panose="020B0604030504040204" pitchFamily="34" charset="-120"/>
-                <a:ea typeface="微軟正黑體" panose="020B0604030504040204" pitchFamily="34" charset="-120"/>
-                <a:cs typeface="Heiti TC Light"/>
-              </a:rPr>
-              <a:t>正確作法：使用</a:t>
-            </a:r>
-            <a:r>
-              <a:rPr kumimoji="1" lang="en-US" altLang="zh-TW" sz="3200" dirty="0" err="1">
-                <a:solidFill>
-                  <a:prstClr val="white"/>
-                </a:solidFill>
-                <a:effectLst>
-                  <a:outerShdw blurRad="38100" dist="38100" dir="2700000" algn="tl">
-                    <a:srgbClr val="000000">
-                      <a:alpha val="43137"/>
-                    </a:srgbClr>
-                  </a:outerShdw>
-                </a:effectLst>
-                <a:latin typeface="微軟正黑體" panose="020B0604030504040204" pitchFamily="34" charset="-120"/>
-                <a:ea typeface="微軟正黑體" panose="020B0604030504040204" pitchFamily="34" charset="-120"/>
-                <a:cs typeface="Heiti TC Light"/>
-              </a:rPr>
-              <a:t>conda</a:t>
-            </a:r>
-            <a:r>
-              <a:rPr kumimoji="1" lang="zh-TW" altLang="en-US" sz="3200" dirty="0">
-                <a:solidFill>
-                  <a:prstClr val="white"/>
-                </a:solidFill>
-                <a:effectLst>
-                  <a:outerShdw blurRad="38100" dist="38100" dir="2700000" algn="tl">
-                    <a:srgbClr val="000000">
-                      <a:alpha val="43137"/>
-                    </a:srgbClr>
-                  </a:outerShdw>
-                </a:effectLst>
-                <a:latin typeface="微軟正黑體" panose="020B0604030504040204" pitchFamily="34" charset="-120"/>
-                <a:ea typeface="微軟正黑體" panose="020B0604030504040204" pitchFamily="34" charset="-120"/>
-                <a:cs typeface="Heiti TC Light"/>
-              </a:rPr>
-              <a:t>設定</a:t>
-            </a:r>
-            <a:endParaRPr kumimoji="1" lang="en-US" altLang="zh-TW" sz="3200" dirty="0">
-              <a:solidFill>
-                <a:prstClr val="white"/>
-              </a:solidFill>
-              <a:effectLst>
-                <a:outerShdw blurRad="38100" dist="38100" dir="2700000" algn="tl">
-                  <a:srgbClr val="000000">
-                    <a:alpha val="43137"/>
-                  </a:srgbClr>
-                </a:outerShdw>
-              </a:effectLst>
-              <a:latin typeface="微軟正黑體" panose="020B0604030504040204" pitchFamily="34" charset="-120"/>
-              <a:ea typeface="微軟正黑體" panose="020B0604030504040204" pitchFamily="34" charset="-120"/>
-              <a:cs typeface="Heiti TC Light"/>
-            </a:endParaRPr>
-          </a:p>
-          <a:p>
-            <a:r>
-              <a:rPr kumimoji="1" lang="en-US" altLang="zh-TW" sz="3200" dirty="0" err="1">
-                <a:solidFill>
-                  <a:srgbClr val="00B050"/>
-                </a:solidFill>
-                <a:effectLst>
-                  <a:outerShdw blurRad="38100" dist="38100" dir="2700000" algn="tl">
-                    <a:srgbClr val="000000">
-                      <a:alpha val="43137"/>
-                    </a:srgbClr>
-                  </a:outerShdw>
-                </a:effectLst>
-                <a:latin typeface="Consolas" panose="020B0609020204030204" pitchFamily="49" charset="0"/>
-                <a:ea typeface="微軟正黑體" panose="020B0604030504040204" pitchFamily="34" charset="-120"/>
-                <a:cs typeface="Heiti TC Light"/>
-              </a:rPr>
-              <a:t>conda</a:t>
-            </a:r>
-            <a:r>
-              <a:rPr kumimoji="1" lang="en-US" altLang="zh-TW" sz="3200" dirty="0">
-                <a:solidFill>
-                  <a:srgbClr val="00B050"/>
-                </a:solidFill>
-                <a:effectLst>
-                  <a:outerShdw blurRad="38100" dist="38100" dir="2700000" algn="tl">
-                    <a:srgbClr val="000000">
-                      <a:alpha val="43137"/>
-                    </a:srgbClr>
-                  </a:outerShdw>
-                </a:effectLst>
-                <a:latin typeface="Consolas" panose="020B0609020204030204" pitchFamily="49" charset="0"/>
-                <a:ea typeface="微軟正黑體" panose="020B0604030504040204" pitchFamily="34" charset="-120"/>
-                <a:cs typeface="Heiti TC Light"/>
-              </a:rPr>
-              <a:t> activate </a:t>
-            </a:r>
-            <a:r>
-              <a:rPr kumimoji="1" lang="en-US" altLang="zh-TW" sz="3200" dirty="0" err="1">
-                <a:solidFill>
-                  <a:srgbClr val="00B050"/>
-                </a:solidFill>
-                <a:effectLst>
-                  <a:outerShdw blurRad="38100" dist="38100" dir="2700000" algn="tl">
-                    <a:srgbClr val="000000">
-                      <a:alpha val="43137"/>
-                    </a:srgbClr>
-                  </a:outerShdw>
-                </a:effectLst>
-                <a:latin typeface="Consolas" panose="020B0609020204030204" pitchFamily="49" charset="0"/>
-                <a:ea typeface="微軟正黑體" panose="020B0604030504040204" pitchFamily="34" charset="-120"/>
-                <a:cs typeface="Heiti TC Light"/>
-              </a:rPr>
-              <a:t>linebot</a:t>
-            </a:r>
-            <a:endParaRPr kumimoji="1" lang="en-US" altLang="zh-TW" sz="3200" dirty="0">
-              <a:solidFill>
-                <a:srgbClr val="00B050"/>
-              </a:solidFill>
-              <a:effectLst>
-                <a:outerShdw blurRad="38100" dist="38100" dir="2700000" algn="tl">
-                  <a:srgbClr val="000000">
-                    <a:alpha val="43137"/>
-                  </a:srgbClr>
-                </a:outerShdw>
-              </a:effectLst>
-              <a:latin typeface="Consolas" panose="020B0609020204030204" pitchFamily="49" charset="0"/>
-              <a:ea typeface="微軟正黑體" panose="020B0604030504040204" pitchFamily="34" charset="-120"/>
-              <a:cs typeface="Heiti TC Light"/>
-            </a:endParaRPr>
-          </a:p>
-          <a:p>
-            <a:r>
-              <a:rPr kumimoji="1" lang="en-US" altLang="zh-TW" sz="3200" dirty="0" err="1">
-                <a:solidFill>
-                  <a:srgbClr val="00B050"/>
-                </a:solidFill>
-                <a:effectLst>
-                  <a:outerShdw blurRad="38100" dist="38100" dir="2700000" algn="tl">
-                    <a:srgbClr val="000000">
-                      <a:alpha val="43137"/>
-                    </a:srgbClr>
-                  </a:outerShdw>
-                </a:effectLst>
-                <a:latin typeface="Consolas" panose="020B0609020204030204" pitchFamily="49" charset="0"/>
-                <a:ea typeface="微軟正黑體" panose="020B0604030504040204" pitchFamily="34" charset="-120"/>
-                <a:cs typeface="Heiti TC Light"/>
-              </a:rPr>
-              <a:t>conda</a:t>
-            </a:r>
-            <a:r>
-              <a:rPr kumimoji="1" lang="en-US" altLang="zh-TW" sz="3200" dirty="0">
-                <a:solidFill>
-                  <a:srgbClr val="00B050"/>
-                </a:solidFill>
-                <a:effectLst>
-                  <a:outerShdw blurRad="38100" dist="38100" dir="2700000" algn="tl">
-                    <a:srgbClr val="000000">
-                      <a:alpha val="43137"/>
-                    </a:srgbClr>
-                  </a:outerShdw>
-                </a:effectLst>
-                <a:latin typeface="Consolas" panose="020B0609020204030204" pitchFamily="49" charset="0"/>
-                <a:ea typeface="微軟正黑體" panose="020B0604030504040204" pitchFamily="34" charset="-120"/>
-                <a:cs typeface="Heiti TC Light"/>
-              </a:rPr>
-              <a:t> env config vars set &lt;</a:t>
-            </a:r>
-            <a:r>
-              <a:rPr kumimoji="1" lang="zh-TW" altLang="en-US" sz="3200" dirty="0">
-                <a:solidFill>
-                  <a:srgbClr val="00B050"/>
-                </a:solidFill>
-                <a:effectLst>
-                  <a:outerShdw blurRad="38100" dist="38100" dir="2700000" algn="tl">
-                    <a:srgbClr val="000000">
-                      <a:alpha val="43137"/>
-                    </a:srgbClr>
-                  </a:outerShdw>
-                </a:effectLst>
-                <a:latin typeface="Consolas" panose="020B0609020204030204" pitchFamily="49" charset="0"/>
-                <a:ea typeface="微軟正黑體" panose="020B0604030504040204" pitchFamily="34" charset="-120"/>
-                <a:cs typeface="Heiti TC Light"/>
-              </a:rPr>
-              <a:t>要設定的變數</a:t>
-            </a:r>
-            <a:r>
-              <a:rPr kumimoji="1" lang="en-US" altLang="zh-TW" sz="3200" dirty="0">
-                <a:solidFill>
-                  <a:srgbClr val="00B050"/>
-                </a:solidFill>
-                <a:effectLst>
-                  <a:outerShdw blurRad="38100" dist="38100" dir="2700000" algn="tl">
-                    <a:srgbClr val="000000">
-                      <a:alpha val="43137"/>
-                    </a:srgbClr>
-                  </a:outerShdw>
-                </a:effectLst>
-                <a:latin typeface="Consolas" panose="020B0609020204030204" pitchFamily="49" charset="0"/>
-                <a:ea typeface="微軟正黑體" panose="020B0604030504040204" pitchFamily="34" charset="-120"/>
-                <a:cs typeface="Heiti TC Light"/>
-              </a:rPr>
-              <a:t>&gt;=&lt;</a:t>
-            </a:r>
-            <a:r>
-              <a:rPr kumimoji="1" lang="zh-TW" altLang="en-US" sz="3200" dirty="0">
-                <a:solidFill>
-                  <a:srgbClr val="00B050"/>
-                </a:solidFill>
-                <a:effectLst>
-                  <a:outerShdw blurRad="38100" dist="38100" dir="2700000" algn="tl">
-                    <a:srgbClr val="000000">
-                      <a:alpha val="43137"/>
-                    </a:srgbClr>
-                  </a:outerShdw>
-                </a:effectLst>
-                <a:latin typeface="Consolas" panose="020B0609020204030204" pitchFamily="49" charset="0"/>
-                <a:ea typeface="微軟正黑體" panose="020B0604030504040204" pitchFamily="34" charset="-120"/>
-                <a:cs typeface="Heiti TC Light"/>
-              </a:rPr>
-              <a:t>你的金鑰</a:t>
-            </a:r>
-            <a:r>
-              <a:rPr kumimoji="1" lang="en-US" altLang="zh-TW" sz="3200" dirty="0">
-                <a:solidFill>
-                  <a:srgbClr val="00B050"/>
-                </a:solidFill>
-                <a:effectLst>
-                  <a:outerShdw blurRad="38100" dist="38100" dir="2700000" algn="tl">
-                    <a:srgbClr val="000000">
-                      <a:alpha val="43137"/>
-                    </a:srgbClr>
-                  </a:outerShdw>
-                </a:effectLst>
-                <a:latin typeface="Consolas" panose="020B0609020204030204" pitchFamily="49" charset="0"/>
-                <a:ea typeface="微軟正黑體" panose="020B0604030504040204" pitchFamily="34" charset="-120"/>
-                <a:cs typeface="Heiti TC Light"/>
-              </a:rPr>
-              <a:t>&gt;</a:t>
-            </a:r>
-          </a:p>
-        </p:txBody>
-      </p:sp>
-      <p:pic>
-        <p:nvPicPr>
-          <p:cNvPr id="14" name="圖形 13" descr="核取記號 以實心填滿">
-            <a:extLst>
-              <a:ext uri="{FF2B5EF4-FFF2-40B4-BE49-F238E27FC236}">
-                <a16:creationId xmlns:a16="http://schemas.microsoft.com/office/drawing/2014/main" id="{6EFC7571-8D0B-B8F8-C0D1-DF0CC2DE9503}"/>
-              </a:ext>
-            </a:extLst>
-          </p:cNvPr>
-          <p:cNvPicPr>
-            <a:picLocks noChangeAspect="1"/>
-          </p:cNvPicPr>
-          <p:nvPr/>
-        </p:nvPicPr>
-        <p:blipFill>
-          <a:blip r:embed="rId3">
-            <a:extLst>
-              <a:ext uri="{28A0092B-C50C-407E-A947-70E740481C1C}">
-                <a14:useLocalDpi xmlns:a14="http://schemas.microsoft.com/office/drawing/2010/main" val="0"/>
-              </a:ext>
-              <a:ext uri="{96DAC541-7B7A-43D3-8B79-37D633B846F1}">
-                <asvg:svgBlip xmlns:asvg="http://schemas.microsoft.com/office/drawing/2016/SVG/main" r:embed="rId4"/>
-              </a:ext>
-            </a:extLst>
-          </a:blip>
-          <a:stretch>
-            <a:fillRect/>
-          </a:stretch>
-        </p:blipFill>
-        <p:spPr>
-          <a:xfrm>
-            <a:off x="3795823" y="3009875"/>
-            <a:ext cx="1690577" cy="1690577"/>
+            <a:off x="749876" y="1882919"/>
+            <a:ext cx="7186139" cy="3111645"/>
           </a:xfrm>
           <a:prstGeom prst="rect">
             <a:avLst/>
@@ -36241,627 +35010,7 @@
     </p:spTree>
     <p:extLst>
       <p:ext uri="{BB962C8B-B14F-4D97-AF65-F5344CB8AC3E}">
-        <p14:creationId xmlns:p14="http://schemas.microsoft.com/office/powerpoint/2010/main" val="3991239165"/>
-      </p:ext>
-    </p:extLst>
-  </p:cSld>
-  <p:clrMapOvr>
-    <a:masterClrMapping/>
-  </p:clrMapOvr>
-  <p:transition>
-    <p:fade/>
-  </p:transition>
-  <p:timing>
-    <p:tnLst>
-      <p:par>
-        <p:cTn id="1" dur="indefinite" restart="never" nodeType="tmRoot">
-          <p:childTnLst>
-            <p:seq concurrent="1" nextAc="seek">
-              <p:cTn id="2" dur="indefinite" nodeType="mainSeq">
-                <p:childTnLst>
-                  <p:par>
-                    <p:cTn id="3" fill="hold">
-                      <p:stCondLst>
-                        <p:cond delay="indefinite"/>
-                      </p:stCondLst>
-                      <p:childTnLst>
-                        <p:par>
-                          <p:cTn id="4" fill="hold">
-                            <p:stCondLst>
-                              <p:cond delay="0"/>
-                            </p:stCondLst>
-                            <p:childTnLst>
-                              <p:par>
-                                <p:cTn id="5" presetID="10" presetClass="entr" presetSubtype="0" fill="hold" nodeType="clickEffect">
-                                  <p:stCondLst>
-                                    <p:cond delay="0"/>
-                                  </p:stCondLst>
-                                  <p:childTnLst>
-                                    <p:set>
-                                      <p:cBhvr>
-                                        <p:cTn id="6" dur="1" fill="hold">
-                                          <p:stCondLst>
-                                            <p:cond delay="0"/>
-                                          </p:stCondLst>
-                                        </p:cTn>
-                                        <p:tgtEl>
-                                          <p:spTgt spid="14"/>
-                                        </p:tgtEl>
-                                        <p:attrNameLst>
-                                          <p:attrName>style.visibility</p:attrName>
-                                        </p:attrNameLst>
-                                      </p:cBhvr>
-                                      <p:to>
-                                        <p:strVal val="visible"/>
-                                      </p:to>
-                                    </p:set>
-                                    <p:animEffect transition="in" filter="fade">
-                                      <p:cBhvr>
-                                        <p:cTn id="7" dur="1000"/>
-                                        <p:tgtEl>
-                                          <p:spTgt spid="14"/>
-                                        </p:tgtEl>
-                                      </p:cBhvr>
-                                    </p:animEffect>
-                                  </p:childTnLst>
-                                </p:cTn>
-                              </p:par>
-                            </p:childTnLst>
-                          </p:cTn>
-                        </p:par>
-                      </p:childTnLst>
-                    </p:cTn>
-                  </p:par>
-                </p:childTnLst>
-              </p:cTn>
-              <p:prevCondLst>
-                <p:cond evt="onPrev" delay="0">
-                  <p:tgtEl>
-                    <p:sldTgt/>
-                  </p:tgtEl>
-                </p:cond>
-              </p:prevCondLst>
-              <p:nextCondLst>
-                <p:cond evt="onNext" delay="0">
-                  <p:tgtEl>
-                    <p:sldTgt/>
-                  </p:tgtEl>
-                </p:cond>
-              </p:nextCondLst>
-            </p:seq>
-          </p:childTnLst>
-        </p:cTn>
-      </p:par>
-    </p:tnLst>
-  </p:timing>
-</p:sld>
-</file>
-
-<file path=ppt/slides/slide47.xml><?xml version="1.0" encoding="utf-8"?>
-<p:sld xmlns:a="http://schemas.openxmlformats.org/drawingml/2006/main" xmlns:r="http://schemas.openxmlformats.org/officeDocument/2006/relationships" xmlns:p="http://schemas.openxmlformats.org/presentationml/2006/main">
-  <p:cSld>
-    <p:spTree>
-      <p:nvGrpSpPr>
-        <p:cNvPr id="1" name=""/>
-        <p:cNvGrpSpPr/>
-        <p:nvPr/>
-      </p:nvGrpSpPr>
-      <p:grpSpPr>
-        <a:xfrm>
-          <a:off x="0" y="0"/>
-          <a:ext cx="0" cy="0"/>
-          <a:chOff x="0" y="0"/>
-          <a:chExt cx="0" cy="0"/>
-        </a:xfrm>
-      </p:grpSpPr>
-      <p:sp>
-        <p:nvSpPr>
-          <p:cNvPr id="6" name="文字版面配置區 2">
-            <a:extLst>
-              <a:ext uri="{FF2B5EF4-FFF2-40B4-BE49-F238E27FC236}">
-                <a16:creationId xmlns:a16="http://schemas.microsoft.com/office/drawing/2014/main" id="{DC362AB1-BDCB-D11A-89BE-0A2EC77A4AD2}"/>
-              </a:ext>
-            </a:extLst>
-          </p:cNvPr>
-          <p:cNvSpPr txBox="1">
-            <a:spLocks/>
-          </p:cNvSpPr>
-          <p:nvPr/>
-        </p:nvSpPr>
-        <p:spPr>
-          <a:xfrm>
-            <a:off x="1373707" y="110010"/>
-            <a:ext cx="7407034" cy="990600"/>
-          </a:xfrm>
-          <a:prstGeom prst="rect">
-            <a:avLst/>
-          </a:prstGeom>
-        </p:spPr>
-        <p:txBody>
-          <a:bodyPr tIns="91440" bIns="91440" anchor="b" anchorCtr="0">
-            <a:noAutofit/>
-          </a:bodyPr>
-          <a:lstStyle/>
-          <a:p>
-            <a:pPr algn="just">
-              <a:spcBef>
-                <a:spcPct val="20000"/>
-              </a:spcBef>
-              <a:defRPr/>
-            </a:pPr>
-            <a:r>
-              <a:rPr lang="zh-TW" altLang="en-US" sz="4800" b="1" kern="0" dirty="0">
-                <a:solidFill>
-                  <a:srgbClr val="00B0F0"/>
-                </a:solidFill>
-                <a:effectLst>
-                  <a:outerShdw blurRad="38100" dist="38100" dir="2700000" algn="tl">
-                    <a:srgbClr val="000000">
-                      <a:alpha val="43137"/>
-                    </a:srgbClr>
-                  </a:outerShdw>
-                </a:effectLst>
-                <a:latin typeface="微軟正黑體" panose="020B0604030504040204" pitchFamily="34" charset="-120"/>
-                <a:ea typeface="微軟正黑體" panose="020B0604030504040204" pitchFamily="34" charset="-120"/>
-              </a:rPr>
-              <a:t>在開發環境中設定變數</a:t>
-            </a:r>
-          </a:p>
-        </p:txBody>
-      </p:sp>
-      <p:sp>
-        <p:nvSpPr>
-          <p:cNvPr id="2" name="文字方塊 1">
-            <a:extLst>
-              <a:ext uri="{FF2B5EF4-FFF2-40B4-BE49-F238E27FC236}">
-                <a16:creationId xmlns:a16="http://schemas.microsoft.com/office/drawing/2014/main" id="{178B99C9-F0FA-7E8E-5EC7-27E6EAB07462}"/>
-              </a:ext>
-            </a:extLst>
-          </p:cNvPr>
-          <p:cNvSpPr txBox="1"/>
-          <p:nvPr/>
-        </p:nvSpPr>
-        <p:spPr>
-          <a:xfrm>
-            <a:off x="632637" y="1211150"/>
-            <a:ext cx="8077200" cy="584775"/>
-          </a:xfrm>
-          <a:prstGeom prst="rect">
-            <a:avLst/>
-          </a:prstGeom>
-          <a:noFill/>
-        </p:spPr>
-        <p:txBody>
-          <a:bodyPr wrap="square" rtlCol="0">
-            <a:spAutoFit/>
-          </a:bodyPr>
-          <a:lstStyle/>
-          <a:p>
-            <a:r>
-              <a:rPr kumimoji="1" lang="zh-TW" altLang="en-US" sz="3200" dirty="0">
-                <a:solidFill>
-                  <a:prstClr val="white"/>
-                </a:solidFill>
-                <a:effectLst>
-                  <a:outerShdw blurRad="38100" dist="38100" dir="2700000" algn="tl">
-                    <a:srgbClr val="000000">
-                      <a:alpha val="43137"/>
-                    </a:srgbClr>
-                  </a:outerShdw>
-                </a:effectLst>
-                <a:latin typeface="微軟正黑體" panose="020B0604030504040204" pitchFamily="34" charset="-120"/>
-                <a:ea typeface="微軟正黑體" panose="020B0604030504040204" pitchFamily="34" charset="-120"/>
-                <a:cs typeface="Heiti TC Light"/>
-              </a:rPr>
-              <a:t>正確作法：在</a:t>
-            </a:r>
-            <a:r>
-              <a:rPr kumimoji="1" lang="en-US" altLang="zh-TW" sz="3200" dirty="0">
-                <a:solidFill>
-                  <a:prstClr val="white"/>
-                </a:solidFill>
-                <a:effectLst>
-                  <a:outerShdw blurRad="38100" dist="38100" dir="2700000" algn="tl">
-                    <a:srgbClr val="000000">
-                      <a:alpha val="43137"/>
-                    </a:srgbClr>
-                  </a:outerShdw>
-                </a:effectLst>
-                <a:latin typeface="微軟正黑體" panose="020B0604030504040204" pitchFamily="34" charset="-120"/>
-                <a:ea typeface="微軟正黑體" panose="020B0604030504040204" pitchFamily="34" charset="-120"/>
-                <a:cs typeface="Heiti TC Light"/>
-              </a:rPr>
-              <a:t>python</a:t>
-            </a:r>
-            <a:r>
-              <a:rPr kumimoji="1" lang="zh-TW" altLang="en-US" sz="3200" dirty="0">
-                <a:solidFill>
-                  <a:prstClr val="white"/>
-                </a:solidFill>
-                <a:effectLst>
-                  <a:outerShdw blurRad="38100" dist="38100" dir="2700000" algn="tl">
-                    <a:srgbClr val="000000">
-                      <a:alpha val="43137"/>
-                    </a:srgbClr>
-                  </a:outerShdw>
-                </a:effectLst>
-                <a:latin typeface="微軟正黑體" panose="020B0604030504040204" pitchFamily="34" charset="-120"/>
-                <a:ea typeface="微軟正黑體" panose="020B0604030504040204" pitchFamily="34" charset="-120"/>
-                <a:cs typeface="Heiti TC Light"/>
-              </a:rPr>
-              <a:t>中使用</a:t>
-            </a:r>
-            <a:r>
-              <a:rPr kumimoji="1" lang="en-US" altLang="zh-TW" sz="3200" dirty="0" err="1">
-                <a:solidFill>
-                  <a:prstClr val="white"/>
-                </a:solidFill>
-                <a:effectLst>
-                  <a:outerShdw blurRad="38100" dist="38100" dir="2700000" algn="tl">
-                    <a:srgbClr val="000000">
-                      <a:alpha val="43137"/>
-                    </a:srgbClr>
-                  </a:outerShdw>
-                </a:effectLst>
-                <a:latin typeface="微軟正黑體" panose="020B0604030504040204" pitchFamily="34" charset="-120"/>
-                <a:ea typeface="微軟正黑體" panose="020B0604030504040204" pitchFamily="34" charset="-120"/>
-                <a:cs typeface="Heiti TC Light"/>
-              </a:rPr>
-              <a:t>os.environ.get</a:t>
-            </a:r>
-            <a:r>
-              <a:rPr kumimoji="1" lang="en-US" altLang="zh-TW" sz="3200" dirty="0">
-                <a:solidFill>
-                  <a:prstClr val="white"/>
-                </a:solidFill>
-                <a:effectLst>
-                  <a:outerShdw blurRad="38100" dist="38100" dir="2700000" algn="tl">
-                    <a:srgbClr val="000000">
-                      <a:alpha val="43137"/>
-                    </a:srgbClr>
-                  </a:outerShdw>
-                </a:effectLst>
-                <a:latin typeface="微軟正黑體" panose="020B0604030504040204" pitchFamily="34" charset="-120"/>
-                <a:ea typeface="微軟正黑體" panose="020B0604030504040204" pitchFamily="34" charset="-120"/>
-                <a:cs typeface="Heiti TC Light"/>
-              </a:rPr>
-              <a:t>()</a:t>
-            </a:r>
-          </a:p>
-        </p:txBody>
-      </p:sp>
-      <p:pic>
-        <p:nvPicPr>
-          <p:cNvPr id="5" name="圖片 4">
-            <a:extLst>
-              <a:ext uri="{FF2B5EF4-FFF2-40B4-BE49-F238E27FC236}">
-                <a16:creationId xmlns:a16="http://schemas.microsoft.com/office/drawing/2014/main" id="{19C60C62-B511-57FF-2146-29A0E9B784CA}"/>
-              </a:ext>
-            </a:extLst>
-          </p:cNvPr>
-          <p:cNvPicPr>
-            <a:picLocks noChangeAspect="1"/>
-          </p:cNvPicPr>
-          <p:nvPr/>
-        </p:nvPicPr>
-        <p:blipFill>
-          <a:blip r:embed="rId2"/>
-          <a:stretch>
-            <a:fillRect/>
-          </a:stretch>
-        </p:blipFill>
-        <p:spPr>
-          <a:xfrm>
-            <a:off x="388637" y="2262021"/>
-            <a:ext cx="8366725" cy="3384829"/>
-          </a:xfrm>
-          <a:prstGeom prst="rect">
-            <a:avLst/>
-          </a:prstGeom>
-        </p:spPr>
-      </p:pic>
-    </p:spTree>
-    <p:extLst>
-      <p:ext uri="{BB962C8B-B14F-4D97-AF65-F5344CB8AC3E}">
-        <p14:creationId xmlns:p14="http://schemas.microsoft.com/office/powerpoint/2010/main" val="3040650782"/>
-      </p:ext>
-    </p:extLst>
-  </p:cSld>
-  <p:clrMapOvr>
-    <a:masterClrMapping/>
-  </p:clrMapOvr>
-  <p:transition>
-    <p:fade/>
-  </p:transition>
-</p:sld>
-</file>
-
-<file path=ppt/slides/slide48.xml><?xml version="1.0" encoding="utf-8"?>
-<p:sld xmlns:a="http://schemas.openxmlformats.org/drawingml/2006/main" xmlns:r="http://schemas.openxmlformats.org/officeDocument/2006/relationships" xmlns:p="http://schemas.openxmlformats.org/presentationml/2006/main">
-  <p:cSld>
-    <p:spTree>
-      <p:nvGrpSpPr>
-        <p:cNvPr id="1" name=""/>
-        <p:cNvGrpSpPr/>
-        <p:nvPr/>
-      </p:nvGrpSpPr>
-      <p:grpSpPr>
-        <a:xfrm>
-          <a:off x="0" y="0"/>
-          <a:ext cx="0" cy="0"/>
-          <a:chOff x="0" y="0"/>
-          <a:chExt cx="0" cy="0"/>
-        </a:xfrm>
-      </p:grpSpPr>
-      <p:sp>
-        <p:nvSpPr>
-          <p:cNvPr id="6" name="文字版面配置區 2">
-            <a:extLst>
-              <a:ext uri="{FF2B5EF4-FFF2-40B4-BE49-F238E27FC236}">
-                <a16:creationId xmlns:a16="http://schemas.microsoft.com/office/drawing/2014/main" id="{DC362AB1-BDCB-D11A-89BE-0A2EC77A4AD2}"/>
-              </a:ext>
-            </a:extLst>
-          </p:cNvPr>
-          <p:cNvSpPr txBox="1">
-            <a:spLocks/>
-          </p:cNvSpPr>
-          <p:nvPr/>
-        </p:nvSpPr>
-        <p:spPr>
-          <a:xfrm>
-            <a:off x="1309912" y="358103"/>
-            <a:ext cx="7407034" cy="990600"/>
-          </a:xfrm>
-          <a:prstGeom prst="rect">
-            <a:avLst/>
-          </a:prstGeom>
-        </p:spPr>
-        <p:txBody>
-          <a:bodyPr tIns="91440" bIns="91440" anchor="b" anchorCtr="0">
-            <a:noAutofit/>
-          </a:bodyPr>
-          <a:lstStyle/>
-          <a:p>
-            <a:pPr algn="just">
-              <a:spcBef>
-                <a:spcPct val="20000"/>
-              </a:spcBef>
-              <a:defRPr/>
-            </a:pPr>
-            <a:r>
-              <a:rPr lang="zh-TW" altLang="en-US" sz="4800" b="1" kern="0" dirty="0">
-                <a:solidFill>
-                  <a:srgbClr val="00B0F0"/>
-                </a:solidFill>
-                <a:effectLst>
-                  <a:outerShdw blurRad="38100" dist="38100" dir="2700000" algn="tl">
-                    <a:srgbClr val="000000">
-                      <a:alpha val="43137"/>
-                    </a:srgbClr>
-                  </a:outerShdw>
-                </a:effectLst>
-                <a:latin typeface="微軟正黑體" panose="020B0604030504040204" pitchFamily="34" charset="-120"/>
-                <a:ea typeface="微軟正黑體" panose="020B0604030504040204" pitchFamily="34" charset="-120"/>
-              </a:rPr>
-              <a:t>設定</a:t>
-            </a:r>
-            <a:r>
-              <a:rPr lang="en-US" altLang="zh-TW" sz="4800" b="1" kern="0" dirty="0">
-                <a:solidFill>
-                  <a:srgbClr val="00B0F0"/>
-                </a:solidFill>
-                <a:effectLst>
-                  <a:outerShdw blurRad="38100" dist="38100" dir="2700000" algn="tl">
-                    <a:srgbClr val="000000">
-                      <a:alpha val="43137"/>
-                    </a:srgbClr>
-                  </a:outerShdw>
-                </a:effectLst>
-                <a:latin typeface="微軟正黑體" panose="020B0604030504040204" pitchFamily="34" charset="-120"/>
-                <a:ea typeface="微軟正黑體" panose="020B0604030504040204" pitchFamily="34" charset="-120"/>
-              </a:rPr>
-              <a:t>LINE Channel Secret</a:t>
-            </a:r>
-            <a:endParaRPr lang="zh-TW" altLang="en-US" sz="4800" b="1" kern="0" dirty="0">
-              <a:solidFill>
-                <a:srgbClr val="00B0F0"/>
-              </a:solidFill>
-              <a:effectLst>
-                <a:outerShdw blurRad="38100" dist="38100" dir="2700000" algn="tl">
-                  <a:srgbClr val="000000">
-                    <a:alpha val="43137"/>
-                  </a:srgbClr>
-                </a:outerShdw>
-              </a:effectLst>
-              <a:latin typeface="微軟正黑體" panose="020B0604030504040204" pitchFamily="34" charset="-120"/>
-              <a:ea typeface="微軟正黑體" panose="020B0604030504040204" pitchFamily="34" charset="-120"/>
-            </a:endParaRPr>
-          </a:p>
-        </p:txBody>
-      </p:sp>
-      <p:pic>
-        <p:nvPicPr>
-          <p:cNvPr id="5" name="圖片 4">
-            <a:extLst>
-              <a:ext uri="{FF2B5EF4-FFF2-40B4-BE49-F238E27FC236}">
-                <a16:creationId xmlns:a16="http://schemas.microsoft.com/office/drawing/2014/main" id="{CDF7741F-1828-F807-08B0-6213B5B006AB}"/>
-              </a:ext>
-            </a:extLst>
-          </p:cNvPr>
-          <p:cNvPicPr>
-            <a:picLocks noChangeAspect="1"/>
-          </p:cNvPicPr>
-          <p:nvPr/>
-        </p:nvPicPr>
-        <p:blipFill>
-          <a:blip r:embed="rId2"/>
-          <a:stretch>
-            <a:fillRect/>
-          </a:stretch>
-        </p:blipFill>
-        <p:spPr>
-          <a:xfrm>
-            <a:off x="0" y="1600711"/>
-            <a:ext cx="9144000" cy="4478830"/>
-          </a:xfrm>
-          <a:prstGeom prst="rect">
-            <a:avLst/>
-          </a:prstGeom>
-        </p:spPr>
-      </p:pic>
-    </p:spTree>
-    <p:extLst>
-      <p:ext uri="{BB962C8B-B14F-4D97-AF65-F5344CB8AC3E}">
-        <p14:creationId xmlns:p14="http://schemas.microsoft.com/office/powerpoint/2010/main" val="3770080935"/>
-      </p:ext>
-    </p:extLst>
-  </p:cSld>
-  <p:clrMapOvr>
-    <a:masterClrMapping/>
-  </p:clrMapOvr>
-  <p:transition>
-    <p:fade/>
-  </p:transition>
-</p:sld>
-</file>
-
-<file path=ppt/slides/slide49.xml><?xml version="1.0" encoding="utf-8"?>
-<p:sld xmlns:a="http://schemas.openxmlformats.org/drawingml/2006/main" xmlns:r="http://schemas.openxmlformats.org/officeDocument/2006/relationships" xmlns:p="http://schemas.openxmlformats.org/presentationml/2006/main">
-  <p:cSld>
-    <p:spTree>
-      <p:nvGrpSpPr>
-        <p:cNvPr id="1" name=""/>
-        <p:cNvGrpSpPr/>
-        <p:nvPr/>
-      </p:nvGrpSpPr>
-      <p:grpSpPr>
-        <a:xfrm>
-          <a:off x="0" y="0"/>
-          <a:ext cx="0" cy="0"/>
-          <a:chOff x="0" y="0"/>
-          <a:chExt cx="0" cy="0"/>
-        </a:xfrm>
-      </p:grpSpPr>
-      <p:sp>
-        <p:nvSpPr>
-          <p:cNvPr id="6" name="文字版面配置區 2">
-            <a:extLst>
-              <a:ext uri="{FF2B5EF4-FFF2-40B4-BE49-F238E27FC236}">
-                <a16:creationId xmlns:a16="http://schemas.microsoft.com/office/drawing/2014/main" id="{DC362AB1-BDCB-D11A-89BE-0A2EC77A4AD2}"/>
-              </a:ext>
-            </a:extLst>
-          </p:cNvPr>
-          <p:cNvSpPr txBox="1">
-            <a:spLocks/>
-          </p:cNvSpPr>
-          <p:nvPr/>
-        </p:nvSpPr>
-        <p:spPr>
-          <a:xfrm>
-            <a:off x="1309912" y="358103"/>
-            <a:ext cx="7407034" cy="990600"/>
-          </a:xfrm>
-          <a:prstGeom prst="rect">
-            <a:avLst/>
-          </a:prstGeom>
-        </p:spPr>
-        <p:txBody>
-          <a:bodyPr tIns="91440" bIns="91440" anchor="b" anchorCtr="0">
-            <a:noAutofit/>
-          </a:bodyPr>
-          <a:lstStyle/>
-          <a:p>
-            <a:pPr algn="just">
-              <a:spcBef>
-                <a:spcPct val="20000"/>
-              </a:spcBef>
-              <a:defRPr/>
-            </a:pPr>
-            <a:r>
-              <a:rPr lang="zh-TW" altLang="en-US" sz="4800" b="1" kern="0" dirty="0">
-                <a:solidFill>
-                  <a:srgbClr val="00B0F0"/>
-                </a:solidFill>
-                <a:effectLst>
-                  <a:outerShdw blurRad="38100" dist="38100" dir="2700000" algn="tl">
-                    <a:srgbClr val="000000">
-                      <a:alpha val="43137"/>
-                    </a:srgbClr>
-                  </a:outerShdw>
-                </a:effectLst>
-                <a:latin typeface="微軟正黑體" panose="020B0604030504040204" pitchFamily="34" charset="-120"/>
-                <a:ea typeface="微軟正黑體" panose="020B0604030504040204" pitchFamily="34" charset="-120"/>
-              </a:rPr>
-              <a:t>設定</a:t>
-            </a:r>
-            <a:r>
-              <a:rPr lang="en-US" altLang="zh-TW" sz="4800" b="1" kern="0" dirty="0">
-                <a:solidFill>
-                  <a:srgbClr val="00B0F0"/>
-                </a:solidFill>
-                <a:effectLst>
-                  <a:outerShdw blurRad="38100" dist="38100" dir="2700000" algn="tl">
-                    <a:srgbClr val="000000">
-                      <a:alpha val="43137"/>
-                    </a:srgbClr>
-                  </a:outerShdw>
-                </a:effectLst>
-                <a:latin typeface="微軟正黑體" panose="020B0604030504040204" pitchFamily="34" charset="-120"/>
-                <a:ea typeface="微軟正黑體" panose="020B0604030504040204" pitchFamily="34" charset="-120"/>
-              </a:rPr>
-              <a:t>LINE Channel Secret</a:t>
-            </a:r>
-            <a:endParaRPr lang="zh-TW" altLang="en-US" sz="4800" b="1" kern="0" dirty="0">
-              <a:solidFill>
-                <a:srgbClr val="00B0F0"/>
-              </a:solidFill>
-              <a:effectLst>
-                <a:outerShdw blurRad="38100" dist="38100" dir="2700000" algn="tl">
-                  <a:srgbClr val="000000">
-                    <a:alpha val="43137"/>
-                  </a:srgbClr>
-                </a:outerShdw>
-              </a:effectLst>
-              <a:latin typeface="微軟正黑體" panose="020B0604030504040204" pitchFamily="34" charset="-120"/>
-              <a:ea typeface="微軟正黑體" panose="020B0604030504040204" pitchFamily="34" charset="-120"/>
-            </a:endParaRPr>
-          </a:p>
-        </p:txBody>
-      </p:sp>
-      <p:pic>
-        <p:nvPicPr>
-          <p:cNvPr id="3" name="圖片 2">
-            <a:extLst>
-              <a:ext uri="{FF2B5EF4-FFF2-40B4-BE49-F238E27FC236}">
-                <a16:creationId xmlns:a16="http://schemas.microsoft.com/office/drawing/2014/main" id="{52196C93-2135-BCB9-E4C7-72301470D2B6}"/>
-              </a:ext>
-            </a:extLst>
-          </p:cNvPr>
-          <p:cNvPicPr>
-            <a:picLocks noChangeAspect="1"/>
-          </p:cNvPicPr>
-          <p:nvPr/>
-        </p:nvPicPr>
-        <p:blipFill>
-          <a:blip r:embed="rId2"/>
-          <a:stretch>
-            <a:fillRect/>
-          </a:stretch>
-        </p:blipFill>
-        <p:spPr>
-          <a:xfrm>
-            <a:off x="827588" y="1524708"/>
-            <a:ext cx="7889358" cy="5051381"/>
-          </a:xfrm>
-          <a:prstGeom prst="rect">
-            <a:avLst/>
-          </a:prstGeom>
-        </p:spPr>
-      </p:pic>
-    </p:spTree>
-    <p:extLst>
-      <p:ext uri="{BB962C8B-B14F-4D97-AF65-F5344CB8AC3E}">
-        <p14:creationId xmlns:p14="http://schemas.microsoft.com/office/powerpoint/2010/main" val="218406963"/>
+        <p14:creationId xmlns:p14="http://schemas.microsoft.com/office/powerpoint/2010/main" val="3194561646"/>
       </p:ext>
     </p:extLst>
   </p:cSld>
@@ -37096,10 +35245,10 @@
       </p:sp>
       <p:pic>
         <p:nvPicPr>
-          <p:cNvPr id="3" name="圖片 2">
+          <p:cNvPr id="6" name="圖片 5">
             <a:extLst>
               <a:ext uri="{FF2B5EF4-FFF2-40B4-BE49-F238E27FC236}">
-                <a16:creationId xmlns:a16="http://schemas.microsoft.com/office/drawing/2014/main" id="{B322827B-38BC-3273-F36E-4377D7F7DF26}"/>
+                <a16:creationId xmlns:a16="http://schemas.microsoft.com/office/drawing/2014/main" id="{46D97138-57F8-4146-922B-06E650AD6178}"/>
               </a:ext>
             </a:extLst>
           </p:cNvPr>
@@ -37109,21 +35258,15 @@
           <p:nvPr/>
         </p:nvPicPr>
         <p:blipFill>
-          <a:blip r:embed="rId3">
-            <a:extLst>
-              <a:ext uri="{28A0092B-C50C-407E-A947-70E740481C1C}">
-                <a14:useLocalDpi xmlns:a14="http://schemas.microsoft.com/office/drawing/2010/main" val="0"/>
-              </a:ext>
-            </a:extLst>
-          </a:blip>
+          <a:blip r:embed="rId3"/>
           <a:stretch>
             <a:fillRect/>
           </a:stretch>
         </p:blipFill>
         <p:spPr>
           <a:xfrm>
-            <a:off x="1859529" y="2142543"/>
-            <a:ext cx="5905375" cy="4561393"/>
+            <a:off x="1308683" y="2126559"/>
+            <a:ext cx="6034068" cy="4731441"/>
           </a:xfrm>
           <a:prstGeom prst="rect">
             <a:avLst/>
@@ -37134,1933 +35277,6 @@
     <p:extLst>
       <p:ext uri="{BB962C8B-B14F-4D97-AF65-F5344CB8AC3E}">
         <p14:creationId xmlns:p14="http://schemas.microsoft.com/office/powerpoint/2010/main" val="1664569333"/>
-      </p:ext>
-    </p:extLst>
-  </p:cSld>
-  <p:clrMapOvr>
-    <a:masterClrMapping/>
-  </p:clrMapOvr>
-  <p:transition>
-    <p:fade/>
-  </p:transition>
-</p:sld>
-</file>
-
-<file path=ppt/slides/slide50.xml><?xml version="1.0" encoding="utf-8"?>
-<p:sld xmlns:a="http://schemas.openxmlformats.org/drawingml/2006/main" xmlns:r="http://schemas.openxmlformats.org/officeDocument/2006/relationships" xmlns:p="http://schemas.openxmlformats.org/presentationml/2006/main">
-  <p:cSld>
-    <p:spTree>
-      <p:nvGrpSpPr>
-        <p:cNvPr id="1" name=""/>
-        <p:cNvGrpSpPr/>
-        <p:nvPr/>
-      </p:nvGrpSpPr>
-      <p:grpSpPr>
-        <a:xfrm>
-          <a:off x="0" y="0"/>
-          <a:ext cx="0" cy="0"/>
-          <a:chOff x="0" y="0"/>
-          <a:chExt cx="0" cy="0"/>
-        </a:xfrm>
-      </p:grpSpPr>
-      <p:sp>
-        <p:nvSpPr>
-          <p:cNvPr id="6" name="文字版面配置區 2">
-            <a:extLst>
-              <a:ext uri="{FF2B5EF4-FFF2-40B4-BE49-F238E27FC236}">
-                <a16:creationId xmlns:a16="http://schemas.microsoft.com/office/drawing/2014/main" id="{DC362AB1-BDCB-D11A-89BE-0A2EC77A4AD2}"/>
-              </a:ext>
-            </a:extLst>
-          </p:cNvPr>
-          <p:cNvSpPr txBox="1">
-            <a:spLocks/>
-          </p:cNvSpPr>
-          <p:nvPr/>
-        </p:nvSpPr>
-        <p:spPr>
-          <a:xfrm>
-            <a:off x="1309912" y="358103"/>
-            <a:ext cx="7407034" cy="990600"/>
-          </a:xfrm>
-          <a:prstGeom prst="rect">
-            <a:avLst/>
-          </a:prstGeom>
-        </p:spPr>
-        <p:txBody>
-          <a:bodyPr tIns="91440" bIns="91440" anchor="b" anchorCtr="0">
-            <a:noAutofit/>
-          </a:bodyPr>
-          <a:lstStyle/>
-          <a:p>
-            <a:pPr algn="just">
-              <a:spcBef>
-                <a:spcPct val="20000"/>
-              </a:spcBef>
-              <a:defRPr/>
-            </a:pPr>
-            <a:r>
-              <a:rPr lang="zh-TW" altLang="en-US" sz="4800" b="1" kern="0" dirty="0">
-                <a:solidFill>
-                  <a:srgbClr val="00B0F0"/>
-                </a:solidFill>
-                <a:effectLst>
-                  <a:outerShdw blurRad="38100" dist="38100" dir="2700000" algn="tl">
-                    <a:srgbClr val="000000">
-                      <a:alpha val="43137"/>
-                    </a:srgbClr>
-                  </a:outerShdw>
-                </a:effectLst>
-                <a:latin typeface="微軟正黑體" panose="020B0604030504040204" pitchFamily="34" charset="-120"/>
-                <a:ea typeface="微軟正黑體" panose="020B0604030504040204" pitchFamily="34" charset="-120"/>
-              </a:rPr>
-              <a:t>設定</a:t>
-            </a:r>
-            <a:r>
-              <a:rPr lang="en-US" altLang="zh-TW" sz="4800" b="1" kern="0" dirty="0">
-                <a:solidFill>
-                  <a:srgbClr val="00B0F0"/>
-                </a:solidFill>
-                <a:effectLst>
-                  <a:outerShdw blurRad="38100" dist="38100" dir="2700000" algn="tl">
-                    <a:srgbClr val="000000">
-                      <a:alpha val="43137"/>
-                    </a:srgbClr>
-                  </a:outerShdw>
-                </a:effectLst>
-                <a:latin typeface="微軟正黑體" panose="020B0604030504040204" pitchFamily="34" charset="-120"/>
-                <a:ea typeface="微軟正黑體" panose="020B0604030504040204" pitchFamily="34" charset="-120"/>
-              </a:rPr>
-              <a:t>LINE Channel Secret</a:t>
-            </a:r>
-            <a:endParaRPr lang="zh-TW" altLang="en-US" sz="4800" b="1" kern="0" dirty="0">
-              <a:solidFill>
-                <a:srgbClr val="00B0F0"/>
-              </a:solidFill>
-              <a:effectLst>
-                <a:outerShdw blurRad="38100" dist="38100" dir="2700000" algn="tl">
-                  <a:srgbClr val="000000">
-                    <a:alpha val="43137"/>
-                  </a:srgbClr>
-                </a:outerShdw>
-              </a:effectLst>
-              <a:latin typeface="微軟正黑體" panose="020B0604030504040204" pitchFamily="34" charset="-120"/>
-              <a:ea typeface="微軟正黑體" panose="020B0604030504040204" pitchFamily="34" charset="-120"/>
-            </a:endParaRPr>
-          </a:p>
-        </p:txBody>
-      </p:sp>
-      <p:pic>
-        <p:nvPicPr>
-          <p:cNvPr id="4" name="圖片 3">
-            <a:extLst>
-              <a:ext uri="{FF2B5EF4-FFF2-40B4-BE49-F238E27FC236}">
-                <a16:creationId xmlns:a16="http://schemas.microsoft.com/office/drawing/2014/main" id="{70CC776C-F54E-3EE8-5149-8D2290C22E4F}"/>
-              </a:ext>
-            </a:extLst>
-          </p:cNvPr>
-          <p:cNvPicPr>
-            <a:picLocks noChangeAspect="1"/>
-          </p:cNvPicPr>
-          <p:nvPr/>
-        </p:nvPicPr>
-        <p:blipFill>
-          <a:blip r:embed="rId2"/>
-          <a:stretch>
-            <a:fillRect/>
-          </a:stretch>
-        </p:blipFill>
-        <p:spPr>
-          <a:xfrm>
-            <a:off x="882858" y="1494858"/>
-            <a:ext cx="7834088" cy="4955420"/>
-          </a:xfrm>
-          <a:prstGeom prst="rect">
-            <a:avLst/>
-          </a:prstGeom>
-        </p:spPr>
-      </p:pic>
-    </p:spTree>
-    <p:extLst>
-      <p:ext uri="{BB962C8B-B14F-4D97-AF65-F5344CB8AC3E}">
-        <p14:creationId xmlns:p14="http://schemas.microsoft.com/office/powerpoint/2010/main" val="342026300"/>
-      </p:ext>
-    </p:extLst>
-  </p:cSld>
-  <p:clrMapOvr>
-    <a:masterClrMapping/>
-  </p:clrMapOvr>
-  <p:transition>
-    <p:fade/>
-  </p:transition>
-</p:sld>
-</file>
-
-<file path=ppt/slides/slide51.xml><?xml version="1.0" encoding="utf-8"?>
-<p:sld xmlns:a="http://schemas.openxmlformats.org/drawingml/2006/main" xmlns:r="http://schemas.openxmlformats.org/officeDocument/2006/relationships" xmlns:p="http://schemas.openxmlformats.org/presentationml/2006/main">
-  <p:cSld>
-    <p:spTree>
-      <p:nvGrpSpPr>
-        <p:cNvPr id="1" name=""/>
-        <p:cNvGrpSpPr/>
-        <p:nvPr/>
-      </p:nvGrpSpPr>
-      <p:grpSpPr>
-        <a:xfrm>
-          <a:off x="0" y="0"/>
-          <a:ext cx="0" cy="0"/>
-          <a:chOff x="0" y="0"/>
-          <a:chExt cx="0" cy="0"/>
-        </a:xfrm>
-      </p:grpSpPr>
-      <p:sp>
-        <p:nvSpPr>
-          <p:cNvPr id="6" name="文字版面配置區 2">
-            <a:extLst>
-              <a:ext uri="{FF2B5EF4-FFF2-40B4-BE49-F238E27FC236}">
-                <a16:creationId xmlns:a16="http://schemas.microsoft.com/office/drawing/2014/main" id="{DC362AB1-BDCB-D11A-89BE-0A2EC77A4AD2}"/>
-              </a:ext>
-            </a:extLst>
-          </p:cNvPr>
-          <p:cNvSpPr txBox="1">
-            <a:spLocks/>
-          </p:cNvSpPr>
-          <p:nvPr/>
-        </p:nvSpPr>
-        <p:spPr>
-          <a:xfrm>
-            <a:off x="1309912" y="358103"/>
-            <a:ext cx="7407034" cy="990600"/>
-          </a:xfrm>
-          <a:prstGeom prst="rect">
-            <a:avLst/>
-          </a:prstGeom>
-        </p:spPr>
-        <p:txBody>
-          <a:bodyPr tIns="91440" bIns="91440" anchor="b" anchorCtr="0">
-            <a:noAutofit/>
-          </a:bodyPr>
-          <a:lstStyle/>
-          <a:p>
-            <a:pPr algn="just">
-              <a:spcBef>
-                <a:spcPct val="20000"/>
-              </a:spcBef>
-              <a:defRPr/>
-            </a:pPr>
-            <a:r>
-              <a:rPr lang="zh-TW" altLang="en-US" sz="4800" b="1" kern="0" dirty="0">
-                <a:solidFill>
-                  <a:srgbClr val="00B0F0"/>
-                </a:solidFill>
-                <a:effectLst>
-                  <a:outerShdw blurRad="38100" dist="38100" dir="2700000" algn="tl">
-                    <a:srgbClr val="000000">
-                      <a:alpha val="43137"/>
-                    </a:srgbClr>
-                  </a:outerShdw>
-                </a:effectLst>
-                <a:latin typeface="微軟正黑體" panose="020B0604030504040204" pitchFamily="34" charset="-120"/>
-                <a:ea typeface="微軟正黑體" panose="020B0604030504040204" pitchFamily="34" charset="-120"/>
-              </a:rPr>
-              <a:t>設定</a:t>
-            </a:r>
-            <a:r>
-              <a:rPr lang="en-US" altLang="zh-TW" sz="4800" b="1" kern="0" dirty="0">
-                <a:solidFill>
-                  <a:srgbClr val="00B0F0"/>
-                </a:solidFill>
-                <a:effectLst>
-                  <a:outerShdw blurRad="38100" dist="38100" dir="2700000" algn="tl">
-                    <a:srgbClr val="000000">
-                      <a:alpha val="43137"/>
-                    </a:srgbClr>
-                  </a:outerShdw>
-                </a:effectLst>
-                <a:latin typeface="微軟正黑體" panose="020B0604030504040204" pitchFamily="34" charset="-120"/>
-                <a:ea typeface="微軟正黑體" panose="020B0604030504040204" pitchFamily="34" charset="-120"/>
-              </a:rPr>
-              <a:t>LINE Channel Secret</a:t>
-            </a:r>
-            <a:endParaRPr lang="zh-TW" altLang="en-US" sz="4800" b="1" kern="0" dirty="0">
-              <a:solidFill>
-                <a:srgbClr val="00B0F0"/>
-              </a:solidFill>
-              <a:effectLst>
-                <a:outerShdw blurRad="38100" dist="38100" dir="2700000" algn="tl">
-                  <a:srgbClr val="000000">
-                    <a:alpha val="43137"/>
-                  </a:srgbClr>
-                </a:outerShdw>
-              </a:effectLst>
-              <a:latin typeface="微軟正黑體" panose="020B0604030504040204" pitchFamily="34" charset="-120"/>
-              <a:ea typeface="微軟正黑體" panose="020B0604030504040204" pitchFamily="34" charset="-120"/>
-            </a:endParaRPr>
-          </a:p>
-        </p:txBody>
-      </p:sp>
-      <p:pic>
-        <p:nvPicPr>
-          <p:cNvPr id="3" name="圖片 2">
-            <a:extLst>
-              <a:ext uri="{FF2B5EF4-FFF2-40B4-BE49-F238E27FC236}">
-                <a16:creationId xmlns:a16="http://schemas.microsoft.com/office/drawing/2014/main" id="{F52818BA-E3FB-E8A1-C61A-1B1B2ED9AF09}"/>
-              </a:ext>
-            </a:extLst>
-          </p:cNvPr>
-          <p:cNvPicPr>
-            <a:picLocks noChangeAspect="1"/>
-          </p:cNvPicPr>
-          <p:nvPr/>
-        </p:nvPicPr>
-        <p:blipFill>
-          <a:blip r:embed="rId2"/>
-          <a:stretch>
-            <a:fillRect/>
-          </a:stretch>
-        </p:blipFill>
-        <p:spPr>
-          <a:xfrm>
-            <a:off x="0" y="1713835"/>
-            <a:ext cx="8944089" cy="5016843"/>
-          </a:xfrm>
-          <a:prstGeom prst="rect">
-            <a:avLst/>
-          </a:prstGeom>
-        </p:spPr>
-      </p:pic>
-    </p:spTree>
-    <p:extLst>
-      <p:ext uri="{BB962C8B-B14F-4D97-AF65-F5344CB8AC3E}">
-        <p14:creationId xmlns:p14="http://schemas.microsoft.com/office/powerpoint/2010/main" val="2937618688"/>
-      </p:ext>
-    </p:extLst>
-  </p:cSld>
-  <p:clrMapOvr>
-    <a:masterClrMapping/>
-  </p:clrMapOvr>
-  <p:transition>
-    <p:fade/>
-  </p:transition>
-</p:sld>
-</file>
-
-<file path=ppt/slides/slide52.xml><?xml version="1.0" encoding="utf-8"?>
-<p:sld xmlns:a="http://schemas.openxmlformats.org/drawingml/2006/main" xmlns:r="http://schemas.openxmlformats.org/officeDocument/2006/relationships" xmlns:p="http://schemas.openxmlformats.org/presentationml/2006/main">
-  <p:cSld>
-    <p:spTree>
-      <p:nvGrpSpPr>
-        <p:cNvPr id="1" name=""/>
-        <p:cNvGrpSpPr/>
-        <p:nvPr/>
-      </p:nvGrpSpPr>
-      <p:grpSpPr>
-        <a:xfrm>
-          <a:off x="0" y="0"/>
-          <a:ext cx="0" cy="0"/>
-          <a:chOff x="0" y="0"/>
-          <a:chExt cx="0" cy="0"/>
-        </a:xfrm>
-      </p:grpSpPr>
-      <p:sp>
-        <p:nvSpPr>
-          <p:cNvPr id="6" name="文字版面配置區 2">
-            <a:extLst>
-              <a:ext uri="{FF2B5EF4-FFF2-40B4-BE49-F238E27FC236}">
-                <a16:creationId xmlns:a16="http://schemas.microsoft.com/office/drawing/2014/main" id="{DC362AB1-BDCB-D11A-89BE-0A2EC77A4AD2}"/>
-              </a:ext>
-            </a:extLst>
-          </p:cNvPr>
-          <p:cNvSpPr txBox="1">
-            <a:spLocks/>
-          </p:cNvSpPr>
-          <p:nvPr/>
-        </p:nvSpPr>
-        <p:spPr>
-          <a:xfrm>
-            <a:off x="1309912" y="358103"/>
-            <a:ext cx="7407034" cy="990600"/>
-          </a:xfrm>
-          <a:prstGeom prst="rect">
-            <a:avLst/>
-          </a:prstGeom>
-        </p:spPr>
-        <p:txBody>
-          <a:bodyPr tIns="91440" bIns="91440" anchor="b" anchorCtr="0">
-            <a:noAutofit/>
-          </a:bodyPr>
-          <a:lstStyle/>
-          <a:p>
-            <a:pPr algn="just">
-              <a:spcBef>
-                <a:spcPct val="20000"/>
-              </a:spcBef>
-              <a:defRPr/>
-            </a:pPr>
-            <a:r>
-              <a:rPr lang="zh-TW" altLang="en-US" sz="4800" b="1" kern="0" dirty="0">
-                <a:solidFill>
-                  <a:srgbClr val="00B0F0"/>
-                </a:solidFill>
-                <a:effectLst>
-                  <a:outerShdw blurRad="38100" dist="38100" dir="2700000" algn="tl">
-                    <a:srgbClr val="000000">
-                      <a:alpha val="43137"/>
-                    </a:srgbClr>
-                  </a:outerShdw>
-                </a:effectLst>
-                <a:latin typeface="微軟正黑體" panose="020B0604030504040204" pitchFamily="34" charset="-120"/>
-                <a:ea typeface="微軟正黑體" panose="020B0604030504040204" pitchFamily="34" charset="-120"/>
-              </a:rPr>
-              <a:t>設定</a:t>
-            </a:r>
-            <a:r>
-              <a:rPr lang="en-US" altLang="zh-TW" sz="4800" b="1" kern="0" dirty="0">
-                <a:solidFill>
-                  <a:srgbClr val="00B0F0"/>
-                </a:solidFill>
-                <a:effectLst>
-                  <a:outerShdw blurRad="38100" dist="38100" dir="2700000" algn="tl">
-                    <a:srgbClr val="000000">
-                      <a:alpha val="43137"/>
-                    </a:srgbClr>
-                  </a:outerShdw>
-                </a:effectLst>
-                <a:latin typeface="微軟正黑體" panose="020B0604030504040204" pitchFamily="34" charset="-120"/>
-                <a:ea typeface="微軟正黑體" panose="020B0604030504040204" pitchFamily="34" charset="-120"/>
-              </a:rPr>
-              <a:t>LINE Channel Secret</a:t>
-            </a:r>
-            <a:endParaRPr lang="zh-TW" altLang="en-US" sz="4800" b="1" kern="0" dirty="0">
-              <a:solidFill>
-                <a:srgbClr val="00B0F0"/>
-              </a:solidFill>
-              <a:effectLst>
-                <a:outerShdw blurRad="38100" dist="38100" dir="2700000" algn="tl">
-                  <a:srgbClr val="000000">
-                    <a:alpha val="43137"/>
-                  </a:srgbClr>
-                </a:outerShdw>
-              </a:effectLst>
-              <a:latin typeface="微軟正黑體" panose="020B0604030504040204" pitchFamily="34" charset="-120"/>
-              <a:ea typeface="微軟正黑體" panose="020B0604030504040204" pitchFamily="34" charset="-120"/>
-            </a:endParaRPr>
-          </a:p>
-        </p:txBody>
-      </p:sp>
-      <p:sp>
-        <p:nvSpPr>
-          <p:cNvPr id="4" name="文字方塊 3">
-            <a:extLst>
-              <a:ext uri="{FF2B5EF4-FFF2-40B4-BE49-F238E27FC236}">
-                <a16:creationId xmlns:a16="http://schemas.microsoft.com/office/drawing/2014/main" id="{2A400E13-7562-60AF-5544-886E3FCCC917}"/>
-              </a:ext>
-            </a:extLst>
-          </p:cNvPr>
-          <p:cNvSpPr txBox="1"/>
-          <p:nvPr/>
-        </p:nvSpPr>
-        <p:spPr>
-          <a:xfrm>
-            <a:off x="427054" y="1412497"/>
-            <a:ext cx="8546824" cy="830997"/>
-          </a:xfrm>
-          <a:prstGeom prst="rect">
-            <a:avLst/>
-          </a:prstGeom>
-          <a:noFill/>
-        </p:spPr>
-        <p:txBody>
-          <a:bodyPr wrap="square">
-            <a:spAutoFit/>
-          </a:bodyPr>
-          <a:lstStyle/>
-          <a:p>
-            <a:r>
-              <a:rPr kumimoji="1" lang="en-US" altLang="zh-TW" sz="2400" dirty="0" err="1">
-                <a:solidFill>
-                  <a:srgbClr val="00B050"/>
-                </a:solidFill>
-                <a:effectLst>
-                  <a:outerShdw blurRad="38100" dist="38100" dir="2700000" algn="tl">
-                    <a:srgbClr val="000000">
-                      <a:alpha val="43137"/>
-                    </a:srgbClr>
-                  </a:outerShdw>
-                </a:effectLst>
-                <a:latin typeface="Consolas" panose="020B0609020204030204" pitchFamily="49" charset="0"/>
-                <a:ea typeface="微軟正黑體" panose="020B0604030504040204" pitchFamily="34" charset="-120"/>
-                <a:cs typeface="Heiti TC Light"/>
-              </a:rPr>
-              <a:t>conda</a:t>
-            </a:r>
-            <a:r>
-              <a:rPr kumimoji="1" lang="en-US" altLang="zh-TW" sz="2400" dirty="0">
-                <a:solidFill>
-                  <a:srgbClr val="00B050"/>
-                </a:solidFill>
-                <a:effectLst>
-                  <a:outerShdw blurRad="38100" dist="38100" dir="2700000" algn="tl">
-                    <a:srgbClr val="000000">
-                      <a:alpha val="43137"/>
-                    </a:srgbClr>
-                  </a:outerShdw>
-                </a:effectLst>
-                <a:latin typeface="Consolas" panose="020B0609020204030204" pitchFamily="49" charset="0"/>
-                <a:ea typeface="微軟正黑體" panose="020B0604030504040204" pitchFamily="34" charset="-120"/>
-                <a:cs typeface="Heiti TC Light"/>
-              </a:rPr>
-              <a:t> activate </a:t>
-            </a:r>
-            <a:r>
-              <a:rPr kumimoji="1" lang="en-US" altLang="zh-TW" sz="2400" dirty="0" err="1">
-                <a:solidFill>
-                  <a:srgbClr val="00B050"/>
-                </a:solidFill>
-                <a:effectLst>
-                  <a:outerShdw blurRad="38100" dist="38100" dir="2700000" algn="tl">
-                    <a:srgbClr val="000000">
-                      <a:alpha val="43137"/>
-                    </a:srgbClr>
-                  </a:outerShdw>
-                </a:effectLst>
-                <a:latin typeface="Consolas" panose="020B0609020204030204" pitchFamily="49" charset="0"/>
-                <a:ea typeface="微軟正黑體" panose="020B0604030504040204" pitchFamily="34" charset="-120"/>
-                <a:cs typeface="Heiti TC Light"/>
-              </a:rPr>
-              <a:t>linebot</a:t>
-            </a:r>
-            <a:endParaRPr kumimoji="1" lang="en-US" altLang="zh-TW" sz="2400" dirty="0">
-              <a:solidFill>
-                <a:srgbClr val="00B050"/>
-              </a:solidFill>
-              <a:effectLst>
-                <a:outerShdw blurRad="38100" dist="38100" dir="2700000" algn="tl">
-                  <a:srgbClr val="000000">
-                    <a:alpha val="43137"/>
-                  </a:srgbClr>
-                </a:outerShdw>
-              </a:effectLst>
-              <a:latin typeface="Consolas" panose="020B0609020204030204" pitchFamily="49" charset="0"/>
-              <a:ea typeface="微軟正黑體" panose="020B0604030504040204" pitchFamily="34" charset="-120"/>
-              <a:cs typeface="Heiti TC Light"/>
-            </a:endParaRPr>
-          </a:p>
-          <a:p>
-            <a:r>
-              <a:rPr kumimoji="1" lang="en-US" altLang="zh-TW" sz="2400" dirty="0" err="1">
-                <a:solidFill>
-                  <a:srgbClr val="00B050"/>
-                </a:solidFill>
-                <a:effectLst>
-                  <a:outerShdw blurRad="38100" dist="38100" dir="2700000" algn="tl">
-                    <a:srgbClr val="000000">
-                      <a:alpha val="43137"/>
-                    </a:srgbClr>
-                  </a:outerShdw>
-                </a:effectLst>
-                <a:latin typeface="Consolas" panose="020B0609020204030204" pitchFamily="49" charset="0"/>
-                <a:ea typeface="微軟正黑體" panose="020B0604030504040204" pitchFamily="34" charset="-120"/>
-                <a:cs typeface="Heiti TC Light"/>
-              </a:rPr>
-              <a:t>conda</a:t>
-            </a:r>
-            <a:r>
-              <a:rPr kumimoji="1" lang="en-US" altLang="zh-TW" sz="2400" dirty="0">
-                <a:solidFill>
-                  <a:srgbClr val="00B050"/>
-                </a:solidFill>
-                <a:effectLst>
-                  <a:outerShdw blurRad="38100" dist="38100" dir="2700000" algn="tl">
-                    <a:srgbClr val="000000">
-                      <a:alpha val="43137"/>
-                    </a:srgbClr>
-                  </a:outerShdw>
-                </a:effectLst>
-                <a:latin typeface="Consolas" panose="020B0609020204030204" pitchFamily="49" charset="0"/>
-                <a:ea typeface="微軟正黑體" panose="020B0604030504040204" pitchFamily="34" charset="-120"/>
-                <a:cs typeface="Heiti TC Light"/>
-              </a:rPr>
-              <a:t> env config vars set &lt;</a:t>
-            </a:r>
-            <a:r>
-              <a:rPr kumimoji="1" lang="zh-TW" altLang="en-US" sz="2400" dirty="0">
-                <a:solidFill>
-                  <a:srgbClr val="00B050"/>
-                </a:solidFill>
-                <a:effectLst>
-                  <a:outerShdw blurRad="38100" dist="38100" dir="2700000" algn="tl">
-                    <a:srgbClr val="000000">
-                      <a:alpha val="43137"/>
-                    </a:srgbClr>
-                  </a:outerShdw>
-                </a:effectLst>
-                <a:latin typeface="Consolas" panose="020B0609020204030204" pitchFamily="49" charset="0"/>
-                <a:ea typeface="微軟正黑體" panose="020B0604030504040204" pitchFamily="34" charset="-120"/>
-                <a:cs typeface="Heiti TC Light"/>
-              </a:rPr>
-              <a:t>要設定的變數</a:t>
-            </a:r>
-            <a:r>
-              <a:rPr kumimoji="1" lang="en-US" altLang="zh-TW" sz="2400" dirty="0">
-                <a:solidFill>
-                  <a:srgbClr val="00B050"/>
-                </a:solidFill>
-                <a:effectLst>
-                  <a:outerShdw blurRad="38100" dist="38100" dir="2700000" algn="tl">
-                    <a:srgbClr val="000000">
-                      <a:alpha val="43137"/>
-                    </a:srgbClr>
-                  </a:outerShdw>
-                </a:effectLst>
-                <a:latin typeface="Consolas" panose="020B0609020204030204" pitchFamily="49" charset="0"/>
-                <a:ea typeface="微軟正黑體" panose="020B0604030504040204" pitchFamily="34" charset="-120"/>
-                <a:cs typeface="Heiti TC Light"/>
-              </a:rPr>
-              <a:t>&gt;=&lt;</a:t>
-            </a:r>
-            <a:r>
-              <a:rPr kumimoji="1" lang="zh-TW" altLang="en-US" sz="2400" dirty="0">
-                <a:solidFill>
-                  <a:srgbClr val="00B050"/>
-                </a:solidFill>
-                <a:effectLst>
-                  <a:outerShdw blurRad="38100" dist="38100" dir="2700000" algn="tl">
-                    <a:srgbClr val="000000">
-                      <a:alpha val="43137"/>
-                    </a:srgbClr>
-                  </a:outerShdw>
-                </a:effectLst>
-                <a:latin typeface="Consolas" panose="020B0609020204030204" pitchFamily="49" charset="0"/>
-                <a:ea typeface="微軟正黑體" panose="020B0604030504040204" pitchFamily="34" charset="-120"/>
-                <a:cs typeface="Heiti TC Light"/>
-              </a:rPr>
-              <a:t>你的金鑰</a:t>
-            </a:r>
-            <a:r>
-              <a:rPr kumimoji="1" lang="en-US" altLang="zh-TW" sz="2400" dirty="0">
-                <a:solidFill>
-                  <a:srgbClr val="00B050"/>
-                </a:solidFill>
-                <a:effectLst>
-                  <a:outerShdw blurRad="38100" dist="38100" dir="2700000" algn="tl">
-                    <a:srgbClr val="000000">
-                      <a:alpha val="43137"/>
-                    </a:srgbClr>
-                  </a:outerShdw>
-                </a:effectLst>
-                <a:latin typeface="Consolas" panose="020B0609020204030204" pitchFamily="49" charset="0"/>
-                <a:ea typeface="微軟正黑體" panose="020B0604030504040204" pitchFamily="34" charset="-120"/>
-                <a:cs typeface="Heiti TC Light"/>
-              </a:rPr>
-              <a:t>&gt;</a:t>
-            </a:r>
-          </a:p>
-        </p:txBody>
-      </p:sp>
-      <p:pic>
-        <p:nvPicPr>
-          <p:cNvPr id="3" name="圖片 2">
-            <a:extLst>
-              <a:ext uri="{FF2B5EF4-FFF2-40B4-BE49-F238E27FC236}">
-                <a16:creationId xmlns:a16="http://schemas.microsoft.com/office/drawing/2014/main" id="{7ACA7C35-1A3F-3B7C-D7A8-508853CC8DA7}"/>
-              </a:ext>
-            </a:extLst>
-          </p:cNvPr>
-          <p:cNvPicPr>
-            <a:picLocks noChangeAspect="1"/>
-          </p:cNvPicPr>
-          <p:nvPr/>
-        </p:nvPicPr>
-        <p:blipFill>
-          <a:blip r:embed="rId2"/>
-          <a:stretch>
-            <a:fillRect/>
-          </a:stretch>
-        </p:blipFill>
-        <p:spPr>
-          <a:xfrm>
-            <a:off x="0" y="3101192"/>
-            <a:ext cx="9144000" cy="2785866"/>
-          </a:xfrm>
-          <a:prstGeom prst="rect">
-            <a:avLst/>
-          </a:prstGeom>
-        </p:spPr>
-      </p:pic>
-    </p:spTree>
-    <p:extLst>
-      <p:ext uri="{BB962C8B-B14F-4D97-AF65-F5344CB8AC3E}">
-        <p14:creationId xmlns:p14="http://schemas.microsoft.com/office/powerpoint/2010/main" val="1186472524"/>
-      </p:ext>
-    </p:extLst>
-  </p:cSld>
-  <p:clrMapOvr>
-    <a:masterClrMapping/>
-  </p:clrMapOvr>
-  <p:transition>
-    <p:fade/>
-  </p:transition>
-</p:sld>
-</file>
-
-<file path=ppt/slides/slide53.xml><?xml version="1.0" encoding="utf-8"?>
-<p:sld xmlns:a="http://schemas.openxmlformats.org/drawingml/2006/main" xmlns:r="http://schemas.openxmlformats.org/officeDocument/2006/relationships" xmlns:p="http://schemas.openxmlformats.org/presentationml/2006/main">
-  <p:cSld>
-    <p:spTree>
-      <p:nvGrpSpPr>
-        <p:cNvPr id="1" name=""/>
-        <p:cNvGrpSpPr/>
-        <p:nvPr/>
-      </p:nvGrpSpPr>
-      <p:grpSpPr>
-        <a:xfrm>
-          <a:off x="0" y="0"/>
-          <a:ext cx="0" cy="0"/>
-          <a:chOff x="0" y="0"/>
-          <a:chExt cx="0" cy="0"/>
-        </a:xfrm>
-      </p:grpSpPr>
-      <p:sp>
-        <p:nvSpPr>
-          <p:cNvPr id="6" name="文字版面配置區 2">
-            <a:extLst>
-              <a:ext uri="{FF2B5EF4-FFF2-40B4-BE49-F238E27FC236}">
-                <a16:creationId xmlns:a16="http://schemas.microsoft.com/office/drawing/2014/main" id="{DC362AB1-BDCB-D11A-89BE-0A2EC77A4AD2}"/>
-              </a:ext>
-            </a:extLst>
-          </p:cNvPr>
-          <p:cNvSpPr txBox="1">
-            <a:spLocks/>
-          </p:cNvSpPr>
-          <p:nvPr/>
-        </p:nvSpPr>
-        <p:spPr>
-          <a:xfrm>
-            <a:off x="843516" y="251778"/>
-            <a:ext cx="8086081" cy="990600"/>
-          </a:xfrm>
-          <a:prstGeom prst="rect">
-            <a:avLst/>
-          </a:prstGeom>
-        </p:spPr>
-        <p:txBody>
-          <a:bodyPr tIns="91440" bIns="91440" anchor="b" anchorCtr="0">
-            <a:noAutofit/>
-          </a:bodyPr>
-          <a:lstStyle/>
-          <a:p>
-            <a:pPr algn="just">
-              <a:spcBef>
-                <a:spcPct val="20000"/>
-              </a:spcBef>
-              <a:defRPr/>
-            </a:pPr>
-            <a:r>
-              <a:rPr lang="zh-TW" altLang="en-US" sz="4000" b="1" kern="0" dirty="0">
-                <a:solidFill>
-                  <a:srgbClr val="00B0F0"/>
-                </a:solidFill>
-                <a:effectLst>
-                  <a:outerShdw blurRad="38100" dist="38100" dir="2700000" algn="tl">
-                    <a:srgbClr val="000000">
-                      <a:alpha val="43137"/>
-                    </a:srgbClr>
-                  </a:outerShdw>
-                </a:effectLst>
-                <a:latin typeface="微軟正黑體" panose="020B0604030504040204" pitchFamily="34" charset="-120"/>
-                <a:ea typeface="微軟正黑體" panose="020B0604030504040204" pitchFamily="34" charset="-120"/>
-              </a:rPr>
-              <a:t>設定</a:t>
-            </a:r>
-            <a:r>
-              <a:rPr lang="en-US" altLang="zh-TW" sz="4000" b="1" kern="0" dirty="0">
-                <a:solidFill>
-                  <a:srgbClr val="00B0F0"/>
-                </a:solidFill>
-                <a:effectLst>
-                  <a:outerShdw blurRad="38100" dist="38100" dir="2700000" algn="tl">
-                    <a:srgbClr val="000000">
-                      <a:alpha val="43137"/>
-                    </a:srgbClr>
-                  </a:outerShdw>
-                </a:effectLst>
-                <a:latin typeface="微軟正黑體" panose="020B0604030504040204" pitchFamily="34" charset="-120"/>
-                <a:ea typeface="微軟正黑體" panose="020B0604030504040204" pitchFamily="34" charset="-120"/>
-              </a:rPr>
-              <a:t>LINE Channel Access Token</a:t>
-            </a:r>
-            <a:endParaRPr lang="zh-TW" altLang="en-US" sz="4000" b="1" kern="0" dirty="0">
-              <a:solidFill>
-                <a:srgbClr val="00B0F0"/>
-              </a:solidFill>
-              <a:effectLst>
-                <a:outerShdw blurRad="38100" dist="38100" dir="2700000" algn="tl">
-                  <a:srgbClr val="000000">
-                    <a:alpha val="43137"/>
-                  </a:srgbClr>
-                </a:outerShdw>
-              </a:effectLst>
-              <a:latin typeface="微軟正黑體" panose="020B0604030504040204" pitchFamily="34" charset="-120"/>
-              <a:ea typeface="微軟正黑體" panose="020B0604030504040204" pitchFamily="34" charset="-120"/>
-            </a:endParaRPr>
-          </a:p>
-        </p:txBody>
-      </p:sp>
-      <p:pic>
-        <p:nvPicPr>
-          <p:cNvPr id="3" name="圖片 2">
-            <a:extLst>
-              <a:ext uri="{FF2B5EF4-FFF2-40B4-BE49-F238E27FC236}">
-                <a16:creationId xmlns:a16="http://schemas.microsoft.com/office/drawing/2014/main" id="{33AD1B23-5548-BBA0-72B1-06B1CDB22B7A}"/>
-              </a:ext>
-            </a:extLst>
-          </p:cNvPr>
-          <p:cNvPicPr>
-            <a:picLocks noChangeAspect="1"/>
-          </p:cNvPicPr>
-          <p:nvPr/>
-        </p:nvPicPr>
-        <p:blipFill>
-          <a:blip r:embed="rId2"/>
-          <a:stretch>
-            <a:fillRect/>
-          </a:stretch>
-        </p:blipFill>
-        <p:spPr>
-          <a:xfrm>
-            <a:off x="0" y="1940926"/>
-            <a:ext cx="9144000" cy="4365470"/>
-          </a:xfrm>
-          <a:prstGeom prst="rect">
-            <a:avLst/>
-          </a:prstGeom>
-        </p:spPr>
-      </p:pic>
-    </p:spTree>
-    <p:extLst>
-      <p:ext uri="{BB962C8B-B14F-4D97-AF65-F5344CB8AC3E}">
-        <p14:creationId xmlns:p14="http://schemas.microsoft.com/office/powerpoint/2010/main" val="1043984358"/>
-      </p:ext>
-    </p:extLst>
-  </p:cSld>
-  <p:clrMapOvr>
-    <a:masterClrMapping/>
-  </p:clrMapOvr>
-  <p:transition>
-    <p:fade/>
-  </p:transition>
-</p:sld>
-</file>
-
-<file path=ppt/slides/slide54.xml><?xml version="1.0" encoding="utf-8"?>
-<p:sld xmlns:a="http://schemas.openxmlformats.org/drawingml/2006/main" xmlns:r="http://schemas.openxmlformats.org/officeDocument/2006/relationships" xmlns:p="http://schemas.openxmlformats.org/presentationml/2006/main">
-  <p:cSld>
-    <p:spTree>
-      <p:nvGrpSpPr>
-        <p:cNvPr id="1" name=""/>
-        <p:cNvGrpSpPr/>
-        <p:nvPr/>
-      </p:nvGrpSpPr>
-      <p:grpSpPr>
-        <a:xfrm>
-          <a:off x="0" y="0"/>
-          <a:ext cx="0" cy="0"/>
-          <a:chOff x="0" y="0"/>
-          <a:chExt cx="0" cy="0"/>
-        </a:xfrm>
-      </p:grpSpPr>
-      <p:sp>
-        <p:nvSpPr>
-          <p:cNvPr id="6" name="文字版面配置區 2">
-            <a:extLst>
-              <a:ext uri="{FF2B5EF4-FFF2-40B4-BE49-F238E27FC236}">
-                <a16:creationId xmlns:a16="http://schemas.microsoft.com/office/drawing/2014/main" id="{DC362AB1-BDCB-D11A-89BE-0A2EC77A4AD2}"/>
-              </a:ext>
-            </a:extLst>
-          </p:cNvPr>
-          <p:cNvSpPr txBox="1">
-            <a:spLocks/>
-          </p:cNvSpPr>
-          <p:nvPr/>
-        </p:nvSpPr>
-        <p:spPr>
-          <a:xfrm>
-            <a:off x="843516" y="251778"/>
-            <a:ext cx="8086081" cy="990600"/>
-          </a:xfrm>
-          <a:prstGeom prst="rect">
-            <a:avLst/>
-          </a:prstGeom>
-        </p:spPr>
-        <p:txBody>
-          <a:bodyPr tIns="91440" bIns="91440" anchor="b" anchorCtr="0">
-            <a:noAutofit/>
-          </a:bodyPr>
-          <a:lstStyle/>
-          <a:p>
-            <a:pPr algn="just">
-              <a:spcBef>
-                <a:spcPct val="20000"/>
-              </a:spcBef>
-              <a:defRPr/>
-            </a:pPr>
-            <a:r>
-              <a:rPr lang="zh-TW" altLang="en-US" sz="4000" b="1" kern="0" dirty="0">
-                <a:solidFill>
-                  <a:srgbClr val="00B0F0"/>
-                </a:solidFill>
-                <a:effectLst>
-                  <a:outerShdw blurRad="38100" dist="38100" dir="2700000" algn="tl">
-                    <a:srgbClr val="000000">
-                      <a:alpha val="43137"/>
-                    </a:srgbClr>
-                  </a:outerShdw>
-                </a:effectLst>
-                <a:latin typeface="微軟正黑體" panose="020B0604030504040204" pitchFamily="34" charset="-120"/>
-                <a:ea typeface="微軟正黑體" panose="020B0604030504040204" pitchFamily="34" charset="-120"/>
-              </a:rPr>
-              <a:t>設定</a:t>
-            </a:r>
-            <a:r>
-              <a:rPr lang="en-US" altLang="zh-TW" sz="4000" b="1" kern="0" dirty="0">
-                <a:solidFill>
-                  <a:srgbClr val="00B0F0"/>
-                </a:solidFill>
-                <a:effectLst>
-                  <a:outerShdw blurRad="38100" dist="38100" dir="2700000" algn="tl">
-                    <a:srgbClr val="000000">
-                      <a:alpha val="43137"/>
-                    </a:srgbClr>
-                  </a:outerShdw>
-                </a:effectLst>
-                <a:latin typeface="微軟正黑體" panose="020B0604030504040204" pitchFamily="34" charset="-120"/>
-                <a:ea typeface="微軟正黑體" panose="020B0604030504040204" pitchFamily="34" charset="-120"/>
-              </a:rPr>
-              <a:t>LINE Channel Access Token</a:t>
-            </a:r>
-            <a:endParaRPr lang="zh-TW" altLang="en-US" sz="4000" b="1" kern="0" dirty="0">
-              <a:solidFill>
-                <a:srgbClr val="00B0F0"/>
-              </a:solidFill>
-              <a:effectLst>
-                <a:outerShdw blurRad="38100" dist="38100" dir="2700000" algn="tl">
-                  <a:srgbClr val="000000">
-                    <a:alpha val="43137"/>
-                  </a:srgbClr>
-                </a:outerShdw>
-              </a:effectLst>
-              <a:latin typeface="微軟正黑體" panose="020B0604030504040204" pitchFamily="34" charset="-120"/>
-              <a:ea typeface="微軟正黑體" panose="020B0604030504040204" pitchFamily="34" charset="-120"/>
-            </a:endParaRPr>
-          </a:p>
-        </p:txBody>
-      </p:sp>
-      <p:pic>
-        <p:nvPicPr>
-          <p:cNvPr id="4" name="圖片 3">
-            <a:extLst>
-              <a:ext uri="{FF2B5EF4-FFF2-40B4-BE49-F238E27FC236}">
-                <a16:creationId xmlns:a16="http://schemas.microsoft.com/office/drawing/2014/main" id="{ACE4F802-F556-E2F2-DD21-24AC7337BBAF}"/>
-              </a:ext>
-            </a:extLst>
-          </p:cNvPr>
-          <p:cNvPicPr>
-            <a:picLocks noChangeAspect="1"/>
-          </p:cNvPicPr>
-          <p:nvPr/>
-        </p:nvPicPr>
-        <p:blipFill>
-          <a:blip r:embed="rId2"/>
-          <a:stretch>
-            <a:fillRect/>
-          </a:stretch>
-        </p:blipFill>
-        <p:spPr>
-          <a:xfrm>
-            <a:off x="323850" y="1444145"/>
-            <a:ext cx="8496300" cy="4905375"/>
-          </a:xfrm>
-          <a:prstGeom prst="rect">
-            <a:avLst/>
-          </a:prstGeom>
-        </p:spPr>
-      </p:pic>
-    </p:spTree>
-    <p:extLst>
-      <p:ext uri="{BB962C8B-B14F-4D97-AF65-F5344CB8AC3E}">
-        <p14:creationId xmlns:p14="http://schemas.microsoft.com/office/powerpoint/2010/main" val="3972191244"/>
-      </p:ext>
-    </p:extLst>
-  </p:cSld>
-  <p:clrMapOvr>
-    <a:masterClrMapping/>
-  </p:clrMapOvr>
-  <p:transition>
-    <p:fade/>
-  </p:transition>
-</p:sld>
-</file>
-
-<file path=ppt/slides/slide55.xml><?xml version="1.0" encoding="utf-8"?>
-<p:sld xmlns:a="http://schemas.openxmlformats.org/drawingml/2006/main" xmlns:r="http://schemas.openxmlformats.org/officeDocument/2006/relationships" xmlns:p="http://schemas.openxmlformats.org/presentationml/2006/main">
-  <p:cSld>
-    <p:spTree>
-      <p:nvGrpSpPr>
-        <p:cNvPr id="1" name=""/>
-        <p:cNvGrpSpPr/>
-        <p:nvPr/>
-      </p:nvGrpSpPr>
-      <p:grpSpPr>
-        <a:xfrm>
-          <a:off x="0" y="0"/>
-          <a:ext cx="0" cy="0"/>
-          <a:chOff x="0" y="0"/>
-          <a:chExt cx="0" cy="0"/>
-        </a:xfrm>
-      </p:grpSpPr>
-      <p:sp>
-        <p:nvSpPr>
-          <p:cNvPr id="6" name="文字版面配置區 2">
-            <a:extLst>
-              <a:ext uri="{FF2B5EF4-FFF2-40B4-BE49-F238E27FC236}">
-                <a16:creationId xmlns:a16="http://schemas.microsoft.com/office/drawing/2014/main" id="{DC362AB1-BDCB-D11A-89BE-0A2EC77A4AD2}"/>
-              </a:ext>
-            </a:extLst>
-          </p:cNvPr>
-          <p:cNvSpPr txBox="1">
-            <a:spLocks/>
-          </p:cNvSpPr>
-          <p:nvPr/>
-        </p:nvSpPr>
-        <p:spPr>
-          <a:xfrm>
-            <a:off x="843516" y="251778"/>
-            <a:ext cx="8086081" cy="990600"/>
-          </a:xfrm>
-          <a:prstGeom prst="rect">
-            <a:avLst/>
-          </a:prstGeom>
-        </p:spPr>
-        <p:txBody>
-          <a:bodyPr tIns="91440" bIns="91440" anchor="b" anchorCtr="0">
-            <a:noAutofit/>
-          </a:bodyPr>
-          <a:lstStyle/>
-          <a:p>
-            <a:pPr algn="just">
-              <a:spcBef>
-                <a:spcPct val="20000"/>
-              </a:spcBef>
-              <a:defRPr/>
-            </a:pPr>
-            <a:r>
-              <a:rPr lang="zh-TW" altLang="en-US" sz="4000" b="1" kern="0" dirty="0">
-                <a:solidFill>
-                  <a:srgbClr val="00B0F0"/>
-                </a:solidFill>
-                <a:effectLst>
-                  <a:outerShdw blurRad="38100" dist="38100" dir="2700000" algn="tl">
-                    <a:srgbClr val="000000">
-                      <a:alpha val="43137"/>
-                    </a:srgbClr>
-                  </a:outerShdw>
-                </a:effectLst>
-                <a:latin typeface="微軟正黑體" panose="020B0604030504040204" pitchFamily="34" charset="-120"/>
-                <a:ea typeface="微軟正黑體" panose="020B0604030504040204" pitchFamily="34" charset="-120"/>
-              </a:rPr>
-              <a:t>設定</a:t>
-            </a:r>
-            <a:r>
-              <a:rPr lang="en-US" altLang="zh-TW" sz="4000" b="1" kern="0" dirty="0">
-                <a:solidFill>
-                  <a:srgbClr val="00B0F0"/>
-                </a:solidFill>
-                <a:effectLst>
-                  <a:outerShdw blurRad="38100" dist="38100" dir="2700000" algn="tl">
-                    <a:srgbClr val="000000">
-                      <a:alpha val="43137"/>
-                    </a:srgbClr>
-                  </a:outerShdw>
-                </a:effectLst>
-                <a:latin typeface="微軟正黑體" panose="020B0604030504040204" pitchFamily="34" charset="-120"/>
-                <a:ea typeface="微軟正黑體" panose="020B0604030504040204" pitchFamily="34" charset="-120"/>
-              </a:rPr>
-              <a:t>LINE Channel Access Token</a:t>
-            </a:r>
-            <a:endParaRPr lang="zh-TW" altLang="en-US" sz="4000" b="1" kern="0" dirty="0">
-              <a:solidFill>
-                <a:srgbClr val="00B0F0"/>
-              </a:solidFill>
-              <a:effectLst>
-                <a:outerShdw blurRad="38100" dist="38100" dir="2700000" algn="tl">
-                  <a:srgbClr val="000000">
-                    <a:alpha val="43137"/>
-                  </a:srgbClr>
-                </a:outerShdw>
-              </a:effectLst>
-              <a:latin typeface="微軟正黑體" panose="020B0604030504040204" pitchFamily="34" charset="-120"/>
-              <a:ea typeface="微軟正黑體" panose="020B0604030504040204" pitchFamily="34" charset="-120"/>
-            </a:endParaRPr>
-          </a:p>
-        </p:txBody>
-      </p:sp>
-      <p:pic>
-        <p:nvPicPr>
-          <p:cNvPr id="3" name="圖片 2">
-            <a:extLst>
-              <a:ext uri="{FF2B5EF4-FFF2-40B4-BE49-F238E27FC236}">
-                <a16:creationId xmlns:a16="http://schemas.microsoft.com/office/drawing/2014/main" id="{3791CA64-FF64-1B71-708A-D80514A35E4D}"/>
-              </a:ext>
-            </a:extLst>
-          </p:cNvPr>
-          <p:cNvPicPr>
-            <a:picLocks noChangeAspect="1"/>
-          </p:cNvPicPr>
-          <p:nvPr/>
-        </p:nvPicPr>
-        <p:blipFill>
-          <a:blip r:embed="rId2"/>
-          <a:stretch>
-            <a:fillRect/>
-          </a:stretch>
-        </p:blipFill>
-        <p:spPr>
-          <a:xfrm>
-            <a:off x="1112873" y="1455652"/>
-            <a:ext cx="7286847" cy="5150570"/>
-          </a:xfrm>
-          <a:prstGeom prst="rect">
-            <a:avLst/>
-          </a:prstGeom>
-        </p:spPr>
-      </p:pic>
-    </p:spTree>
-    <p:extLst>
-      <p:ext uri="{BB962C8B-B14F-4D97-AF65-F5344CB8AC3E}">
-        <p14:creationId xmlns:p14="http://schemas.microsoft.com/office/powerpoint/2010/main" val="826516980"/>
-      </p:ext>
-    </p:extLst>
-  </p:cSld>
-  <p:clrMapOvr>
-    <a:masterClrMapping/>
-  </p:clrMapOvr>
-  <p:transition>
-    <p:fade/>
-  </p:transition>
-</p:sld>
-</file>
-
-<file path=ppt/slides/slide56.xml><?xml version="1.0" encoding="utf-8"?>
-<p:sld xmlns:a="http://schemas.openxmlformats.org/drawingml/2006/main" xmlns:r="http://schemas.openxmlformats.org/officeDocument/2006/relationships" xmlns:p="http://schemas.openxmlformats.org/presentationml/2006/main">
-  <p:cSld>
-    <p:spTree>
-      <p:nvGrpSpPr>
-        <p:cNvPr id="1" name=""/>
-        <p:cNvGrpSpPr/>
-        <p:nvPr/>
-      </p:nvGrpSpPr>
-      <p:grpSpPr>
-        <a:xfrm>
-          <a:off x="0" y="0"/>
-          <a:ext cx="0" cy="0"/>
-          <a:chOff x="0" y="0"/>
-          <a:chExt cx="0" cy="0"/>
-        </a:xfrm>
-      </p:grpSpPr>
-      <p:sp>
-        <p:nvSpPr>
-          <p:cNvPr id="6" name="文字版面配置區 2">
-            <a:extLst>
-              <a:ext uri="{FF2B5EF4-FFF2-40B4-BE49-F238E27FC236}">
-                <a16:creationId xmlns:a16="http://schemas.microsoft.com/office/drawing/2014/main" id="{DC362AB1-BDCB-D11A-89BE-0A2EC77A4AD2}"/>
-              </a:ext>
-            </a:extLst>
-          </p:cNvPr>
-          <p:cNvSpPr txBox="1">
-            <a:spLocks/>
-          </p:cNvSpPr>
-          <p:nvPr/>
-        </p:nvSpPr>
-        <p:spPr>
-          <a:xfrm>
-            <a:off x="843516" y="251778"/>
-            <a:ext cx="8086081" cy="990600"/>
-          </a:xfrm>
-          <a:prstGeom prst="rect">
-            <a:avLst/>
-          </a:prstGeom>
-        </p:spPr>
-        <p:txBody>
-          <a:bodyPr tIns="91440" bIns="91440" anchor="b" anchorCtr="0">
-            <a:noAutofit/>
-          </a:bodyPr>
-          <a:lstStyle/>
-          <a:p>
-            <a:pPr algn="just">
-              <a:spcBef>
-                <a:spcPct val="20000"/>
-              </a:spcBef>
-              <a:defRPr/>
-            </a:pPr>
-            <a:r>
-              <a:rPr lang="zh-TW" altLang="en-US" sz="4000" b="1" kern="0" dirty="0">
-                <a:solidFill>
-                  <a:srgbClr val="00B0F0"/>
-                </a:solidFill>
-                <a:effectLst>
-                  <a:outerShdw blurRad="38100" dist="38100" dir="2700000" algn="tl">
-                    <a:srgbClr val="000000">
-                      <a:alpha val="43137"/>
-                    </a:srgbClr>
-                  </a:outerShdw>
-                </a:effectLst>
-                <a:latin typeface="微軟正黑體" panose="020B0604030504040204" pitchFamily="34" charset="-120"/>
-                <a:ea typeface="微軟正黑體" panose="020B0604030504040204" pitchFamily="34" charset="-120"/>
-              </a:rPr>
-              <a:t>設定</a:t>
-            </a:r>
-            <a:r>
-              <a:rPr lang="en-US" altLang="zh-TW" sz="4000" b="1" kern="0" dirty="0">
-                <a:solidFill>
-                  <a:srgbClr val="00B0F0"/>
-                </a:solidFill>
-                <a:effectLst>
-                  <a:outerShdw blurRad="38100" dist="38100" dir="2700000" algn="tl">
-                    <a:srgbClr val="000000">
-                      <a:alpha val="43137"/>
-                    </a:srgbClr>
-                  </a:outerShdw>
-                </a:effectLst>
-                <a:latin typeface="微軟正黑體" panose="020B0604030504040204" pitchFamily="34" charset="-120"/>
-                <a:ea typeface="微軟正黑體" panose="020B0604030504040204" pitchFamily="34" charset="-120"/>
-              </a:rPr>
-              <a:t>LINE Channel Access Token</a:t>
-            </a:r>
-            <a:endParaRPr lang="zh-TW" altLang="en-US" sz="4000" b="1" kern="0" dirty="0">
-              <a:solidFill>
-                <a:srgbClr val="00B0F0"/>
-              </a:solidFill>
-              <a:effectLst>
-                <a:outerShdw blurRad="38100" dist="38100" dir="2700000" algn="tl">
-                  <a:srgbClr val="000000">
-                    <a:alpha val="43137"/>
-                  </a:srgbClr>
-                </a:outerShdw>
-              </a:effectLst>
-              <a:latin typeface="微軟正黑體" panose="020B0604030504040204" pitchFamily="34" charset="-120"/>
-              <a:ea typeface="微軟正黑體" panose="020B0604030504040204" pitchFamily="34" charset="-120"/>
-            </a:endParaRPr>
-          </a:p>
-        </p:txBody>
-      </p:sp>
-      <p:pic>
-        <p:nvPicPr>
-          <p:cNvPr id="4" name="圖片 3">
-            <a:extLst>
-              <a:ext uri="{FF2B5EF4-FFF2-40B4-BE49-F238E27FC236}">
-                <a16:creationId xmlns:a16="http://schemas.microsoft.com/office/drawing/2014/main" id="{76442E8A-F4BD-1E62-681A-5D22DFFE3ED0}"/>
-              </a:ext>
-            </a:extLst>
-          </p:cNvPr>
-          <p:cNvPicPr>
-            <a:picLocks noChangeAspect="1"/>
-          </p:cNvPicPr>
-          <p:nvPr/>
-        </p:nvPicPr>
-        <p:blipFill>
-          <a:blip r:embed="rId2"/>
-          <a:stretch>
-            <a:fillRect/>
-          </a:stretch>
-        </p:blipFill>
-        <p:spPr>
-          <a:xfrm>
-            <a:off x="772633" y="1369234"/>
-            <a:ext cx="7780263" cy="5320749"/>
-          </a:xfrm>
-          <a:prstGeom prst="rect">
-            <a:avLst/>
-          </a:prstGeom>
-        </p:spPr>
-      </p:pic>
-    </p:spTree>
-    <p:extLst>
-      <p:ext uri="{BB962C8B-B14F-4D97-AF65-F5344CB8AC3E}">
-        <p14:creationId xmlns:p14="http://schemas.microsoft.com/office/powerpoint/2010/main" val="1900225590"/>
-      </p:ext>
-    </p:extLst>
-  </p:cSld>
-  <p:clrMapOvr>
-    <a:masterClrMapping/>
-  </p:clrMapOvr>
-  <p:transition>
-    <p:fade/>
-  </p:transition>
-</p:sld>
-</file>
-
-<file path=ppt/slides/slide57.xml><?xml version="1.0" encoding="utf-8"?>
-<p:sld xmlns:a="http://schemas.openxmlformats.org/drawingml/2006/main" xmlns:r="http://schemas.openxmlformats.org/officeDocument/2006/relationships" xmlns:p="http://schemas.openxmlformats.org/presentationml/2006/main">
-  <p:cSld>
-    <p:spTree>
-      <p:nvGrpSpPr>
-        <p:cNvPr id="1" name=""/>
-        <p:cNvGrpSpPr/>
-        <p:nvPr/>
-      </p:nvGrpSpPr>
-      <p:grpSpPr>
-        <a:xfrm>
-          <a:off x="0" y="0"/>
-          <a:ext cx="0" cy="0"/>
-          <a:chOff x="0" y="0"/>
-          <a:chExt cx="0" cy="0"/>
-        </a:xfrm>
-      </p:grpSpPr>
-      <p:sp>
-        <p:nvSpPr>
-          <p:cNvPr id="6" name="文字版面配置區 2">
-            <a:extLst>
-              <a:ext uri="{FF2B5EF4-FFF2-40B4-BE49-F238E27FC236}">
-                <a16:creationId xmlns:a16="http://schemas.microsoft.com/office/drawing/2014/main" id="{DC362AB1-BDCB-D11A-89BE-0A2EC77A4AD2}"/>
-              </a:ext>
-            </a:extLst>
-          </p:cNvPr>
-          <p:cNvSpPr txBox="1">
-            <a:spLocks/>
-          </p:cNvSpPr>
-          <p:nvPr/>
-        </p:nvSpPr>
-        <p:spPr>
-          <a:xfrm>
-            <a:off x="843516" y="251778"/>
-            <a:ext cx="8086081" cy="990600"/>
-          </a:xfrm>
-          <a:prstGeom prst="rect">
-            <a:avLst/>
-          </a:prstGeom>
-        </p:spPr>
-        <p:txBody>
-          <a:bodyPr tIns="91440" bIns="91440" anchor="b" anchorCtr="0">
-            <a:noAutofit/>
-          </a:bodyPr>
-          <a:lstStyle/>
-          <a:p>
-            <a:pPr algn="just">
-              <a:spcBef>
-                <a:spcPct val="20000"/>
-              </a:spcBef>
-              <a:defRPr/>
-            </a:pPr>
-            <a:r>
-              <a:rPr lang="zh-TW" altLang="en-US" sz="4000" b="1" kern="0" dirty="0">
-                <a:solidFill>
-                  <a:srgbClr val="00B0F0"/>
-                </a:solidFill>
-                <a:effectLst>
-                  <a:outerShdw blurRad="38100" dist="38100" dir="2700000" algn="tl">
-                    <a:srgbClr val="000000">
-                      <a:alpha val="43137"/>
-                    </a:srgbClr>
-                  </a:outerShdw>
-                </a:effectLst>
-                <a:latin typeface="微軟正黑體" panose="020B0604030504040204" pitchFamily="34" charset="-120"/>
-                <a:ea typeface="微軟正黑體" panose="020B0604030504040204" pitchFamily="34" charset="-120"/>
-              </a:rPr>
-              <a:t>設定</a:t>
-            </a:r>
-            <a:r>
-              <a:rPr lang="en-US" altLang="zh-TW" sz="4000" b="1" kern="0" dirty="0">
-                <a:solidFill>
-                  <a:srgbClr val="00B0F0"/>
-                </a:solidFill>
-                <a:effectLst>
-                  <a:outerShdw blurRad="38100" dist="38100" dir="2700000" algn="tl">
-                    <a:srgbClr val="000000">
-                      <a:alpha val="43137"/>
-                    </a:srgbClr>
-                  </a:outerShdw>
-                </a:effectLst>
-                <a:latin typeface="微軟正黑體" panose="020B0604030504040204" pitchFamily="34" charset="-120"/>
-                <a:ea typeface="微軟正黑體" panose="020B0604030504040204" pitchFamily="34" charset="-120"/>
-              </a:rPr>
-              <a:t>LINE Channel Access Token</a:t>
-            </a:r>
-            <a:endParaRPr lang="zh-TW" altLang="en-US" sz="4000" b="1" kern="0" dirty="0">
-              <a:solidFill>
-                <a:srgbClr val="00B0F0"/>
-              </a:solidFill>
-              <a:effectLst>
-                <a:outerShdw blurRad="38100" dist="38100" dir="2700000" algn="tl">
-                  <a:srgbClr val="000000">
-                    <a:alpha val="43137"/>
-                  </a:srgbClr>
-                </a:outerShdw>
-              </a:effectLst>
-              <a:latin typeface="微軟正黑體" panose="020B0604030504040204" pitchFamily="34" charset="-120"/>
-              <a:ea typeface="微軟正黑體" panose="020B0604030504040204" pitchFamily="34" charset="-120"/>
-            </a:endParaRPr>
-          </a:p>
-        </p:txBody>
-      </p:sp>
-      <p:pic>
-        <p:nvPicPr>
-          <p:cNvPr id="3" name="圖片 2">
-            <a:extLst>
-              <a:ext uri="{FF2B5EF4-FFF2-40B4-BE49-F238E27FC236}">
-                <a16:creationId xmlns:a16="http://schemas.microsoft.com/office/drawing/2014/main" id="{1EB593F6-1992-DB05-01E4-F0D801659978}"/>
-              </a:ext>
-            </a:extLst>
-          </p:cNvPr>
-          <p:cNvPicPr>
-            <a:picLocks noChangeAspect="1"/>
-          </p:cNvPicPr>
-          <p:nvPr/>
-        </p:nvPicPr>
-        <p:blipFill>
-          <a:blip r:embed="rId2"/>
-          <a:stretch>
-            <a:fillRect/>
-          </a:stretch>
-        </p:blipFill>
-        <p:spPr>
-          <a:xfrm>
-            <a:off x="317225" y="2028143"/>
-            <a:ext cx="8612372" cy="3016255"/>
-          </a:xfrm>
-          <a:prstGeom prst="rect">
-            <a:avLst/>
-          </a:prstGeom>
-        </p:spPr>
-      </p:pic>
-    </p:spTree>
-    <p:extLst>
-      <p:ext uri="{BB962C8B-B14F-4D97-AF65-F5344CB8AC3E}">
-        <p14:creationId xmlns:p14="http://schemas.microsoft.com/office/powerpoint/2010/main" val="1311519500"/>
-      </p:ext>
-    </p:extLst>
-  </p:cSld>
-  <p:clrMapOvr>
-    <a:masterClrMapping/>
-  </p:clrMapOvr>
-  <p:transition>
-    <p:fade/>
-  </p:transition>
-</p:sld>
-</file>
-
-<file path=ppt/slides/slide58.xml><?xml version="1.0" encoding="utf-8"?>
-<p:sld xmlns:a="http://schemas.openxmlformats.org/drawingml/2006/main" xmlns:r="http://schemas.openxmlformats.org/officeDocument/2006/relationships" xmlns:p="http://schemas.openxmlformats.org/presentationml/2006/main">
-  <p:cSld>
-    <p:spTree>
-      <p:nvGrpSpPr>
-        <p:cNvPr id="1" name=""/>
-        <p:cNvGrpSpPr/>
-        <p:nvPr/>
-      </p:nvGrpSpPr>
-      <p:grpSpPr>
-        <a:xfrm>
-          <a:off x="0" y="0"/>
-          <a:ext cx="0" cy="0"/>
-          <a:chOff x="0" y="0"/>
-          <a:chExt cx="0" cy="0"/>
-        </a:xfrm>
-      </p:grpSpPr>
-      <p:sp>
-        <p:nvSpPr>
-          <p:cNvPr id="4" name="文字方塊 3">
-            <a:extLst>
-              <a:ext uri="{FF2B5EF4-FFF2-40B4-BE49-F238E27FC236}">
-                <a16:creationId xmlns:a16="http://schemas.microsoft.com/office/drawing/2014/main" id="{2A400E13-7562-60AF-5544-886E3FCCC917}"/>
-              </a:ext>
-            </a:extLst>
-          </p:cNvPr>
-          <p:cNvSpPr txBox="1"/>
-          <p:nvPr/>
-        </p:nvSpPr>
-        <p:spPr>
-          <a:xfrm>
-            <a:off x="427054" y="1412497"/>
-            <a:ext cx="8546824" cy="830997"/>
-          </a:xfrm>
-          <a:prstGeom prst="rect">
-            <a:avLst/>
-          </a:prstGeom>
-          <a:noFill/>
-        </p:spPr>
-        <p:txBody>
-          <a:bodyPr wrap="square">
-            <a:spAutoFit/>
-          </a:bodyPr>
-          <a:lstStyle/>
-          <a:p>
-            <a:r>
-              <a:rPr kumimoji="1" lang="en-US" altLang="zh-TW" sz="2400" dirty="0" err="1">
-                <a:solidFill>
-                  <a:srgbClr val="00B050"/>
-                </a:solidFill>
-                <a:effectLst>
-                  <a:outerShdw blurRad="38100" dist="38100" dir="2700000" algn="tl">
-                    <a:srgbClr val="000000">
-                      <a:alpha val="43137"/>
-                    </a:srgbClr>
-                  </a:outerShdw>
-                </a:effectLst>
-                <a:latin typeface="Consolas" panose="020B0609020204030204" pitchFamily="49" charset="0"/>
-                <a:ea typeface="微軟正黑體" panose="020B0604030504040204" pitchFamily="34" charset="-120"/>
-                <a:cs typeface="Heiti TC Light"/>
-              </a:rPr>
-              <a:t>conda</a:t>
-            </a:r>
-            <a:r>
-              <a:rPr kumimoji="1" lang="en-US" altLang="zh-TW" sz="2400" dirty="0">
-                <a:solidFill>
-                  <a:srgbClr val="00B050"/>
-                </a:solidFill>
-                <a:effectLst>
-                  <a:outerShdw blurRad="38100" dist="38100" dir="2700000" algn="tl">
-                    <a:srgbClr val="000000">
-                      <a:alpha val="43137"/>
-                    </a:srgbClr>
-                  </a:outerShdw>
-                </a:effectLst>
-                <a:latin typeface="Consolas" panose="020B0609020204030204" pitchFamily="49" charset="0"/>
-                <a:ea typeface="微軟正黑體" panose="020B0604030504040204" pitchFamily="34" charset="-120"/>
-                <a:cs typeface="Heiti TC Light"/>
-              </a:rPr>
-              <a:t> activate </a:t>
-            </a:r>
-            <a:r>
-              <a:rPr kumimoji="1" lang="en-US" altLang="zh-TW" sz="2400" dirty="0" err="1">
-                <a:solidFill>
-                  <a:srgbClr val="00B050"/>
-                </a:solidFill>
-                <a:effectLst>
-                  <a:outerShdw blurRad="38100" dist="38100" dir="2700000" algn="tl">
-                    <a:srgbClr val="000000">
-                      <a:alpha val="43137"/>
-                    </a:srgbClr>
-                  </a:outerShdw>
-                </a:effectLst>
-                <a:latin typeface="Consolas" panose="020B0609020204030204" pitchFamily="49" charset="0"/>
-                <a:ea typeface="微軟正黑體" panose="020B0604030504040204" pitchFamily="34" charset="-120"/>
-                <a:cs typeface="Heiti TC Light"/>
-              </a:rPr>
-              <a:t>linebot</a:t>
-            </a:r>
-            <a:endParaRPr kumimoji="1" lang="en-US" altLang="zh-TW" sz="2400" dirty="0">
-              <a:solidFill>
-                <a:srgbClr val="00B050"/>
-              </a:solidFill>
-              <a:effectLst>
-                <a:outerShdw blurRad="38100" dist="38100" dir="2700000" algn="tl">
-                  <a:srgbClr val="000000">
-                    <a:alpha val="43137"/>
-                  </a:srgbClr>
-                </a:outerShdw>
-              </a:effectLst>
-              <a:latin typeface="Consolas" panose="020B0609020204030204" pitchFamily="49" charset="0"/>
-              <a:ea typeface="微軟正黑體" panose="020B0604030504040204" pitchFamily="34" charset="-120"/>
-              <a:cs typeface="Heiti TC Light"/>
-            </a:endParaRPr>
-          </a:p>
-          <a:p>
-            <a:r>
-              <a:rPr kumimoji="1" lang="en-US" altLang="zh-TW" sz="2400" dirty="0" err="1">
-                <a:solidFill>
-                  <a:srgbClr val="00B050"/>
-                </a:solidFill>
-                <a:effectLst>
-                  <a:outerShdw blurRad="38100" dist="38100" dir="2700000" algn="tl">
-                    <a:srgbClr val="000000">
-                      <a:alpha val="43137"/>
-                    </a:srgbClr>
-                  </a:outerShdw>
-                </a:effectLst>
-                <a:latin typeface="Consolas" panose="020B0609020204030204" pitchFamily="49" charset="0"/>
-                <a:ea typeface="微軟正黑體" panose="020B0604030504040204" pitchFamily="34" charset="-120"/>
-                <a:cs typeface="Heiti TC Light"/>
-              </a:rPr>
-              <a:t>conda</a:t>
-            </a:r>
-            <a:r>
-              <a:rPr kumimoji="1" lang="en-US" altLang="zh-TW" sz="2400" dirty="0">
-                <a:solidFill>
-                  <a:srgbClr val="00B050"/>
-                </a:solidFill>
-                <a:effectLst>
-                  <a:outerShdw blurRad="38100" dist="38100" dir="2700000" algn="tl">
-                    <a:srgbClr val="000000">
-                      <a:alpha val="43137"/>
-                    </a:srgbClr>
-                  </a:outerShdw>
-                </a:effectLst>
-                <a:latin typeface="Consolas" panose="020B0609020204030204" pitchFamily="49" charset="0"/>
-                <a:ea typeface="微軟正黑體" panose="020B0604030504040204" pitchFamily="34" charset="-120"/>
-                <a:cs typeface="Heiti TC Light"/>
-              </a:rPr>
-              <a:t> env config vars set &lt;</a:t>
-            </a:r>
-            <a:r>
-              <a:rPr kumimoji="1" lang="zh-TW" altLang="en-US" sz="2400" dirty="0">
-                <a:solidFill>
-                  <a:srgbClr val="00B050"/>
-                </a:solidFill>
-                <a:effectLst>
-                  <a:outerShdw blurRad="38100" dist="38100" dir="2700000" algn="tl">
-                    <a:srgbClr val="000000">
-                      <a:alpha val="43137"/>
-                    </a:srgbClr>
-                  </a:outerShdw>
-                </a:effectLst>
-                <a:latin typeface="Consolas" panose="020B0609020204030204" pitchFamily="49" charset="0"/>
-                <a:ea typeface="微軟正黑體" panose="020B0604030504040204" pitchFamily="34" charset="-120"/>
-                <a:cs typeface="Heiti TC Light"/>
-              </a:rPr>
-              <a:t>要設定的變數</a:t>
-            </a:r>
-            <a:r>
-              <a:rPr kumimoji="1" lang="en-US" altLang="zh-TW" sz="2400" dirty="0">
-                <a:solidFill>
-                  <a:srgbClr val="00B050"/>
-                </a:solidFill>
-                <a:effectLst>
-                  <a:outerShdw blurRad="38100" dist="38100" dir="2700000" algn="tl">
-                    <a:srgbClr val="000000">
-                      <a:alpha val="43137"/>
-                    </a:srgbClr>
-                  </a:outerShdw>
-                </a:effectLst>
-                <a:latin typeface="Consolas" panose="020B0609020204030204" pitchFamily="49" charset="0"/>
-                <a:ea typeface="微軟正黑體" panose="020B0604030504040204" pitchFamily="34" charset="-120"/>
-                <a:cs typeface="Heiti TC Light"/>
-              </a:rPr>
-              <a:t>&gt;=&lt;</a:t>
-            </a:r>
-            <a:r>
-              <a:rPr kumimoji="1" lang="zh-TW" altLang="en-US" sz="2400" dirty="0">
-                <a:solidFill>
-                  <a:srgbClr val="00B050"/>
-                </a:solidFill>
-                <a:effectLst>
-                  <a:outerShdw blurRad="38100" dist="38100" dir="2700000" algn="tl">
-                    <a:srgbClr val="000000">
-                      <a:alpha val="43137"/>
-                    </a:srgbClr>
-                  </a:outerShdw>
-                </a:effectLst>
-                <a:latin typeface="Consolas" panose="020B0609020204030204" pitchFamily="49" charset="0"/>
-                <a:ea typeface="微軟正黑體" panose="020B0604030504040204" pitchFamily="34" charset="-120"/>
-                <a:cs typeface="Heiti TC Light"/>
-              </a:rPr>
-              <a:t>你的金鑰</a:t>
-            </a:r>
-            <a:r>
-              <a:rPr kumimoji="1" lang="en-US" altLang="zh-TW" sz="2400" dirty="0">
-                <a:solidFill>
-                  <a:srgbClr val="00B050"/>
-                </a:solidFill>
-                <a:effectLst>
-                  <a:outerShdw blurRad="38100" dist="38100" dir="2700000" algn="tl">
-                    <a:srgbClr val="000000">
-                      <a:alpha val="43137"/>
-                    </a:srgbClr>
-                  </a:outerShdw>
-                </a:effectLst>
-                <a:latin typeface="Consolas" panose="020B0609020204030204" pitchFamily="49" charset="0"/>
-                <a:ea typeface="微軟正黑體" panose="020B0604030504040204" pitchFamily="34" charset="-120"/>
-                <a:cs typeface="Heiti TC Light"/>
-              </a:rPr>
-              <a:t>&gt;</a:t>
-            </a:r>
-          </a:p>
-        </p:txBody>
-      </p:sp>
-      <p:sp>
-        <p:nvSpPr>
-          <p:cNvPr id="2" name="文字版面配置區 2">
-            <a:extLst>
-              <a:ext uri="{FF2B5EF4-FFF2-40B4-BE49-F238E27FC236}">
-                <a16:creationId xmlns:a16="http://schemas.microsoft.com/office/drawing/2014/main" id="{DB2FAA46-9B2A-DC8E-8996-377E71D9CC5C}"/>
-              </a:ext>
-            </a:extLst>
-          </p:cNvPr>
-          <p:cNvSpPr txBox="1">
-            <a:spLocks/>
-          </p:cNvSpPr>
-          <p:nvPr/>
-        </p:nvSpPr>
-        <p:spPr>
-          <a:xfrm>
-            <a:off x="843516" y="251778"/>
-            <a:ext cx="8086081" cy="990600"/>
-          </a:xfrm>
-          <a:prstGeom prst="rect">
-            <a:avLst/>
-          </a:prstGeom>
-        </p:spPr>
-        <p:txBody>
-          <a:bodyPr tIns="91440" bIns="91440" anchor="b" anchorCtr="0">
-            <a:noAutofit/>
-          </a:bodyPr>
-          <a:lstStyle/>
-          <a:p>
-            <a:pPr algn="just">
-              <a:spcBef>
-                <a:spcPct val="20000"/>
-              </a:spcBef>
-              <a:defRPr/>
-            </a:pPr>
-            <a:r>
-              <a:rPr lang="zh-TW" altLang="en-US" sz="4000" b="1" kern="0" dirty="0">
-                <a:solidFill>
-                  <a:srgbClr val="00B0F0"/>
-                </a:solidFill>
-                <a:effectLst>
-                  <a:outerShdw blurRad="38100" dist="38100" dir="2700000" algn="tl">
-                    <a:srgbClr val="000000">
-                      <a:alpha val="43137"/>
-                    </a:srgbClr>
-                  </a:outerShdw>
-                </a:effectLst>
-                <a:latin typeface="微軟正黑體" panose="020B0604030504040204" pitchFamily="34" charset="-120"/>
-                <a:ea typeface="微軟正黑體" panose="020B0604030504040204" pitchFamily="34" charset="-120"/>
-              </a:rPr>
-              <a:t>設定</a:t>
-            </a:r>
-            <a:r>
-              <a:rPr lang="en-US" altLang="zh-TW" sz="4000" b="1" kern="0" dirty="0">
-                <a:solidFill>
-                  <a:srgbClr val="00B0F0"/>
-                </a:solidFill>
-                <a:effectLst>
-                  <a:outerShdw blurRad="38100" dist="38100" dir="2700000" algn="tl">
-                    <a:srgbClr val="000000">
-                      <a:alpha val="43137"/>
-                    </a:srgbClr>
-                  </a:outerShdw>
-                </a:effectLst>
-                <a:latin typeface="微軟正黑體" panose="020B0604030504040204" pitchFamily="34" charset="-120"/>
-                <a:ea typeface="微軟正黑體" panose="020B0604030504040204" pitchFamily="34" charset="-120"/>
-              </a:rPr>
-              <a:t>LINE Channel Access Token</a:t>
-            </a:r>
-            <a:endParaRPr lang="zh-TW" altLang="en-US" sz="4000" b="1" kern="0" dirty="0">
-              <a:solidFill>
-                <a:srgbClr val="00B0F0"/>
-              </a:solidFill>
-              <a:effectLst>
-                <a:outerShdw blurRad="38100" dist="38100" dir="2700000" algn="tl">
-                  <a:srgbClr val="000000">
-                    <a:alpha val="43137"/>
-                  </a:srgbClr>
-                </a:outerShdw>
-              </a:effectLst>
-              <a:latin typeface="微軟正黑體" panose="020B0604030504040204" pitchFamily="34" charset="-120"/>
-              <a:ea typeface="微軟正黑體" panose="020B0604030504040204" pitchFamily="34" charset="-120"/>
-            </a:endParaRPr>
-          </a:p>
-        </p:txBody>
-      </p:sp>
-      <p:pic>
-        <p:nvPicPr>
-          <p:cNvPr id="6" name="圖片 5">
-            <a:extLst>
-              <a:ext uri="{FF2B5EF4-FFF2-40B4-BE49-F238E27FC236}">
-                <a16:creationId xmlns:a16="http://schemas.microsoft.com/office/drawing/2014/main" id="{B7C394F2-92B5-0D61-F110-0C6F4D0289A4}"/>
-              </a:ext>
-            </a:extLst>
-          </p:cNvPr>
-          <p:cNvPicPr>
-            <a:picLocks noChangeAspect="1"/>
-          </p:cNvPicPr>
-          <p:nvPr/>
-        </p:nvPicPr>
-        <p:blipFill>
-          <a:blip r:embed="rId2"/>
-          <a:stretch>
-            <a:fillRect/>
-          </a:stretch>
-        </p:blipFill>
-        <p:spPr>
-          <a:xfrm>
-            <a:off x="0" y="3039833"/>
-            <a:ext cx="9144000" cy="1953991"/>
-          </a:xfrm>
-          <a:prstGeom prst="rect">
-            <a:avLst/>
-          </a:prstGeom>
-        </p:spPr>
-      </p:pic>
-    </p:spTree>
-    <p:extLst>
-      <p:ext uri="{BB962C8B-B14F-4D97-AF65-F5344CB8AC3E}">
-        <p14:creationId xmlns:p14="http://schemas.microsoft.com/office/powerpoint/2010/main" val="1398163176"/>
-      </p:ext>
-    </p:extLst>
-  </p:cSld>
-  <p:clrMapOvr>
-    <a:masterClrMapping/>
-  </p:clrMapOvr>
-  <p:transition>
-    <p:fade/>
-  </p:transition>
-</p:sld>
-</file>
-
-<file path=ppt/slides/slide59.xml><?xml version="1.0" encoding="utf-8"?>
-<p:sld xmlns:a="http://schemas.openxmlformats.org/drawingml/2006/main" xmlns:r="http://schemas.openxmlformats.org/officeDocument/2006/relationships" xmlns:p="http://schemas.openxmlformats.org/presentationml/2006/main">
-  <p:cSld>
-    <p:spTree>
-      <p:nvGrpSpPr>
-        <p:cNvPr id="1" name=""/>
-        <p:cNvGrpSpPr/>
-        <p:nvPr/>
-      </p:nvGrpSpPr>
-      <p:grpSpPr>
-        <a:xfrm>
-          <a:off x="0" y="0"/>
-          <a:ext cx="0" cy="0"/>
-          <a:chOff x="0" y="0"/>
-          <a:chExt cx="0" cy="0"/>
-        </a:xfrm>
-      </p:grpSpPr>
-      <p:sp>
-        <p:nvSpPr>
-          <p:cNvPr id="2" name="文字版面配置區 2">
-            <a:extLst>
-              <a:ext uri="{FF2B5EF4-FFF2-40B4-BE49-F238E27FC236}">
-                <a16:creationId xmlns:a16="http://schemas.microsoft.com/office/drawing/2014/main" id="{DB2FAA46-9B2A-DC8E-8996-377E71D9CC5C}"/>
-              </a:ext>
-            </a:extLst>
-          </p:cNvPr>
-          <p:cNvSpPr txBox="1">
-            <a:spLocks/>
-          </p:cNvSpPr>
-          <p:nvPr/>
-        </p:nvSpPr>
-        <p:spPr>
-          <a:xfrm>
-            <a:off x="1827994" y="188728"/>
-            <a:ext cx="5488011" cy="990600"/>
-          </a:xfrm>
-          <a:prstGeom prst="rect">
-            <a:avLst/>
-          </a:prstGeom>
-        </p:spPr>
-        <p:txBody>
-          <a:bodyPr tIns="91440" bIns="91440" anchor="b" anchorCtr="0">
-            <a:noAutofit/>
-          </a:bodyPr>
-          <a:lstStyle/>
-          <a:p>
-            <a:pPr algn="just">
-              <a:spcBef>
-                <a:spcPct val="20000"/>
-              </a:spcBef>
-              <a:defRPr/>
-            </a:pPr>
-            <a:r>
-              <a:rPr lang="zh-TW" altLang="en-US" sz="4000" b="1" kern="0" dirty="0">
-                <a:solidFill>
-                  <a:srgbClr val="00B0F0"/>
-                </a:solidFill>
-                <a:effectLst>
-                  <a:outerShdw blurRad="38100" dist="38100" dir="2700000" algn="tl">
-                    <a:srgbClr val="000000">
-                      <a:alpha val="43137"/>
-                    </a:srgbClr>
-                  </a:outerShdw>
-                </a:effectLst>
-                <a:latin typeface="微軟正黑體" panose="020B0604030504040204" pitchFamily="34" charset="-120"/>
-                <a:ea typeface="微軟正黑體" panose="020B0604030504040204" pitchFamily="34" charset="-120"/>
-              </a:rPr>
-              <a:t>如果是</a:t>
-            </a:r>
-            <a:r>
-              <a:rPr lang="en-US" altLang="zh-TW" sz="4000" b="1" kern="0" dirty="0">
-                <a:solidFill>
-                  <a:srgbClr val="00B0F0"/>
-                </a:solidFill>
-                <a:effectLst>
-                  <a:outerShdw blurRad="38100" dist="38100" dir="2700000" algn="tl">
-                    <a:srgbClr val="000000">
-                      <a:alpha val="43137"/>
-                    </a:srgbClr>
-                  </a:outerShdw>
-                </a:effectLst>
-                <a:latin typeface="微軟正黑體" panose="020B0604030504040204" pitchFamily="34" charset="-120"/>
-                <a:ea typeface="微軟正黑體" panose="020B0604030504040204" pitchFamily="34" charset="-120"/>
-              </a:rPr>
-              <a:t>Google </a:t>
-            </a:r>
-            <a:r>
-              <a:rPr lang="en-US" altLang="zh-TW" sz="4000" b="1" kern="0" dirty="0" err="1">
-                <a:solidFill>
-                  <a:srgbClr val="00B0F0"/>
-                </a:solidFill>
-                <a:effectLst>
-                  <a:outerShdw blurRad="38100" dist="38100" dir="2700000" algn="tl">
-                    <a:srgbClr val="000000">
-                      <a:alpha val="43137"/>
-                    </a:srgbClr>
-                  </a:outerShdw>
-                </a:effectLst>
-                <a:latin typeface="微軟正黑體" panose="020B0604030504040204" pitchFamily="34" charset="-120"/>
-                <a:ea typeface="微軟正黑體" panose="020B0604030504040204" pitchFamily="34" charset="-120"/>
-              </a:rPr>
-              <a:t>Colab</a:t>
-            </a:r>
-            <a:endParaRPr lang="zh-TW" altLang="en-US" sz="4000" b="1" kern="0" dirty="0">
-              <a:solidFill>
-                <a:srgbClr val="00B0F0"/>
-              </a:solidFill>
-              <a:effectLst>
-                <a:outerShdw blurRad="38100" dist="38100" dir="2700000" algn="tl">
-                  <a:srgbClr val="000000">
-                    <a:alpha val="43137"/>
-                  </a:srgbClr>
-                </a:outerShdw>
-              </a:effectLst>
-              <a:latin typeface="微軟正黑體" panose="020B0604030504040204" pitchFamily="34" charset="-120"/>
-              <a:ea typeface="微軟正黑體" panose="020B0604030504040204" pitchFamily="34" charset="-120"/>
-            </a:endParaRPr>
-          </a:p>
-        </p:txBody>
-      </p:sp>
-      <p:pic>
-        <p:nvPicPr>
-          <p:cNvPr id="6" name="圖片 5">
-            <a:extLst>
-              <a:ext uri="{FF2B5EF4-FFF2-40B4-BE49-F238E27FC236}">
-                <a16:creationId xmlns:a16="http://schemas.microsoft.com/office/drawing/2014/main" id="{360359E3-2068-957A-287D-F39262BB2196}"/>
-              </a:ext>
-            </a:extLst>
-          </p:cNvPr>
-          <p:cNvPicPr>
-            <a:picLocks noChangeAspect="1"/>
-          </p:cNvPicPr>
-          <p:nvPr/>
-        </p:nvPicPr>
-        <p:blipFill>
-          <a:blip r:embed="rId2"/>
-          <a:stretch>
-            <a:fillRect/>
-          </a:stretch>
-        </p:blipFill>
-        <p:spPr>
-          <a:xfrm>
-            <a:off x="320029" y="1759698"/>
-            <a:ext cx="8503942" cy="4260101"/>
-          </a:xfrm>
-          <a:prstGeom prst="rect">
-            <a:avLst/>
-          </a:prstGeom>
-        </p:spPr>
-      </p:pic>
-    </p:spTree>
-    <p:extLst>
-      <p:ext uri="{BB962C8B-B14F-4D97-AF65-F5344CB8AC3E}">
-        <p14:creationId xmlns:p14="http://schemas.microsoft.com/office/powerpoint/2010/main" val="261148238"/>
       </p:ext>
     </p:extLst>
   </p:cSld>
@@ -39196,338 +35412,6 @@
     <p:extLst>
       <p:ext uri="{BB962C8B-B14F-4D97-AF65-F5344CB8AC3E}">
         <p14:creationId xmlns:p14="http://schemas.microsoft.com/office/powerpoint/2010/main" val="1289338081"/>
-      </p:ext>
-    </p:extLst>
-  </p:cSld>
-  <p:clrMapOvr>
-    <a:masterClrMapping/>
-  </p:clrMapOvr>
-  <p:transition>
-    <p:fade/>
-  </p:transition>
-</p:sld>
-</file>
-
-<file path=ppt/slides/slide60.xml><?xml version="1.0" encoding="utf-8"?>
-<p:sld xmlns:a="http://schemas.openxmlformats.org/drawingml/2006/main" xmlns:r="http://schemas.openxmlformats.org/officeDocument/2006/relationships" xmlns:p="http://schemas.openxmlformats.org/presentationml/2006/main">
-  <p:cSld>
-    <p:spTree>
-      <p:nvGrpSpPr>
-        <p:cNvPr id="1" name=""/>
-        <p:cNvGrpSpPr/>
-        <p:nvPr/>
-      </p:nvGrpSpPr>
-      <p:grpSpPr>
-        <a:xfrm>
-          <a:off x="0" y="0"/>
-          <a:ext cx="0" cy="0"/>
-          <a:chOff x="0" y="0"/>
-          <a:chExt cx="0" cy="0"/>
-        </a:xfrm>
-      </p:grpSpPr>
-      <p:sp>
-        <p:nvSpPr>
-          <p:cNvPr id="2" name="文字版面配置區 2">
-            <a:extLst>
-              <a:ext uri="{FF2B5EF4-FFF2-40B4-BE49-F238E27FC236}">
-                <a16:creationId xmlns:a16="http://schemas.microsoft.com/office/drawing/2014/main" id="{DB2FAA46-9B2A-DC8E-8996-377E71D9CC5C}"/>
-              </a:ext>
-            </a:extLst>
-          </p:cNvPr>
-          <p:cNvSpPr txBox="1">
-            <a:spLocks/>
-          </p:cNvSpPr>
-          <p:nvPr/>
-        </p:nvSpPr>
-        <p:spPr>
-          <a:xfrm>
-            <a:off x="1827994" y="188728"/>
-            <a:ext cx="5488011" cy="990600"/>
-          </a:xfrm>
-          <a:prstGeom prst="rect">
-            <a:avLst/>
-          </a:prstGeom>
-        </p:spPr>
-        <p:txBody>
-          <a:bodyPr tIns="91440" bIns="91440" anchor="b" anchorCtr="0">
-            <a:noAutofit/>
-          </a:bodyPr>
-          <a:lstStyle/>
-          <a:p>
-            <a:pPr algn="just">
-              <a:spcBef>
-                <a:spcPct val="20000"/>
-              </a:spcBef>
-              <a:defRPr/>
-            </a:pPr>
-            <a:r>
-              <a:rPr lang="zh-TW" altLang="en-US" sz="4000" b="1" kern="0" dirty="0">
-                <a:solidFill>
-                  <a:srgbClr val="00B0F0"/>
-                </a:solidFill>
-                <a:effectLst>
-                  <a:outerShdw blurRad="38100" dist="38100" dir="2700000" algn="tl">
-                    <a:srgbClr val="000000">
-                      <a:alpha val="43137"/>
-                    </a:srgbClr>
-                  </a:outerShdw>
-                </a:effectLst>
-                <a:latin typeface="微軟正黑體" panose="020B0604030504040204" pitchFamily="34" charset="-120"/>
-                <a:ea typeface="微軟正黑體" panose="020B0604030504040204" pitchFamily="34" charset="-120"/>
-              </a:rPr>
-              <a:t>如果是</a:t>
-            </a:r>
-            <a:r>
-              <a:rPr lang="en-US" altLang="zh-TW" sz="4000" b="1" kern="0" dirty="0">
-                <a:solidFill>
-                  <a:srgbClr val="00B0F0"/>
-                </a:solidFill>
-                <a:effectLst>
-                  <a:outerShdw blurRad="38100" dist="38100" dir="2700000" algn="tl">
-                    <a:srgbClr val="000000">
-                      <a:alpha val="43137"/>
-                    </a:srgbClr>
-                  </a:outerShdw>
-                </a:effectLst>
-                <a:latin typeface="微軟正黑體" panose="020B0604030504040204" pitchFamily="34" charset="-120"/>
-                <a:ea typeface="微軟正黑體" panose="020B0604030504040204" pitchFamily="34" charset="-120"/>
-              </a:rPr>
-              <a:t>Google </a:t>
-            </a:r>
-            <a:r>
-              <a:rPr lang="en-US" altLang="zh-TW" sz="4000" b="1" kern="0" dirty="0" err="1">
-                <a:solidFill>
-                  <a:srgbClr val="00B0F0"/>
-                </a:solidFill>
-                <a:effectLst>
-                  <a:outerShdw blurRad="38100" dist="38100" dir="2700000" algn="tl">
-                    <a:srgbClr val="000000">
-                      <a:alpha val="43137"/>
-                    </a:srgbClr>
-                  </a:outerShdw>
-                </a:effectLst>
-                <a:latin typeface="微軟正黑體" panose="020B0604030504040204" pitchFamily="34" charset="-120"/>
-                <a:ea typeface="微軟正黑體" panose="020B0604030504040204" pitchFamily="34" charset="-120"/>
-              </a:rPr>
-              <a:t>Colab</a:t>
-            </a:r>
-            <a:endParaRPr lang="zh-TW" altLang="en-US" sz="4000" b="1" kern="0" dirty="0">
-              <a:solidFill>
-                <a:srgbClr val="00B0F0"/>
-              </a:solidFill>
-              <a:effectLst>
-                <a:outerShdw blurRad="38100" dist="38100" dir="2700000" algn="tl">
-                  <a:srgbClr val="000000">
-                    <a:alpha val="43137"/>
-                  </a:srgbClr>
-                </a:outerShdw>
-              </a:effectLst>
-              <a:latin typeface="微軟正黑體" panose="020B0604030504040204" pitchFamily="34" charset="-120"/>
-              <a:ea typeface="微軟正黑體" panose="020B0604030504040204" pitchFamily="34" charset="-120"/>
-            </a:endParaRPr>
-          </a:p>
-        </p:txBody>
-      </p:sp>
-      <p:pic>
-        <p:nvPicPr>
-          <p:cNvPr id="5" name="圖片 4">
-            <a:extLst>
-              <a:ext uri="{FF2B5EF4-FFF2-40B4-BE49-F238E27FC236}">
-                <a16:creationId xmlns:a16="http://schemas.microsoft.com/office/drawing/2014/main" id="{28710C28-DC1F-4C01-1D3B-78FC8B407180}"/>
-              </a:ext>
-            </a:extLst>
-          </p:cNvPr>
-          <p:cNvPicPr>
-            <a:picLocks noChangeAspect="1"/>
-          </p:cNvPicPr>
-          <p:nvPr/>
-        </p:nvPicPr>
-        <p:blipFill>
-          <a:blip r:embed="rId2"/>
-          <a:stretch>
-            <a:fillRect/>
-          </a:stretch>
-        </p:blipFill>
-        <p:spPr>
-          <a:xfrm>
-            <a:off x="511941" y="1478467"/>
-            <a:ext cx="7744907" cy="4831897"/>
-          </a:xfrm>
-          <a:prstGeom prst="rect">
-            <a:avLst/>
-          </a:prstGeom>
-        </p:spPr>
-      </p:pic>
-    </p:spTree>
-    <p:extLst>
-      <p:ext uri="{BB962C8B-B14F-4D97-AF65-F5344CB8AC3E}">
-        <p14:creationId xmlns:p14="http://schemas.microsoft.com/office/powerpoint/2010/main" val="2009663404"/>
-      </p:ext>
-    </p:extLst>
-  </p:cSld>
-  <p:clrMapOvr>
-    <a:masterClrMapping/>
-  </p:clrMapOvr>
-  <p:transition>
-    <p:fade/>
-  </p:transition>
-</p:sld>
-</file>
-
-<file path=ppt/slides/slide61.xml><?xml version="1.0" encoding="utf-8"?>
-<p:sld xmlns:a="http://schemas.openxmlformats.org/drawingml/2006/main" xmlns:r="http://schemas.openxmlformats.org/officeDocument/2006/relationships" xmlns:p="http://schemas.openxmlformats.org/presentationml/2006/main">
-  <p:cSld>
-    <p:spTree>
-      <p:nvGrpSpPr>
-        <p:cNvPr id="1" name=""/>
-        <p:cNvGrpSpPr/>
-        <p:nvPr/>
-      </p:nvGrpSpPr>
-      <p:grpSpPr>
-        <a:xfrm>
-          <a:off x="0" y="0"/>
-          <a:ext cx="0" cy="0"/>
-          <a:chOff x="0" y="0"/>
-          <a:chExt cx="0" cy="0"/>
-        </a:xfrm>
-      </p:grpSpPr>
-      <p:sp>
-        <p:nvSpPr>
-          <p:cNvPr id="2" name="文字版面配置區 2">
-            <a:extLst>
-              <a:ext uri="{FF2B5EF4-FFF2-40B4-BE49-F238E27FC236}">
-                <a16:creationId xmlns:a16="http://schemas.microsoft.com/office/drawing/2014/main" id="{DB2FAA46-9B2A-DC8E-8996-377E71D9CC5C}"/>
-              </a:ext>
-            </a:extLst>
-          </p:cNvPr>
-          <p:cNvSpPr txBox="1">
-            <a:spLocks/>
-          </p:cNvSpPr>
-          <p:nvPr/>
-        </p:nvSpPr>
-        <p:spPr>
-          <a:xfrm>
-            <a:off x="1827994" y="188728"/>
-            <a:ext cx="5488011" cy="990600"/>
-          </a:xfrm>
-          <a:prstGeom prst="rect">
-            <a:avLst/>
-          </a:prstGeom>
-        </p:spPr>
-        <p:txBody>
-          <a:bodyPr tIns="91440" bIns="91440" anchor="b" anchorCtr="0">
-            <a:noAutofit/>
-          </a:bodyPr>
-          <a:lstStyle/>
-          <a:p>
-            <a:pPr algn="just">
-              <a:spcBef>
-                <a:spcPct val="20000"/>
-              </a:spcBef>
-              <a:defRPr/>
-            </a:pPr>
-            <a:r>
-              <a:rPr lang="zh-TW" altLang="en-US" sz="4000" b="1" kern="0" dirty="0">
-                <a:solidFill>
-                  <a:srgbClr val="00B0F0"/>
-                </a:solidFill>
-                <a:effectLst>
-                  <a:outerShdw blurRad="38100" dist="38100" dir="2700000" algn="tl">
-                    <a:srgbClr val="000000">
-                      <a:alpha val="43137"/>
-                    </a:srgbClr>
-                  </a:outerShdw>
-                </a:effectLst>
-                <a:latin typeface="微軟正黑體" panose="020B0604030504040204" pitchFamily="34" charset="-120"/>
-                <a:ea typeface="微軟正黑體" panose="020B0604030504040204" pitchFamily="34" charset="-120"/>
-              </a:rPr>
-              <a:t>如果是</a:t>
-            </a:r>
-            <a:r>
-              <a:rPr lang="en-US" altLang="zh-TW" sz="4000" b="1" kern="0" dirty="0">
-                <a:solidFill>
-                  <a:srgbClr val="00B0F0"/>
-                </a:solidFill>
-                <a:effectLst>
-                  <a:outerShdw blurRad="38100" dist="38100" dir="2700000" algn="tl">
-                    <a:srgbClr val="000000">
-                      <a:alpha val="43137"/>
-                    </a:srgbClr>
-                  </a:outerShdw>
-                </a:effectLst>
-                <a:latin typeface="微軟正黑體" panose="020B0604030504040204" pitchFamily="34" charset="-120"/>
-                <a:ea typeface="微軟正黑體" panose="020B0604030504040204" pitchFamily="34" charset="-120"/>
-              </a:rPr>
-              <a:t>Google </a:t>
-            </a:r>
-            <a:r>
-              <a:rPr lang="en-US" altLang="zh-TW" sz="4000" b="1" kern="0" dirty="0" err="1">
-                <a:solidFill>
-                  <a:srgbClr val="00B0F0"/>
-                </a:solidFill>
-                <a:effectLst>
-                  <a:outerShdw blurRad="38100" dist="38100" dir="2700000" algn="tl">
-                    <a:srgbClr val="000000">
-                      <a:alpha val="43137"/>
-                    </a:srgbClr>
-                  </a:outerShdw>
-                </a:effectLst>
-                <a:latin typeface="微軟正黑體" panose="020B0604030504040204" pitchFamily="34" charset="-120"/>
-                <a:ea typeface="微軟正黑體" panose="020B0604030504040204" pitchFamily="34" charset="-120"/>
-              </a:rPr>
-              <a:t>Colab</a:t>
-            </a:r>
-            <a:endParaRPr lang="zh-TW" altLang="en-US" sz="4000" b="1" kern="0" dirty="0">
-              <a:solidFill>
-                <a:srgbClr val="00B0F0"/>
-              </a:solidFill>
-              <a:effectLst>
-                <a:outerShdw blurRad="38100" dist="38100" dir="2700000" algn="tl">
-                  <a:srgbClr val="000000">
-                    <a:alpha val="43137"/>
-                  </a:srgbClr>
-                </a:outerShdw>
-              </a:effectLst>
-              <a:latin typeface="微軟正黑體" panose="020B0604030504040204" pitchFamily="34" charset="-120"/>
-              <a:ea typeface="微軟正黑體" panose="020B0604030504040204" pitchFamily="34" charset="-120"/>
-            </a:endParaRPr>
-          </a:p>
-        </p:txBody>
-      </p:sp>
-      <p:pic>
-        <p:nvPicPr>
-          <p:cNvPr id="5" name="圖片 4">
-            <a:extLst>
-              <a:ext uri="{FF2B5EF4-FFF2-40B4-BE49-F238E27FC236}">
-                <a16:creationId xmlns:a16="http://schemas.microsoft.com/office/drawing/2014/main" id="{44D56CD6-27D1-281B-E67C-9A7DB94B9284}"/>
-              </a:ext>
-            </a:extLst>
-          </p:cNvPr>
-          <p:cNvPicPr>
-            <a:picLocks noChangeAspect="1"/>
-          </p:cNvPicPr>
-          <p:nvPr/>
-        </p:nvPicPr>
-        <p:blipFill>
-          <a:blip r:embed="rId2"/>
-          <a:stretch>
-            <a:fillRect/>
-          </a:stretch>
-        </p:blipFill>
-        <p:spPr>
-          <a:xfrm>
-            <a:off x="749876" y="1882919"/>
-            <a:ext cx="7186139" cy="3111645"/>
-          </a:xfrm>
-          <a:prstGeom prst="rect">
-            <a:avLst/>
-          </a:prstGeom>
-        </p:spPr>
-      </p:pic>
-    </p:spTree>
-    <p:extLst>
-      <p:ext uri="{BB962C8B-B14F-4D97-AF65-F5344CB8AC3E}">
-        <p14:creationId xmlns:p14="http://schemas.microsoft.com/office/powerpoint/2010/main" val="3194561646"/>
       </p:ext>
     </p:extLst>
   </p:cSld>
